--- a/docs/Farm하니_최종발표.pptx
+++ b/docs/Farm하니_최종발표.pptx
@@ -16,6 +16,7 @@
     <p:sldId id="264" r:id="rId16"/>
     <p:sldId id="265" r:id="rId17"/>
     <p:sldId id="266" r:id="rId18"/>
+    <p:sldId id="267" r:id="rId19"/>
   </p:sldIdLst>
   <p:sldSz cx="12191695" cy="6858000" type="screen4x3"/>
   <p:notesSz cx="6858000" cy="9144000"/>
@@ -774,7 +775,7 @@
           <a:lstStyle/>
           <a:p>
             <a:r>
-              <a:t>안녕하세요, Farm하니 팀입니다. 저희는 공식 식물·작물 관리 문서를 근거로 개인화 상담을 제공하는 RAG 기반 식물 주치의 AI 서비스를 개발했습니다. 발표는 프로젝트 동기, 데이터 파이프라인, RAG 기술 구현과 품질 개선, 서비스 시연 순으로 진행하겠습니다.</a:t>
+              <a:t>안녕하세요, Farm하니 팀입니다. 저희는 공식 식물·작물 관리 문서를 근거로 개인화 상담을 제공하는 RAG 기반 식물 주치의 AI 서비스를 개발했습니다. 발표는 프로젝트 동기, 데이터 파이프라인, RAG 기술 구현과 품질 개선, 아키텍처와 배포, 한계와 확장성, 서비스 시연 순으로 진행하겠습니다.</a:t>
             </a:r>
           </a:p>
         </p:txBody>
@@ -844,7 +845,7 @@
           <a:lstStyle/>
           <a:p>
             <a:r>
-              <a:t>실제 배포된 서비스의 메인 대시보드입니다. 내 식물 카드, 건강 개요, 빠른 AI 진단 버튼이 보입니다. 시연은 회원가입, 식물 등록, 대시보드 확인, AI 상담 순으로 진행합니다. 전문가 모드와 내 식물과 대화하는 1인칭 모드를 선택할 수 있고, 사진을 첨부하면 Vision 분석이 반영되며 답변에는 공식 문서 출처가 함께 표시됩니다.</a:t>
+              <a:t>정직하게 한계를 말씀드리면, 방대한 식물 종에 비해 데이터 수집이 아직 완전하지 않고, RAG 검색도 완벽하다고 말하기는 어렵습니다. 하지만 확장을 위한 준비는 되어 있습니다. 앞으로 소규모 반려식물에 한정하지 않고 규모 있는 농사나 전문적 관리가 필요한 도메인까지 확장할 계획입니다. 대표적으로 PSIS 농약등록정보 100건을 이미 수집해뒀는데, 현재는 안전 참고 전용이지만 usage_scope 설계 덕분에 데이터 재수집 없이 정책 변경만으로 전문 방제 가이드 기능으로 확장할 수 있습니다.</a:t>
             </a:r>
           </a:p>
         </p:txBody>
@@ -914,7 +915,77 @@
           <a:lstStyle/>
           <a:p>
             <a:r>
-              <a:t>이상으로 발표를 마치겠습니다. 향후에는 데이터 커버리지 확장, 물주기 리마인드, 이미지 진단 고도화, 안전한 거절 패턴의 지속 개선을 계획하고 있습니다. 질문 받겠습니다.</a:t>
+              <a:t>실제 배포된 서비스의 메인 대시보드입니다. 내 식물 카드, 건강 개요, 빠른 AI 진단 버튼이 보입니다. 시연은 회원가입, 식물 등록, 대시보드 확인, AI 상담 순으로 진행합니다. 전문가 모드와 내 식물과 대화하는 1인칭 모드를 선택할 수 있고, 사진을 첨부하면 Vision 분석이 반영되며 답변에는 공식 문서 출처가 함께 표시됩니다.</a:t>
+            </a:r>
+          </a:p>
+        </p:txBody>
+      </p:sp>
+      <p:sp>
+        <p:nvSpPr>
+          <p:cNvPr id="4" name="Slide Number Placeholder 3"/>
+          <p:cNvSpPr>
+            <a:spLocks noGrp="1"/>
+          </p:cNvSpPr>
+          <p:nvPr>
+            <p:ph type="sldNum" idx="5" sz="quarter"/>
+          </p:nvPr>
+        </p:nvSpPr>
+        <p:spPr/>
+      </p:sp>
+    </p:spTree>
+  </p:cSld>
+  <p:clrMapOvr>
+    <a:masterClrMapping/>
+  </p:clrMapOvr>
+</p:notes>
+</file>
+
+<file path=ppt/notesSlides/notesSlide12.xml><?xml version="1.0" encoding="utf-8"?>
+<p:notes xmlns:a="http://schemas.openxmlformats.org/drawingml/2006/main" xmlns:p="http://schemas.openxmlformats.org/presentationml/2006/main" xmlns:r="http://schemas.openxmlformats.org/officeDocument/2006/relationships">
+  <p:cSld>
+    <p:spTree>
+      <p:nvGrpSpPr>
+        <p:cNvPr id="1" name=""/>
+        <p:cNvGrpSpPr/>
+        <p:nvPr/>
+      </p:nvGrpSpPr>
+      <p:grpSpPr>
+        <a:xfrm>
+          <a:off x="0" y="0"/>
+          <a:ext cx="0" cy="0"/>
+          <a:chOff x="0" y="0"/>
+          <a:chExt cx="0" cy="0"/>
+        </a:xfrm>
+      </p:grpSpPr>
+      <p:sp>
+        <p:nvSpPr>
+          <p:cNvPr id="2" name="Slide Image Placeholder 1"/>
+          <p:cNvSpPr>
+            <a:spLocks noGrp="1"/>
+          </p:cNvSpPr>
+          <p:nvPr>
+            <p:ph type="sldImg" idx="2"/>
+          </p:nvPr>
+        </p:nvSpPr>
+        <p:spPr/>
+      </p:sp>
+      <p:sp>
+        <p:nvSpPr>
+          <p:cNvPr id="3" name="Notes Placeholder 2"/>
+          <p:cNvSpPr>
+            <a:spLocks noGrp="1"/>
+          </p:cNvSpPr>
+          <p:nvPr>
+            <p:ph type="body" idx="3" sz="quarter"/>
+          </p:nvPr>
+        </p:nvSpPr>
+        <p:spPr/>
+        <p:txBody>
+          <a:bodyPr/>
+          <a:lstStyle/>
+          <a:p>
+            <a:r>
+              <a:t>이상으로 발표를 마치겠습니다. 향후에는 데이터 커버리지 확장, 물주기 리마인드, 이미지 진단 고도화, 그리고 PSIS 데이터를 활용한 전문 농가 대상 방제 가이드 확장을 계획하고 있습니다. 질문 받겠습니다.</a:t>
             </a:r>
           </a:p>
         </p:txBody>
@@ -984,7 +1055,7 @@
           <a:lstStyle/>
           <a:p>
             <a:r>
-              <a:t>발표 순서입니다. 프로젝트 동기와 기존 서비스의 한계, 데이터 수집·전처리, RAG 기술 구현과 품질 개선, 서비스 시연, Q&amp;A 순으로 진행하겠습니다.</a:t>
+              <a:t>발표 순서입니다. 프로젝트 동기와 기존 서비스의 한계, 데이터 수집·전처리, RAG 기술 구현과 품질 개선, 시스템 아키텍처와 배포, 한계와 확장성, 서비스 시연, Q&amp;A 순으로 진행하겠습니다.</a:t>
             </a:r>
           </a:p>
         </p:txBody>
@@ -1194,7 +1265,7 @@
           <a:lstStyle/>
           <a:p>
             <a:r>
-              <a:t>데이터는 농사로, NCPMS 병해충 정보, 국립수목원 도감, AI Hub, PSIS 농약 정보 등 12개 공공·공식 소스에서 수집했고, 최종 1,000건의 청크를 Supabase에 통합 적재했습니다. category로 문서 성격을 구분하고 usage_scope로 RAG 사용 범위를 제어해 농약 정보는 안전 참고용으로만 쓰이도록 관리합니다.</a:t>
+              <a:t>데이터는 농사로, NCPMS 병해충 정보, AI Hub, 국립수목원 도감, PSIS 농약 정보, 농업날씨365 등 공공·공식 소스에서 수집했고, 최종 1,682건의 청크를 Supabase에 통합 적재했습니다. 농사로 계열이 711건, NCPMS 병해충이 479건으로 가장 큰 비중입니다. category로 문서 성격을 구분하고 usage_scope로 사용 범위를 제어해, 농약 정보는 안전 참고 전용으로만 쓰이도록 관리합니다.</a:t>
             </a:r>
           </a:p>
         </p:txBody>
@@ -1264,7 +1335,7 @@
           <a:lstStyle/>
           <a:p>
             <a:r>
-              <a:t>전처리 파이프라인은 수집, JSONL 정규화, 텍스트 클렌징, 식물명 메타 태깅, 청킹, 임베딩, Supabase 적재의 7단계로 재현 가능하게 구축했습니다. 청킹은 2200자 크기에 250자 오버랩, 임베딩은 text-embedding-3-small 1536차원을 사용했습니다. 자동 검증 스크립트로 최종 PASS를 확인했습니다.</a:t>
+              <a:t>전처리 파이프라인은 수집, JSONL 정규화, 클렌징, 식물명 메타 태깅, 청킹, 임베딩, Supabase 적재의 7단계로 재현 가능하게 구축했습니다. 청킹은 출처별 가변 전략을 적용했습니다. 기본값은 2200자에 오버랩 250자이고, 증상·예방 정보가 밀도 높은 NCPMS 병해충 문서는 1400자, 물주기·광도 같은 항목형 정보가 많은 농사로 문서는 1200자로 더 잘게 나눴습니다. 임베딩은 1536차원이며 자동 검증 스크립트로 최종 PASS를 확인했습니다.</a:t>
             </a:r>
           </a:p>
         </p:txBody>
@@ -1334,7 +1405,7 @@
           <a:lstStyle/>
           <a:p>
             <a:r>
-              <a:t>시스템은 Vercel에 React 프론트, Render에 FastAPI 백엔드를 배포하고, Supabase가 인증·관계형 데이터·pgvector 벡터 검색·이미지 스토리지를 통합 담당합니다. LLM은 OpenAI GPT-4o-mini를 채팅, Vision, 임베딩에 사용합니다. 전 구간 실배포가 완료된 상태입니다.</a:t>
+              <a:t>RAG 파이프라인은 LangGraph StateGraph로 구현한 10단계 에이전틱 워크플로우입니다. 1~4단계에서 사용자 맥락을 구조화하고, 5~6단계에서 쿼리 확장과 하이브리드 검색으로 후보를 폭넓게 수집합니다. 핵심은 빨간색 7단계 grade_or_rerank로, LLM이 문서를 하나씩 검증해 무관한 문서를 탈락시켜 환각을 차단합니다. 8~9단계에서 모드별 답변 생성과 안전 고지 조립, 10단계에서 상담 이력을 저장합니다.</a:t>
             </a:r>
           </a:p>
         </p:txBody>
@@ -1404,7 +1475,7 @@
           <a:lstStyle/>
           <a:p>
             <a:r>
-              <a:t>RAG 파이프라인은 LangGraph StateGraph로 구현한 10단계 에이전틱 워크플로우입니다. 왼쪽 그래프처럼 입력 검증부터 시작해, 1~4단계에서 사용자 맥락을 구조화하고, 5~6단계에서 쿼리 확장과 하이브리드 검색으로 후보를 폭넓게 수집합니다. 핵심은 빨간색 7단계 grade_or_rerank로, LLM이 문서를 하나씩 검증해 무관한 문서를 탈락시켜 환각을 차단합니다. 8~9단계에서 모드별 답변 생성과 안전 고지 조립, 10단계에서 상담 이력을 저장합니다.</a:t>
+              <a:t>초기에는 몬스테라 질문에 윌마나 무화과 문서가 검색되는 오매칭과, 무관 문서 강제 주입으로 인한 환각 문제가 있었습니다. 임계값을 낮춰 후보를 넓게 수집하고 grade_or_rerank에서 엄격히 걸러내는 Two-Stage Retrieval과 조사 제거 휴리스틱, RRF 병합, 쿼리 확장을 적용해 검색 정확도가 3.58에서 4.83점으로 개선됐고 사진 반영은 만점을 기록했습니다.</a:t>
             </a:r>
           </a:p>
         </p:txBody>
@@ -1474,7 +1545,7 @@
           <a:lstStyle/>
           <a:p>
             <a:r>
-              <a:t>초기에는 몬스테라 질문에 윌마나 무화과 문서가 검색되는 오매칭과, 무관 문서 강제 주입으로 인한 환각 문제가 있었습니다. 임계값을 낮춰 후보를 넓게 수집하고 grade_or_rerank에서 엄격히 걸러내는 Two-Stage Retrieval과 조사 제거 휴리스틱, RRF 병합, 쿼리 확장을 적용해 검색 정확도가 3.58에서 4.83점으로 개선됐고 사진 반영은 만점을 기록했습니다.</a:t>
+              <a:t>지금까지 설명드린 RAG 시스템이 실제로 배포된 구조입니다. Vercel에 React 프론트, Render에 FastAPI 백엔드를 배포하고, Supabase가 인증·관계형 데이터·pgvector 벡터 검색·이미지 스토리지를 통합 담당합니다. LLM은 OpenAI GPT-4o-mini를 채팅, Vision, 임베딩에 사용합니다. service role key는 백엔드에서만 사용해 보안을 유지하며, 전 구간 실배포가 완료된 상태입니다.</a:t>
             </a:r>
           </a:p>
         </p:txBody>
@@ -4984,7 +5055,7 @@
                 </a:solidFill>
                 <a:latin typeface="맑은 고딕"/>
               </a:rPr>
-              <a:t>서비스 시연</a:t>
+              <a:t>현재의 한계와 확장 계획</a:t>
             </a:r>
           </a:p>
         </p:txBody>
@@ -5023,7 +5094,7 @@
                 </a:solidFill>
                 <a:latin typeface="맑은 고딕"/>
               </a:rPr>
-              <a:t>실제 배포 서비스 — 메인 대시보드</a:t>
+              <a:t>정직한 한계 인식 → 도메인 확장 로드맵</a:t>
             </a:r>
           </a:p>
         </p:txBody>
@@ -5072,90 +5143,129 @@
           </a:p>
         </p:txBody>
       </p:sp>
-      <p:pic>
-        <p:nvPicPr>
-          <p:cNvPr id="6" name="Picture 5" descr="farm시연.png"/>
-          <p:cNvPicPr>
-            <a:picLocks noChangeAspect="1"/>
-          </p:cNvPicPr>
-          <p:nvPr/>
-        </p:nvPicPr>
-        <p:blipFill>
-          <a:blip r:embed="rId2"/>
-          <a:stretch>
-            <a:fillRect/>
-          </a:stretch>
-        </p:blipFill>
-        <p:spPr>
-          <a:xfrm>
-            <a:off x="502920" y="1417320"/>
-            <a:ext cx="7863840" cy="4471107"/>
-          </a:xfrm>
-          <a:prstGeom prst="rect">
-            <a:avLst/>
-          </a:prstGeom>
-          <a:ln w="15875">
+      <p:sp>
+        <p:nvSpPr>
+          <p:cNvPr id="6" name="Rounded Rectangle 5"/>
+          <p:cNvSpPr/>
+          <p:nvPr/>
+        </p:nvSpPr>
+        <p:spPr>
+          <a:xfrm>
+            <a:off x="548640" y="1463040"/>
+            <a:ext cx="5349240" cy="2286000"/>
+          </a:xfrm>
+          <a:prstGeom prst="roundRect">
+            <a:avLst/>
+          </a:prstGeom>
+          <a:solidFill>
+            <a:srgbClr val="FFFFFF"/>
+          </a:solidFill>
+          <a:ln w="12700">
             <a:solidFill>
               <a:srgbClr val="E8E8E8"/>
             </a:solidFill>
           </a:ln>
-        </p:spPr>
-      </p:pic>
-      <p:sp>
-        <p:nvSpPr>
-          <p:cNvPr id="7" name="TextBox 6"/>
-          <p:cNvSpPr txBox="1"/>
-          <p:nvPr/>
-        </p:nvSpPr>
-        <p:spPr>
-          <a:xfrm>
-            <a:off x="521207" y="5943600"/>
-            <a:ext cx="7863840" cy="365760"/>
+          <a:effectLst/>
+        </p:spPr>
+        <p:style>
+          <a:lnRef idx="1">
+            <a:schemeClr val="accent1"/>
+          </a:lnRef>
+          <a:fillRef idx="3">
+            <a:schemeClr val="accent1"/>
+          </a:fillRef>
+          <a:effectRef idx="2">
+            <a:schemeClr val="accent1"/>
+          </a:effectRef>
+          <a:fontRef idx="minor">
+            <a:schemeClr val="lt1"/>
+          </a:fontRef>
+        </p:style>
+        <p:txBody>
+          <a:bodyPr rtlCol="0" anchor="ctr" wrap="square" lIns="203200" rIns="203200" tIns="152400"/>
+          <a:lstStyle/>
+          <a:p>
+            <a:pPr algn="l">
+              <a:spcAft>
+                <a:spcPts val="600"/>
+              </a:spcAft>
+            </a:pPr>
+            <a:r>
+              <a:rPr sz="1550" b="1">
+                <a:solidFill>
+                  <a:srgbClr val="C0453E"/>
+                </a:solidFill>
+                <a:latin typeface="맑은 고딕"/>
+              </a:rPr>
+              <a:t>현재의 한계</a:t>
+            </a:r>
+          </a:p>
+          <a:p>
+            <a:pPr algn="l">
+              <a:lnSpc>
+                <a:spcPct val="118000"/>
+              </a:lnSpc>
+            </a:pPr>
+            <a:r>
+              <a:rPr sz="1300" b="0">
+                <a:solidFill>
+                  <a:srgbClr val="3A3A3A"/>
+                </a:solidFill>
+                <a:latin typeface="맑은 고딕"/>
+              </a:rPr>
+              <a:t>·  방대한 식물 종 대비 데이터 수집이 아직 완전하지 않음 — 문서가 없는 식물은 상담 근거 부족</a:t>
+            </a:r>
+          </a:p>
+          <a:p>
+            <a:pPr algn="l">
+              <a:lnSpc>
+                <a:spcPct val="118000"/>
+              </a:lnSpc>
+            </a:pPr>
+            <a:r>
+              <a:rPr sz="1300" b="0">
+                <a:solidFill>
+                  <a:srgbClr val="3A3A3A"/>
+                </a:solidFill>
+                <a:latin typeface="맑은 고딕"/>
+              </a:rPr>
+              <a:t>·  RAG 검색이 완벽하다고 말하기는 어려움 — 무정보 상황의 거절 패턴 등 지속 고도화 필요</a:t>
+            </a:r>
+          </a:p>
+          <a:p>
+            <a:pPr algn="l">
+              <a:lnSpc>
+                <a:spcPct val="118000"/>
+              </a:lnSpc>
+            </a:pPr>
+            <a:r>
+              <a:rPr sz="1300" b="0">
+                <a:solidFill>
+                  <a:srgbClr val="3A3A3A"/>
+                </a:solidFill>
+                <a:latin typeface="맑은 고딕"/>
+              </a:rPr>
+              <a:t>·  이미지 진단은 보조 수준 — 정밀 병해 판별은 향후 과제</a:t>
+            </a:r>
+          </a:p>
+        </p:txBody>
+      </p:sp>
+      <p:sp>
+        <p:nvSpPr>
+          <p:cNvPr id="7" name="Rectangle 6"/>
+          <p:cNvSpPr/>
+          <p:nvPr/>
+        </p:nvSpPr>
+        <p:spPr>
+          <a:xfrm>
+            <a:off x="548640" y="1463040"/>
+            <a:ext cx="5349240" cy="73152"/>
           </a:xfrm>
           <a:prstGeom prst="rect">
             <a:avLst/>
           </a:prstGeom>
-          <a:noFill/>
-        </p:spPr>
-        <p:txBody>
-          <a:bodyPr wrap="square" anchor="t" lIns="101600" rIns="101600" tIns="50800" bIns="50800">
-            <a:spAutoFit/>
-          </a:bodyPr>
-          <a:lstStyle/>
-          <a:p>
-            <a:pPr algn="l">
-              <a:lnSpc>
-                <a:spcPct val="112000"/>
-              </a:lnSpc>
-            </a:pPr>
-            <a:r>
-              <a:rPr sz="1150" b="0">
-                <a:solidFill>
-                  <a:srgbClr val="8A8A8A"/>
-                </a:solidFill>
-                <a:latin typeface="맑은 고딕"/>
-              </a:rPr>
-              <a:t>▲ Farm하니? 메인 대시보드 — 내 식물 카드 · 건강 개요 · 빠른 AI 진단</a:t>
-            </a:r>
-          </a:p>
-        </p:txBody>
-      </p:sp>
-      <p:sp>
-        <p:nvSpPr>
-          <p:cNvPr id="8" name="Oval 7"/>
-          <p:cNvSpPr/>
-          <p:nvPr/>
-        </p:nvSpPr>
-        <p:spPr>
-          <a:xfrm>
-            <a:off x="8641080" y="1472184"/>
-            <a:ext cx="384048" cy="384048"/>
-          </a:xfrm>
-          <a:prstGeom prst="ellipse">
-            <a:avLst/>
-          </a:prstGeom>
           <a:solidFill>
-            <a:srgbClr val="1E4D2B"/>
+            <a:srgbClr val="C0453E"/>
           </a:solidFill>
           <a:ln>
             <a:noFill/>
@@ -5177,81 +5287,136 @@
           </a:fontRef>
         </p:style>
         <p:txBody>
-          <a:bodyPr rtlCol="0" anchor="ctr" wrap="square" lIns="101600" rIns="101600" tIns="50800" bIns="50800"/>
-          <a:lstStyle/>
-          <a:p>
-            <a:pPr algn="ctr">
-              <a:lnSpc>
-                <a:spcPct val="112000"/>
-              </a:lnSpc>
-            </a:pPr>
-            <a:r>
-              <a:rPr sz="1400" b="1">
-                <a:solidFill>
-                  <a:srgbClr val="7CB342"/>
-                </a:solidFill>
-                <a:latin typeface="맑은 고딕"/>
-              </a:rPr>
-              <a:t>1</a:t>
-            </a:r>
-          </a:p>
-        </p:txBody>
-      </p:sp>
-      <p:sp>
-        <p:nvSpPr>
-          <p:cNvPr id="9" name="TextBox 8"/>
-          <p:cNvSpPr txBox="1"/>
-          <p:nvPr/>
-        </p:nvSpPr>
-        <p:spPr>
-          <a:xfrm>
-            <a:off x="9144000" y="1435608"/>
-            <a:ext cx="2743200" cy="502920"/>
+          <a:bodyPr rtlCol="0" anchor="ctr"/>
+          <a:lstStyle/>
+          <a:p>
+            <a:pPr algn="ctr"/>
+          </a:p>
+        </p:txBody>
+      </p:sp>
+      <p:sp>
+        <p:nvSpPr>
+          <p:cNvPr id="8" name="Rounded Rectangle 7"/>
+          <p:cNvSpPr/>
+          <p:nvPr/>
+        </p:nvSpPr>
+        <p:spPr>
+          <a:xfrm>
+            <a:off x="6263640" y="1463040"/>
+            <a:ext cx="5394960" cy="2286000"/>
+          </a:xfrm>
+          <a:prstGeom prst="roundRect">
+            <a:avLst/>
+          </a:prstGeom>
+          <a:solidFill>
+            <a:srgbClr val="FFFFFF"/>
+          </a:solidFill>
+          <a:ln w="12700">
+            <a:solidFill>
+              <a:srgbClr val="E8E8E8"/>
+            </a:solidFill>
+          </a:ln>
+          <a:effectLst/>
+        </p:spPr>
+        <p:style>
+          <a:lnRef idx="1">
+            <a:schemeClr val="accent1"/>
+          </a:lnRef>
+          <a:fillRef idx="3">
+            <a:schemeClr val="accent1"/>
+          </a:fillRef>
+          <a:effectRef idx="2">
+            <a:schemeClr val="accent1"/>
+          </a:effectRef>
+          <a:fontRef idx="minor">
+            <a:schemeClr val="lt1"/>
+          </a:fontRef>
+        </p:style>
+        <p:txBody>
+          <a:bodyPr rtlCol="0" anchor="ctr" wrap="square" lIns="203200" rIns="203200" tIns="152400"/>
+          <a:lstStyle/>
+          <a:p>
+            <a:pPr algn="l">
+              <a:spcAft>
+                <a:spcPts val="600"/>
+              </a:spcAft>
+            </a:pPr>
+            <a:r>
+              <a:rPr sz="1550" b="1">
+                <a:solidFill>
+                  <a:srgbClr val="3B7A57"/>
+                </a:solidFill>
+                <a:latin typeface="맑은 고딕"/>
+              </a:rPr>
+              <a:t>확장 계획</a:t>
+            </a:r>
+          </a:p>
+          <a:p>
+            <a:pPr algn="l">
+              <a:lnSpc>
+                <a:spcPct val="118000"/>
+              </a:lnSpc>
+            </a:pPr>
+            <a:r>
+              <a:rPr sz="1300" b="1">
+                <a:solidFill>
+                  <a:srgbClr val="1E4D2B"/>
+                </a:solidFill>
+                <a:latin typeface="맑은 고딕"/>
+              </a:rPr>
+              <a:t>·  소규모 반려식물 → 대규모 농사·전문 관리 도메인으로 확장</a:t>
+            </a:r>
+          </a:p>
+          <a:p>
+            <a:pPr algn="l">
+              <a:lnSpc>
+                <a:spcPct val="118000"/>
+              </a:lnSpc>
+            </a:pPr>
+            <a:r>
+              <a:rPr sz="1300" b="0">
+                <a:solidFill>
+                  <a:srgbClr val="3A3A3A"/>
+                </a:solidFill>
+                <a:latin typeface="맑은 고딕"/>
+              </a:rPr>
+              <a:t>·  규모 있는 재배 농가, 전문적 관리가 필요한 작물까지 반영</a:t>
+            </a:r>
+          </a:p>
+          <a:p>
+            <a:pPr algn="l">
+              <a:lnSpc>
+                <a:spcPct val="118000"/>
+              </a:lnSpc>
+            </a:pPr>
+            <a:r>
+              <a:rPr sz="1300" b="0">
+                <a:solidFill>
+                  <a:srgbClr val="3A3A3A"/>
+                </a:solidFill>
+                <a:latin typeface="맑은 고딕"/>
+              </a:rPr>
+              <a:t>·  데이터 커버리지 단계적 확장 (5차 확장 로드맵 진행 중)</a:t>
+            </a:r>
+          </a:p>
+        </p:txBody>
+      </p:sp>
+      <p:sp>
+        <p:nvSpPr>
+          <p:cNvPr id="9" name="Rectangle 8"/>
+          <p:cNvSpPr/>
+          <p:nvPr/>
+        </p:nvSpPr>
+        <p:spPr>
+          <a:xfrm>
+            <a:off x="6263640" y="1463040"/>
+            <a:ext cx="5394960" cy="73152"/>
           </a:xfrm>
           <a:prstGeom prst="rect">
             <a:avLst/>
           </a:prstGeom>
-          <a:noFill/>
-        </p:spPr>
-        <p:txBody>
-          <a:bodyPr wrap="square" anchor="t" lIns="101600" rIns="101600" tIns="50800" bIns="50800">
-            <a:spAutoFit/>
-          </a:bodyPr>
-          <a:lstStyle/>
-          <a:p>
-            <a:pPr algn="l">
-              <a:lnSpc>
-                <a:spcPct val="112000"/>
-              </a:lnSpc>
-            </a:pPr>
-            <a:r>
-              <a:rPr sz="1250" b="1">
-                <a:solidFill>
-                  <a:srgbClr val="3A3A3A"/>
-                </a:solidFill>
-                <a:latin typeface="맑은 고딕"/>
-              </a:rPr>
-              <a:t>로그인 / 회원가입</a:t>
-            </a:r>
-          </a:p>
-        </p:txBody>
-      </p:sp>
-      <p:sp>
-        <p:nvSpPr>
-          <p:cNvPr id="10" name="Oval 9"/>
-          <p:cNvSpPr/>
-          <p:nvPr/>
-        </p:nvSpPr>
-        <p:spPr>
-          <a:xfrm>
-            <a:off x="8641080" y="2039112"/>
-            <a:ext cx="384048" cy="384048"/>
-          </a:xfrm>
-          <a:prstGeom prst="ellipse">
-            <a:avLst/>
-          </a:prstGeom>
           <a:solidFill>
-            <a:srgbClr val="1E4D2B"/>
+            <a:srgbClr val="7CB342"/>
           </a:solidFill>
           <a:ln>
             <a:noFill/>
@@ -5273,459 +5438,23 @@
           </a:fontRef>
         </p:style>
         <p:txBody>
-          <a:bodyPr rtlCol="0" anchor="ctr" wrap="square" lIns="101600" rIns="101600" tIns="50800" bIns="50800"/>
-          <a:lstStyle/>
-          <a:p>
-            <a:pPr algn="ctr">
-              <a:lnSpc>
-                <a:spcPct val="112000"/>
-              </a:lnSpc>
-            </a:pPr>
-            <a:r>
-              <a:rPr sz="1400" b="1">
-                <a:solidFill>
-                  <a:srgbClr val="7CB342"/>
-                </a:solidFill>
-                <a:latin typeface="맑은 고딕"/>
-              </a:rPr>
-              <a:t>2</a:t>
-            </a:r>
-          </a:p>
-        </p:txBody>
-      </p:sp>
-      <p:sp>
-        <p:nvSpPr>
-          <p:cNvPr id="11" name="TextBox 10"/>
-          <p:cNvSpPr txBox="1"/>
-          <p:nvPr/>
-        </p:nvSpPr>
-        <p:spPr>
-          <a:xfrm>
-            <a:off x="9144000" y="2002536"/>
-            <a:ext cx="2743200" cy="502920"/>
-          </a:xfrm>
-          <a:prstGeom prst="rect">
-            <a:avLst/>
-          </a:prstGeom>
-          <a:noFill/>
-        </p:spPr>
-        <p:txBody>
-          <a:bodyPr wrap="square" anchor="t" lIns="101600" rIns="101600" tIns="50800" bIns="50800">
-            <a:spAutoFit/>
-          </a:bodyPr>
-          <a:lstStyle/>
-          <a:p>
-            <a:pPr algn="l">
-              <a:lnSpc>
-                <a:spcPct val="112000"/>
-              </a:lnSpc>
-            </a:pPr>
-            <a:r>
-              <a:rPr sz="1250" b="1">
-                <a:solidFill>
-                  <a:srgbClr val="3A3A3A"/>
-                </a:solidFill>
-                <a:latin typeface="맑은 고딕"/>
-              </a:rPr>
-              <a:t>내 식물 등록 (품종 자동완성 + 사진)</a:t>
-            </a:r>
-          </a:p>
-        </p:txBody>
-      </p:sp>
-      <p:sp>
-        <p:nvSpPr>
-          <p:cNvPr id="12" name="Oval 11"/>
+          <a:bodyPr rtlCol="0" anchor="ctr"/>
+          <a:lstStyle/>
+          <a:p>
+            <a:pPr algn="ctr"/>
+          </a:p>
+        </p:txBody>
+      </p:sp>
+      <p:sp>
+        <p:nvSpPr>
+          <p:cNvPr id="10" name="Rounded Rectangle 9"/>
           <p:cNvSpPr/>
           <p:nvPr/>
         </p:nvSpPr>
         <p:spPr>
           <a:xfrm>
-            <a:off x="8641080" y="2606040"/>
-            <a:ext cx="384048" cy="384048"/>
-          </a:xfrm>
-          <a:prstGeom prst="ellipse">
-            <a:avLst/>
-          </a:prstGeom>
-          <a:solidFill>
-            <a:srgbClr val="1E4D2B"/>
-          </a:solidFill>
-          <a:ln>
-            <a:noFill/>
-          </a:ln>
-          <a:effectLst/>
-        </p:spPr>
-        <p:style>
-          <a:lnRef idx="1">
-            <a:schemeClr val="accent1"/>
-          </a:lnRef>
-          <a:fillRef idx="3">
-            <a:schemeClr val="accent1"/>
-          </a:fillRef>
-          <a:effectRef idx="2">
-            <a:schemeClr val="accent1"/>
-          </a:effectRef>
-          <a:fontRef idx="minor">
-            <a:schemeClr val="lt1"/>
-          </a:fontRef>
-        </p:style>
-        <p:txBody>
-          <a:bodyPr rtlCol="0" anchor="ctr" wrap="square" lIns="101600" rIns="101600" tIns="50800" bIns="50800"/>
-          <a:lstStyle/>
-          <a:p>
-            <a:pPr algn="ctr">
-              <a:lnSpc>
-                <a:spcPct val="112000"/>
-              </a:lnSpc>
-            </a:pPr>
-            <a:r>
-              <a:rPr sz="1400" b="1">
-                <a:solidFill>
-                  <a:srgbClr val="7CB342"/>
-                </a:solidFill>
-                <a:latin typeface="맑은 고딕"/>
-              </a:rPr>
-              <a:t>3</a:t>
-            </a:r>
-          </a:p>
-        </p:txBody>
-      </p:sp>
-      <p:sp>
-        <p:nvSpPr>
-          <p:cNvPr id="13" name="TextBox 12"/>
-          <p:cNvSpPr txBox="1"/>
-          <p:nvPr/>
-        </p:nvSpPr>
-        <p:spPr>
-          <a:xfrm>
-            <a:off x="9144000" y="2569464"/>
-            <a:ext cx="2743200" cy="502920"/>
-          </a:xfrm>
-          <a:prstGeom prst="rect">
-            <a:avLst/>
-          </a:prstGeom>
-          <a:noFill/>
-        </p:spPr>
-        <p:txBody>
-          <a:bodyPr wrap="square" anchor="t" lIns="101600" rIns="101600" tIns="50800" bIns="50800">
-            <a:spAutoFit/>
-          </a:bodyPr>
-          <a:lstStyle/>
-          <a:p>
-            <a:pPr algn="l">
-              <a:lnSpc>
-                <a:spcPct val="112000"/>
-              </a:lnSpc>
-            </a:pPr>
-            <a:r>
-              <a:rPr sz="1250" b="1">
-                <a:solidFill>
-                  <a:srgbClr val="3A3A3A"/>
-                </a:solidFill>
-                <a:latin typeface="맑은 고딕"/>
-              </a:rPr>
-              <a:t>대시보드에서 상태 확인</a:t>
-            </a:r>
-          </a:p>
-        </p:txBody>
-      </p:sp>
-      <p:sp>
-        <p:nvSpPr>
-          <p:cNvPr id="14" name="Oval 13"/>
-          <p:cNvSpPr/>
-          <p:nvPr/>
-        </p:nvSpPr>
-        <p:spPr>
-          <a:xfrm>
-            <a:off x="8641080" y="3172968"/>
-            <a:ext cx="384048" cy="384048"/>
-          </a:xfrm>
-          <a:prstGeom prst="ellipse">
-            <a:avLst/>
-          </a:prstGeom>
-          <a:solidFill>
-            <a:srgbClr val="1E4D2B"/>
-          </a:solidFill>
-          <a:ln>
-            <a:noFill/>
-          </a:ln>
-          <a:effectLst/>
-        </p:spPr>
-        <p:style>
-          <a:lnRef idx="1">
-            <a:schemeClr val="accent1"/>
-          </a:lnRef>
-          <a:fillRef idx="3">
-            <a:schemeClr val="accent1"/>
-          </a:fillRef>
-          <a:effectRef idx="2">
-            <a:schemeClr val="accent1"/>
-          </a:effectRef>
-          <a:fontRef idx="minor">
-            <a:schemeClr val="lt1"/>
-          </a:fontRef>
-        </p:style>
-        <p:txBody>
-          <a:bodyPr rtlCol="0" anchor="ctr" wrap="square" lIns="101600" rIns="101600" tIns="50800" bIns="50800"/>
-          <a:lstStyle/>
-          <a:p>
-            <a:pPr algn="ctr">
-              <a:lnSpc>
-                <a:spcPct val="112000"/>
-              </a:lnSpc>
-            </a:pPr>
-            <a:r>
-              <a:rPr sz="1400" b="1">
-                <a:solidFill>
-                  <a:srgbClr val="7CB342"/>
-                </a:solidFill>
-                <a:latin typeface="맑은 고딕"/>
-              </a:rPr>
-              <a:t>4</a:t>
-            </a:r>
-          </a:p>
-        </p:txBody>
-      </p:sp>
-      <p:sp>
-        <p:nvSpPr>
-          <p:cNvPr id="15" name="TextBox 14"/>
-          <p:cNvSpPr txBox="1"/>
-          <p:nvPr/>
-        </p:nvSpPr>
-        <p:spPr>
-          <a:xfrm>
-            <a:off x="9144000" y="3136392"/>
-            <a:ext cx="2743200" cy="502920"/>
-          </a:xfrm>
-          <a:prstGeom prst="rect">
-            <a:avLst/>
-          </a:prstGeom>
-          <a:noFill/>
-        </p:spPr>
-        <p:txBody>
-          <a:bodyPr wrap="square" anchor="t" lIns="101600" rIns="101600" tIns="50800" bIns="50800">
-            <a:spAutoFit/>
-          </a:bodyPr>
-          <a:lstStyle/>
-          <a:p>
-            <a:pPr algn="l">
-              <a:lnSpc>
-                <a:spcPct val="112000"/>
-              </a:lnSpc>
-            </a:pPr>
-            <a:r>
-              <a:rPr sz="1250" b="1">
-                <a:solidFill>
-                  <a:srgbClr val="3A3A3A"/>
-                </a:solidFill>
-                <a:latin typeface="맑은 고딕"/>
-              </a:rPr>
-              <a:t>AI 상담 — 전문가 / 내 식물과 대화</a:t>
-            </a:r>
-          </a:p>
-        </p:txBody>
-      </p:sp>
-      <p:sp>
-        <p:nvSpPr>
-          <p:cNvPr id="16" name="Oval 15"/>
-          <p:cNvSpPr/>
-          <p:nvPr/>
-        </p:nvSpPr>
-        <p:spPr>
-          <a:xfrm>
-            <a:off x="8641080" y="3739896"/>
-            <a:ext cx="384048" cy="384048"/>
-          </a:xfrm>
-          <a:prstGeom prst="ellipse">
-            <a:avLst/>
-          </a:prstGeom>
-          <a:solidFill>
-            <a:srgbClr val="1E4D2B"/>
-          </a:solidFill>
-          <a:ln>
-            <a:noFill/>
-          </a:ln>
-          <a:effectLst/>
-        </p:spPr>
-        <p:style>
-          <a:lnRef idx="1">
-            <a:schemeClr val="accent1"/>
-          </a:lnRef>
-          <a:fillRef idx="3">
-            <a:schemeClr val="accent1"/>
-          </a:fillRef>
-          <a:effectRef idx="2">
-            <a:schemeClr val="accent1"/>
-          </a:effectRef>
-          <a:fontRef idx="minor">
-            <a:schemeClr val="lt1"/>
-          </a:fontRef>
-        </p:style>
-        <p:txBody>
-          <a:bodyPr rtlCol="0" anchor="ctr" wrap="square" lIns="101600" rIns="101600" tIns="50800" bIns="50800"/>
-          <a:lstStyle/>
-          <a:p>
-            <a:pPr algn="ctr">
-              <a:lnSpc>
-                <a:spcPct val="112000"/>
-              </a:lnSpc>
-            </a:pPr>
-            <a:r>
-              <a:rPr sz="1400" b="1">
-                <a:solidFill>
-                  <a:srgbClr val="7CB342"/>
-                </a:solidFill>
-                <a:latin typeface="맑은 고딕"/>
-              </a:rPr>
-              <a:t>5</a:t>
-            </a:r>
-          </a:p>
-        </p:txBody>
-      </p:sp>
-      <p:sp>
-        <p:nvSpPr>
-          <p:cNvPr id="17" name="TextBox 16"/>
-          <p:cNvSpPr txBox="1"/>
-          <p:nvPr/>
-        </p:nvSpPr>
-        <p:spPr>
-          <a:xfrm>
-            <a:off x="9144000" y="3703320"/>
-            <a:ext cx="2743200" cy="502920"/>
-          </a:xfrm>
-          <a:prstGeom prst="rect">
-            <a:avLst/>
-          </a:prstGeom>
-          <a:noFill/>
-        </p:spPr>
-        <p:txBody>
-          <a:bodyPr wrap="square" anchor="t" lIns="101600" rIns="101600" tIns="50800" bIns="50800">
-            <a:spAutoFit/>
-          </a:bodyPr>
-          <a:lstStyle/>
-          <a:p>
-            <a:pPr algn="l">
-              <a:lnSpc>
-                <a:spcPct val="112000"/>
-              </a:lnSpc>
-            </a:pPr>
-            <a:r>
-              <a:rPr sz="1250" b="1">
-                <a:solidFill>
-                  <a:srgbClr val="3A3A3A"/>
-                </a:solidFill>
-                <a:latin typeface="맑은 고딕"/>
-              </a:rPr>
-              <a:t>질문 + 사진 첨부 (Vision 분석)</a:t>
-            </a:r>
-          </a:p>
-        </p:txBody>
-      </p:sp>
-      <p:sp>
-        <p:nvSpPr>
-          <p:cNvPr id="18" name="Oval 17"/>
-          <p:cNvSpPr/>
-          <p:nvPr/>
-        </p:nvSpPr>
-        <p:spPr>
-          <a:xfrm>
-            <a:off x="8641080" y="4306824"/>
-            <a:ext cx="384048" cy="384048"/>
-          </a:xfrm>
-          <a:prstGeom prst="ellipse">
-            <a:avLst/>
-          </a:prstGeom>
-          <a:solidFill>
-            <a:srgbClr val="1E4D2B"/>
-          </a:solidFill>
-          <a:ln>
-            <a:noFill/>
-          </a:ln>
-          <a:effectLst/>
-        </p:spPr>
-        <p:style>
-          <a:lnRef idx="1">
-            <a:schemeClr val="accent1"/>
-          </a:lnRef>
-          <a:fillRef idx="3">
-            <a:schemeClr val="accent1"/>
-          </a:fillRef>
-          <a:effectRef idx="2">
-            <a:schemeClr val="accent1"/>
-          </a:effectRef>
-          <a:fontRef idx="minor">
-            <a:schemeClr val="lt1"/>
-          </a:fontRef>
-        </p:style>
-        <p:txBody>
-          <a:bodyPr rtlCol="0" anchor="ctr" wrap="square" lIns="101600" rIns="101600" tIns="50800" bIns="50800"/>
-          <a:lstStyle/>
-          <a:p>
-            <a:pPr algn="ctr">
-              <a:lnSpc>
-                <a:spcPct val="112000"/>
-              </a:lnSpc>
-            </a:pPr>
-            <a:r>
-              <a:rPr sz="1400" b="1">
-                <a:solidFill>
-                  <a:srgbClr val="7CB342"/>
-                </a:solidFill>
-                <a:latin typeface="맑은 고딕"/>
-              </a:rPr>
-              <a:t>6</a:t>
-            </a:r>
-          </a:p>
-        </p:txBody>
-      </p:sp>
-      <p:sp>
-        <p:nvSpPr>
-          <p:cNvPr id="19" name="TextBox 18"/>
-          <p:cNvSpPr txBox="1"/>
-          <p:nvPr/>
-        </p:nvSpPr>
-        <p:spPr>
-          <a:xfrm>
-            <a:off x="9144000" y="4270248"/>
-            <a:ext cx="2743200" cy="502920"/>
-          </a:xfrm>
-          <a:prstGeom prst="rect">
-            <a:avLst/>
-          </a:prstGeom>
-          <a:noFill/>
-        </p:spPr>
-        <p:txBody>
-          <a:bodyPr wrap="square" anchor="t" lIns="101600" rIns="101600" tIns="50800" bIns="50800">
-            <a:spAutoFit/>
-          </a:bodyPr>
-          <a:lstStyle/>
-          <a:p>
-            <a:pPr algn="l">
-              <a:lnSpc>
-                <a:spcPct val="112000"/>
-              </a:lnSpc>
-            </a:pPr>
-            <a:r>
-              <a:rPr sz="1250" b="1">
-                <a:solidFill>
-                  <a:srgbClr val="3A3A3A"/>
-                </a:solidFill>
-                <a:latin typeface="맑은 고딕"/>
-              </a:rPr>
-              <a:t>RAG 답변 + 공식 문서 출처 확인</a:t>
-            </a:r>
-          </a:p>
-        </p:txBody>
-      </p:sp>
-      <p:sp>
-        <p:nvSpPr>
-          <p:cNvPr id="20" name="Rounded Rectangle 19"/>
-          <p:cNvSpPr/>
-          <p:nvPr/>
-        </p:nvSpPr>
-        <p:spPr>
-          <a:xfrm>
-            <a:off x="8641080" y="5029200"/>
-            <a:ext cx="3063240" cy="1234440"/>
+            <a:off x="548640" y="4023360"/>
+            <a:ext cx="11109960" cy="1965960"/>
           </a:xfrm>
           <a:prstGeom prst="roundRect">
             <a:avLst/>
@@ -5753,54 +5482,70 @@
           </a:fontRef>
         </p:style>
         <p:txBody>
-          <a:bodyPr rtlCol="0" anchor="ctr" wrap="square" lIns="101600" rIns="101600" tIns="50800" bIns="50800"/>
+          <a:bodyPr rtlCol="0" anchor="ctr" wrap="square" lIns="228600" rIns="228600" tIns="177800"/>
           <a:lstStyle/>
           <a:p>
             <a:pPr algn="ctr">
-              <a:lnSpc>
-                <a:spcPct val="112000"/>
-              </a:lnSpc>
-            </a:pPr>
-            <a:r>
-              <a:rPr sz="1250" b="1">
+              <a:spcAft>
+                <a:spcPts val="800"/>
+              </a:spcAft>
+            </a:pPr>
+            <a:r>
+              <a:rPr sz="1600" b="1">
                 <a:solidFill>
                   <a:srgbClr val="1E4D2B"/>
                 </a:solidFill>
                 <a:latin typeface="맑은 고딕"/>
               </a:rPr>
-              <a:t>사용자별 식물 관리</a:t>
-            </a:r>
-          </a:p>
-          <a:p>
-            <a:pPr algn="ctr">
-              <a:lnSpc>
-                <a:spcPct val="112000"/>
-              </a:lnSpc>
-            </a:pPr>
-            <a:r>
-              <a:rPr sz="1250" b="1">
+              <a:t>확장을 위한 준비 — PSIS 농약등록정보 100건 선제 수집</a:t>
+            </a:r>
+          </a:p>
+          <a:p>
+            <a:pPr>
+              <a:lnSpc>
+                <a:spcPct val="125000"/>
+              </a:lnSpc>
+            </a:pPr>
+            <a:r>
+              <a:rPr sz="1350" b="0">
+                <a:solidFill>
+                  <a:srgbClr val="3A3A3A"/>
+                </a:solidFill>
+                <a:latin typeface="맑은 고딕"/>
+              </a:rPr>
+              <a:t>·  현재는 safety_reference_only로 안전 참고 전용 — 일반 상담에서는 직접 활용하지 않음</a:t>
+            </a:r>
+          </a:p>
+          <a:p>
+            <a:pPr>
+              <a:lnSpc>
+                <a:spcPct val="125000"/>
+              </a:lnSpc>
+            </a:pPr>
+            <a:r>
+              <a:rPr sz="1350" b="1">
                 <a:solidFill>
                   <a:srgbClr val="1E4D2B"/>
                 </a:solidFill>
                 <a:latin typeface="맑은 고딕"/>
               </a:rPr>
-              <a:t>식물별 상담 기록 보존</a:t>
-            </a:r>
-          </a:p>
-          <a:p>
-            <a:pPr algn="ctr">
-              <a:lnSpc>
-                <a:spcPct val="112000"/>
-              </a:lnSpc>
-            </a:pPr>
-            <a:r>
-              <a:rPr sz="1250" b="1">
-                <a:solidFill>
-                  <a:srgbClr val="1E4D2B"/>
-                </a:solidFill>
-                <a:latin typeface="맑은 고딕"/>
-              </a:rPr>
-              <a:t>공식 문서 출처 제공</a:t>
+              <a:t>·  향후 전문 농가 대상 방제 가이드(적용 약제·안전 희석 배수) 기능으로 확장 예정</a:t>
+            </a:r>
+          </a:p>
+          <a:p>
+            <a:pPr>
+              <a:lnSpc>
+                <a:spcPct val="125000"/>
+              </a:lnSpc>
+            </a:pPr>
+            <a:r>
+              <a:rPr sz="1350" b="0">
+                <a:solidFill>
+                  <a:srgbClr val="3A3A3A"/>
+                </a:solidFill>
+                <a:latin typeface="맑은 고딕"/>
+              </a:rPr>
+              <a:t>·  usage_scope 설계 덕분에 데이터 재수집 없이 정책 변경만으로 활용 범위 확대 가능</a:t>
             </a:r>
           </a:p>
         </p:txBody>
@@ -5833,6 +5578,931 @@
       <p:grpSpPr/>
       <p:sp>
         <p:nvSpPr>
+          <p:cNvPr id="2" name="Rectangle 1"/>
+          <p:cNvSpPr/>
+          <p:nvPr/>
+        </p:nvSpPr>
+        <p:spPr>
+          <a:xfrm>
+            <a:off x="502920" y="384048"/>
+            <a:ext cx="82296" cy="566928"/>
+          </a:xfrm>
+          <a:prstGeom prst="rect">
+            <a:avLst/>
+          </a:prstGeom>
+          <a:solidFill>
+            <a:srgbClr val="7CB342"/>
+          </a:solidFill>
+          <a:ln>
+            <a:noFill/>
+          </a:ln>
+          <a:effectLst/>
+        </p:spPr>
+        <p:style>
+          <a:lnRef idx="1">
+            <a:schemeClr val="accent1"/>
+          </a:lnRef>
+          <a:fillRef idx="3">
+            <a:schemeClr val="accent1"/>
+          </a:fillRef>
+          <a:effectRef idx="2">
+            <a:schemeClr val="accent1"/>
+          </a:effectRef>
+          <a:fontRef idx="minor">
+            <a:schemeClr val="lt1"/>
+          </a:fontRef>
+        </p:style>
+        <p:txBody>
+          <a:bodyPr rtlCol="0" anchor="ctr"/>
+          <a:lstStyle/>
+          <a:p>
+            <a:pPr algn="ctr"/>
+          </a:p>
+        </p:txBody>
+      </p:sp>
+      <p:sp>
+        <p:nvSpPr>
+          <p:cNvPr id="3" name="TextBox 2"/>
+          <p:cNvSpPr txBox="1"/>
+          <p:nvPr/>
+        </p:nvSpPr>
+        <p:spPr>
+          <a:xfrm>
+            <a:off x="731520" y="292608"/>
+            <a:ext cx="10607040" cy="640080"/>
+          </a:xfrm>
+          <a:prstGeom prst="rect">
+            <a:avLst/>
+          </a:prstGeom>
+          <a:noFill/>
+        </p:spPr>
+        <p:txBody>
+          <a:bodyPr wrap="square" anchor="t" lIns="101600" rIns="101600" tIns="50800" bIns="50800">
+            <a:spAutoFit/>
+          </a:bodyPr>
+          <a:lstStyle/>
+          <a:p>
+            <a:pPr algn="l">
+              <a:lnSpc>
+                <a:spcPct val="112000"/>
+              </a:lnSpc>
+            </a:pPr>
+            <a:r>
+              <a:rPr sz="2800" b="1">
+                <a:solidFill>
+                  <a:srgbClr val="1E4D2B"/>
+                </a:solidFill>
+                <a:latin typeface="맑은 고딕"/>
+              </a:rPr>
+              <a:t>서비스 시연</a:t>
+            </a:r>
+          </a:p>
+        </p:txBody>
+      </p:sp>
+      <p:sp>
+        <p:nvSpPr>
+          <p:cNvPr id="4" name="TextBox 3"/>
+          <p:cNvSpPr txBox="1"/>
+          <p:nvPr/>
+        </p:nvSpPr>
+        <p:spPr>
+          <a:xfrm>
+            <a:off x="749808" y="914400"/>
+            <a:ext cx="10972800" cy="365760"/>
+          </a:xfrm>
+          <a:prstGeom prst="rect">
+            <a:avLst/>
+          </a:prstGeom>
+          <a:noFill/>
+        </p:spPr>
+        <p:txBody>
+          <a:bodyPr wrap="square" anchor="t" lIns="101600" rIns="101600" tIns="50800" bIns="50800">
+            <a:spAutoFit/>
+          </a:bodyPr>
+          <a:lstStyle/>
+          <a:p>
+            <a:pPr algn="l">
+              <a:lnSpc>
+                <a:spcPct val="112000"/>
+              </a:lnSpc>
+            </a:pPr>
+            <a:r>
+              <a:rPr sz="1250" b="0">
+                <a:solidFill>
+                  <a:srgbClr val="8A8A8A"/>
+                </a:solidFill>
+                <a:latin typeface="맑은 고딕"/>
+              </a:rPr>
+              <a:t>실제 배포 서비스 — 메인 대시보드</a:t>
+            </a:r>
+          </a:p>
+        </p:txBody>
+      </p:sp>
+      <p:sp>
+        <p:nvSpPr>
+          <p:cNvPr id="5" name="Oval 4"/>
+          <p:cNvSpPr/>
+          <p:nvPr/>
+        </p:nvSpPr>
+        <p:spPr>
+          <a:xfrm>
+            <a:off x="11658600" y="457200"/>
+            <a:ext cx="128016" cy="128016"/>
+          </a:xfrm>
+          <a:prstGeom prst="ellipse">
+            <a:avLst/>
+          </a:prstGeom>
+          <a:solidFill>
+            <a:srgbClr val="7CB342"/>
+          </a:solidFill>
+          <a:ln>
+            <a:noFill/>
+          </a:ln>
+          <a:effectLst/>
+        </p:spPr>
+        <p:style>
+          <a:lnRef idx="1">
+            <a:schemeClr val="accent1"/>
+          </a:lnRef>
+          <a:fillRef idx="3">
+            <a:schemeClr val="accent1"/>
+          </a:fillRef>
+          <a:effectRef idx="2">
+            <a:schemeClr val="accent1"/>
+          </a:effectRef>
+          <a:fontRef idx="minor">
+            <a:schemeClr val="lt1"/>
+          </a:fontRef>
+        </p:style>
+        <p:txBody>
+          <a:bodyPr rtlCol="0" anchor="ctr"/>
+          <a:lstStyle/>
+          <a:p>
+            <a:pPr algn="ctr"/>
+          </a:p>
+        </p:txBody>
+      </p:sp>
+      <p:pic>
+        <p:nvPicPr>
+          <p:cNvPr id="6" name="Picture 5" descr="farm시연.png"/>
+          <p:cNvPicPr>
+            <a:picLocks noChangeAspect="1"/>
+          </p:cNvPicPr>
+          <p:nvPr/>
+        </p:nvPicPr>
+        <p:blipFill>
+          <a:blip r:embed="rId2"/>
+          <a:stretch>
+            <a:fillRect/>
+          </a:stretch>
+        </p:blipFill>
+        <p:spPr>
+          <a:xfrm>
+            <a:off x="502920" y="1417320"/>
+            <a:ext cx="7863840" cy="4471107"/>
+          </a:xfrm>
+          <a:prstGeom prst="rect">
+            <a:avLst/>
+          </a:prstGeom>
+          <a:ln w="15875">
+            <a:solidFill>
+              <a:srgbClr val="E8E8E8"/>
+            </a:solidFill>
+          </a:ln>
+        </p:spPr>
+      </p:pic>
+      <p:sp>
+        <p:nvSpPr>
+          <p:cNvPr id="7" name="TextBox 6"/>
+          <p:cNvSpPr txBox="1"/>
+          <p:nvPr/>
+        </p:nvSpPr>
+        <p:spPr>
+          <a:xfrm>
+            <a:off x="521207" y="5943600"/>
+            <a:ext cx="7863840" cy="365760"/>
+          </a:xfrm>
+          <a:prstGeom prst="rect">
+            <a:avLst/>
+          </a:prstGeom>
+          <a:noFill/>
+        </p:spPr>
+        <p:txBody>
+          <a:bodyPr wrap="square" anchor="t" lIns="101600" rIns="101600" tIns="50800" bIns="50800">
+            <a:spAutoFit/>
+          </a:bodyPr>
+          <a:lstStyle/>
+          <a:p>
+            <a:pPr algn="l">
+              <a:lnSpc>
+                <a:spcPct val="112000"/>
+              </a:lnSpc>
+            </a:pPr>
+            <a:r>
+              <a:rPr sz="1150" b="0">
+                <a:solidFill>
+                  <a:srgbClr val="8A8A8A"/>
+                </a:solidFill>
+                <a:latin typeface="맑은 고딕"/>
+              </a:rPr>
+              <a:t>▲ Farm하니? 메인 대시보드 — 내 식물 카드 · 건강 개요 · 빠른 AI 진단</a:t>
+            </a:r>
+          </a:p>
+        </p:txBody>
+      </p:sp>
+      <p:sp>
+        <p:nvSpPr>
+          <p:cNvPr id="8" name="Oval 7"/>
+          <p:cNvSpPr/>
+          <p:nvPr/>
+        </p:nvSpPr>
+        <p:spPr>
+          <a:xfrm>
+            <a:off x="8641080" y="1472184"/>
+            <a:ext cx="384048" cy="384048"/>
+          </a:xfrm>
+          <a:prstGeom prst="ellipse">
+            <a:avLst/>
+          </a:prstGeom>
+          <a:solidFill>
+            <a:srgbClr val="1E4D2B"/>
+          </a:solidFill>
+          <a:ln>
+            <a:noFill/>
+          </a:ln>
+          <a:effectLst/>
+        </p:spPr>
+        <p:style>
+          <a:lnRef idx="1">
+            <a:schemeClr val="accent1"/>
+          </a:lnRef>
+          <a:fillRef idx="3">
+            <a:schemeClr val="accent1"/>
+          </a:fillRef>
+          <a:effectRef idx="2">
+            <a:schemeClr val="accent1"/>
+          </a:effectRef>
+          <a:fontRef idx="minor">
+            <a:schemeClr val="lt1"/>
+          </a:fontRef>
+        </p:style>
+        <p:txBody>
+          <a:bodyPr rtlCol="0" anchor="ctr" wrap="square" lIns="101600" rIns="101600" tIns="50800" bIns="50800"/>
+          <a:lstStyle/>
+          <a:p>
+            <a:pPr algn="ctr">
+              <a:lnSpc>
+                <a:spcPct val="112000"/>
+              </a:lnSpc>
+            </a:pPr>
+            <a:r>
+              <a:rPr sz="1400" b="1">
+                <a:solidFill>
+                  <a:srgbClr val="7CB342"/>
+                </a:solidFill>
+                <a:latin typeface="맑은 고딕"/>
+              </a:rPr>
+              <a:t>1</a:t>
+            </a:r>
+          </a:p>
+        </p:txBody>
+      </p:sp>
+      <p:sp>
+        <p:nvSpPr>
+          <p:cNvPr id="9" name="TextBox 8"/>
+          <p:cNvSpPr txBox="1"/>
+          <p:nvPr/>
+        </p:nvSpPr>
+        <p:spPr>
+          <a:xfrm>
+            <a:off x="9144000" y="1435608"/>
+            <a:ext cx="2743200" cy="502920"/>
+          </a:xfrm>
+          <a:prstGeom prst="rect">
+            <a:avLst/>
+          </a:prstGeom>
+          <a:noFill/>
+        </p:spPr>
+        <p:txBody>
+          <a:bodyPr wrap="square" anchor="t" lIns="101600" rIns="101600" tIns="50800" bIns="50800">
+            <a:spAutoFit/>
+          </a:bodyPr>
+          <a:lstStyle/>
+          <a:p>
+            <a:pPr algn="l">
+              <a:lnSpc>
+                <a:spcPct val="112000"/>
+              </a:lnSpc>
+            </a:pPr>
+            <a:r>
+              <a:rPr sz="1250" b="1">
+                <a:solidFill>
+                  <a:srgbClr val="3A3A3A"/>
+                </a:solidFill>
+                <a:latin typeface="맑은 고딕"/>
+              </a:rPr>
+              <a:t>로그인 / 회원가입</a:t>
+            </a:r>
+          </a:p>
+        </p:txBody>
+      </p:sp>
+      <p:sp>
+        <p:nvSpPr>
+          <p:cNvPr id="10" name="Oval 9"/>
+          <p:cNvSpPr/>
+          <p:nvPr/>
+        </p:nvSpPr>
+        <p:spPr>
+          <a:xfrm>
+            <a:off x="8641080" y="2039112"/>
+            <a:ext cx="384048" cy="384048"/>
+          </a:xfrm>
+          <a:prstGeom prst="ellipse">
+            <a:avLst/>
+          </a:prstGeom>
+          <a:solidFill>
+            <a:srgbClr val="1E4D2B"/>
+          </a:solidFill>
+          <a:ln>
+            <a:noFill/>
+          </a:ln>
+          <a:effectLst/>
+        </p:spPr>
+        <p:style>
+          <a:lnRef idx="1">
+            <a:schemeClr val="accent1"/>
+          </a:lnRef>
+          <a:fillRef idx="3">
+            <a:schemeClr val="accent1"/>
+          </a:fillRef>
+          <a:effectRef idx="2">
+            <a:schemeClr val="accent1"/>
+          </a:effectRef>
+          <a:fontRef idx="minor">
+            <a:schemeClr val="lt1"/>
+          </a:fontRef>
+        </p:style>
+        <p:txBody>
+          <a:bodyPr rtlCol="0" anchor="ctr" wrap="square" lIns="101600" rIns="101600" tIns="50800" bIns="50800"/>
+          <a:lstStyle/>
+          <a:p>
+            <a:pPr algn="ctr">
+              <a:lnSpc>
+                <a:spcPct val="112000"/>
+              </a:lnSpc>
+            </a:pPr>
+            <a:r>
+              <a:rPr sz="1400" b="1">
+                <a:solidFill>
+                  <a:srgbClr val="7CB342"/>
+                </a:solidFill>
+                <a:latin typeface="맑은 고딕"/>
+              </a:rPr>
+              <a:t>2</a:t>
+            </a:r>
+          </a:p>
+        </p:txBody>
+      </p:sp>
+      <p:sp>
+        <p:nvSpPr>
+          <p:cNvPr id="11" name="TextBox 10"/>
+          <p:cNvSpPr txBox="1"/>
+          <p:nvPr/>
+        </p:nvSpPr>
+        <p:spPr>
+          <a:xfrm>
+            <a:off x="9144000" y="2002536"/>
+            <a:ext cx="2743200" cy="502920"/>
+          </a:xfrm>
+          <a:prstGeom prst="rect">
+            <a:avLst/>
+          </a:prstGeom>
+          <a:noFill/>
+        </p:spPr>
+        <p:txBody>
+          <a:bodyPr wrap="square" anchor="t" lIns="101600" rIns="101600" tIns="50800" bIns="50800">
+            <a:spAutoFit/>
+          </a:bodyPr>
+          <a:lstStyle/>
+          <a:p>
+            <a:pPr algn="l">
+              <a:lnSpc>
+                <a:spcPct val="112000"/>
+              </a:lnSpc>
+            </a:pPr>
+            <a:r>
+              <a:rPr sz="1250" b="1">
+                <a:solidFill>
+                  <a:srgbClr val="3A3A3A"/>
+                </a:solidFill>
+                <a:latin typeface="맑은 고딕"/>
+              </a:rPr>
+              <a:t>내 식물 등록 (품종 자동완성)</a:t>
+            </a:r>
+          </a:p>
+        </p:txBody>
+      </p:sp>
+      <p:sp>
+        <p:nvSpPr>
+          <p:cNvPr id="12" name="Oval 11"/>
+          <p:cNvSpPr/>
+          <p:nvPr/>
+        </p:nvSpPr>
+        <p:spPr>
+          <a:xfrm>
+            <a:off x="8641080" y="2606040"/>
+            <a:ext cx="384048" cy="384048"/>
+          </a:xfrm>
+          <a:prstGeom prst="ellipse">
+            <a:avLst/>
+          </a:prstGeom>
+          <a:solidFill>
+            <a:srgbClr val="1E4D2B"/>
+          </a:solidFill>
+          <a:ln>
+            <a:noFill/>
+          </a:ln>
+          <a:effectLst/>
+        </p:spPr>
+        <p:style>
+          <a:lnRef idx="1">
+            <a:schemeClr val="accent1"/>
+          </a:lnRef>
+          <a:fillRef idx="3">
+            <a:schemeClr val="accent1"/>
+          </a:fillRef>
+          <a:effectRef idx="2">
+            <a:schemeClr val="accent1"/>
+          </a:effectRef>
+          <a:fontRef idx="minor">
+            <a:schemeClr val="lt1"/>
+          </a:fontRef>
+        </p:style>
+        <p:txBody>
+          <a:bodyPr rtlCol="0" anchor="ctr" wrap="square" lIns="101600" rIns="101600" tIns="50800" bIns="50800"/>
+          <a:lstStyle/>
+          <a:p>
+            <a:pPr algn="ctr">
+              <a:lnSpc>
+                <a:spcPct val="112000"/>
+              </a:lnSpc>
+            </a:pPr>
+            <a:r>
+              <a:rPr sz="1400" b="1">
+                <a:solidFill>
+                  <a:srgbClr val="7CB342"/>
+                </a:solidFill>
+                <a:latin typeface="맑은 고딕"/>
+              </a:rPr>
+              <a:t>3</a:t>
+            </a:r>
+          </a:p>
+        </p:txBody>
+      </p:sp>
+      <p:sp>
+        <p:nvSpPr>
+          <p:cNvPr id="13" name="TextBox 12"/>
+          <p:cNvSpPr txBox="1"/>
+          <p:nvPr/>
+        </p:nvSpPr>
+        <p:spPr>
+          <a:xfrm>
+            <a:off x="9144000" y="2569464"/>
+            <a:ext cx="2743200" cy="502920"/>
+          </a:xfrm>
+          <a:prstGeom prst="rect">
+            <a:avLst/>
+          </a:prstGeom>
+          <a:noFill/>
+        </p:spPr>
+        <p:txBody>
+          <a:bodyPr wrap="square" anchor="t" lIns="101600" rIns="101600" tIns="50800" bIns="50800">
+            <a:spAutoFit/>
+          </a:bodyPr>
+          <a:lstStyle/>
+          <a:p>
+            <a:pPr algn="l">
+              <a:lnSpc>
+                <a:spcPct val="112000"/>
+              </a:lnSpc>
+            </a:pPr>
+            <a:r>
+              <a:rPr sz="1250" b="1">
+                <a:solidFill>
+                  <a:srgbClr val="3A3A3A"/>
+                </a:solidFill>
+                <a:latin typeface="맑은 고딕"/>
+              </a:rPr>
+              <a:t>대시보드에서 상태 확인</a:t>
+            </a:r>
+          </a:p>
+        </p:txBody>
+      </p:sp>
+      <p:sp>
+        <p:nvSpPr>
+          <p:cNvPr id="14" name="Oval 13"/>
+          <p:cNvSpPr/>
+          <p:nvPr/>
+        </p:nvSpPr>
+        <p:spPr>
+          <a:xfrm>
+            <a:off x="8641080" y="3172968"/>
+            <a:ext cx="384048" cy="384048"/>
+          </a:xfrm>
+          <a:prstGeom prst="ellipse">
+            <a:avLst/>
+          </a:prstGeom>
+          <a:solidFill>
+            <a:srgbClr val="1E4D2B"/>
+          </a:solidFill>
+          <a:ln>
+            <a:noFill/>
+          </a:ln>
+          <a:effectLst/>
+        </p:spPr>
+        <p:style>
+          <a:lnRef idx="1">
+            <a:schemeClr val="accent1"/>
+          </a:lnRef>
+          <a:fillRef idx="3">
+            <a:schemeClr val="accent1"/>
+          </a:fillRef>
+          <a:effectRef idx="2">
+            <a:schemeClr val="accent1"/>
+          </a:effectRef>
+          <a:fontRef idx="minor">
+            <a:schemeClr val="lt1"/>
+          </a:fontRef>
+        </p:style>
+        <p:txBody>
+          <a:bodyPr rtlCol="0" anchor="ctr" wrap="square" lIns="101600" rIns="101600" tIns="50800" bIns="50800"/>
+          <a:lstStyle/>
+          <a:p>
+            <a:pPr algn="ctr">
+              <a:lnSpc>
+                <a:spcPct val="112000"/>
+              </a:lnSpc>
+            </a:pPr>
+            <a:r>
+              <a:rPr sz="1400" b="1">
+                <a:solidFill>
+                  <a:srgbClr val="7CB342"/>
+                </a:solidFill>
+                <a:latin typeface="맑은 고딕"/>
+              </a:rPr>
+              <a:t>4</a:t>
+            </a:r>
+          </a:p>
+        </p:txBody>
+      </p:sp>
+      <p:sp>
+        <p:nvSpPr>
+          <p:cNvPr id="15" name="TextBox 14"/>
+          <p:cNvSpPr txBox="1"/>
+          <p:nvPr/>
+        </p:nvSpPr>
+        <p:spPr>
+          <a:xfrm>
+            <a:off x="9144000" y="3136392"/>
+            <a:ext cx="2743200" cy="502920"/>
+          </a:xfrm>
+          <a:prstGeom prst="rect">
+            <a:avLst/>
+          </a:prstGeom>
+          <a:noFill/>
+        </p:spPr>
+        <p:txBody>
+          <a:bodyPr wrap="square" anchor="t" lIns="101600" rIns="101600" tIns="50800" bIns="50800">
+            <a:spAutoFit/>
+          </a:bodyPr>
+          <a:lstStyle/>
+          <a:p>
+            <a:pPr algn="l">
+              <a:lnSpc>
+                <a:spcPct val="112000"/>
+              </a:lnSpc>
+            </a:pPr>
+            <a:r>
+              <a:rPr sz="1250" b="1">
+                <a:solidFill>
+                  <a:srgbClr val="3A3A3A"/>
+                </a:solidFill>
+                <a:latin typeface="맑은 고딕"/>
+              </a:rPr>
+              <a:t>AI 상담 — 전문가 / 내 식물과 대화</a:t>
+            </a:r>
+          </a:p>
+        </p:txBody>
+      </p:sp>
+      <p:sp>
+        <p:nvSpPr>
+          <p:cNvPr id="16" name="Oval 15"/>
+          <p:cNvSpPr/>
+          <p:nvPr/>
+        </p:nvSpPr>
+        <p:spPr>
+          <a:xfrm>
+            <a:off x="8641080" y="3739896"/>
+            <a:ext cx="384048" cy="384048"/>
+          </a:xfrm>
+          <a:prstGeom prst="ellipse">
+            <a:avLst/>
+          </a:prstGeom>
+          <a:solidFill>
+            <a:srgbClr val="1E4D2B"/>
+          </a:solidFill>
+          <a:ln>
+            <a:noFill/>
+          </a:ln>
+          <a:effectLst/>
+        </p:spPr>
+        <p:style>
+          <a:lnRef idx="1">
+            <a:schemeClr val="accent1"/>
+          </a:lnRef>
+          <a:fillRef idx="3">
+            <a:schemeClr val="accent1"/>
+          </a:fillRef>
+          <a:effectRef idx="2">
+            <a:schemeClr val="accent1"/>
+          </a:effectRef>
+          <a:fontRef idx="minor">
+            <a:schemeClr val="lt1"/>
+          </a:fontRef>
+        </p:style>
+        <p:txBody>
+          <a:bodyPr rtlCol="0" anchor="ctr" wrap="square" lIns="101600" rIns="101600" tIns="50800" bIns="50800"/>
+          <a:lstStyle/>
+          <a:p>
+            <a:pPr algn="ctr">
+              <a:lnSpc>
+                <a:spcPct val="112000"/>
+              </a:lnSpc>
+            </a:pPr>
+            <a:r>
+              <a:rPr sz="1400" b="1">
+                <a:solidFill>
+                  <a:srgbClr val="7CB342"/>
+                </a:solidFill>
+                <a:latin typeface="맑은 고딕"/>
+              </a:rPr>
+              <a:t>5</a:t>
+            </a:r>
+          </a:p>
+        </p:txBody>
+      </p:sp>
+      <p:sp>
+        <p:nvSpPr>
+          <p:cNvPr id="17" name="TextBox 16"/>
+          <p:cNvSpPr txBox="1"/>
+          <p:nvPr/>
+        </p:nvSpPr>
+        <p:spPr>
+          <a:xfrm>
+            <a:off x="9144000" y="3703320"/>
+            <a:ext cx="2743200" cy="502920"/>
+          </a:xfrm>
+          <a:prstGeom prst="rect">
+            <a:avLst/>
+          </a:prstGeom>
+          <a:noFill/>
+        </p:spPr>
+        <p:txBody>
+          <a:bodyPr wrap="square" anchor="t" lIns="101600" rIns="101600" tIns="50800" bIns="50800">
+            <a:spAutoFit/>
+          </a:bodyPr>
+          <a:lstStyle/>
+          <a:p>
+            <a:pPr algn="l">
+              <a:lnSpc>
+                <a:spcPct val="112000"/>
+              </a:lnSpc>
+            </a:pPr>
+            <a:r>
+              <a:rPr sz="1250" b="1">
+                <a:solidFill>
+                  <a:srgbClr val="3A3A3A"/>
+                </a:solidFill>
+                <a:latin typeface="맑은 고딕"/>
+              </a:rPr>
+              <a:t>질문 + 사진 첨부 (Vision 분석)</a:t>
+            </a:r>
+          </a:p>
+        </p:txBody>
+      </p:sp>
+      <p:sp>
+        <p:nvSpPr>
+          <p:cNvPr id="18" name="Oval 17"/>
+          <p:cNvSpPr/>
+          <p:nvPr/>
+        </p:nvSpPr>
+        <p:spPr>
+          <a:xfrm>
+            <a:off x="8641080" y="4306824"/>
+            <a:ext cx="384048" cy="384048"/>
+          </a:xfrm>
+          <a:prstGeom prst="ellipse">
+            <a:avLst/>
+          </a:prstGeom>
+          <a:solidFill>
+            <a:srgbClr val="1E4D2B"/>
+          </a:solidFill>
+          <a:ln>
+            <a:noFill/>
+          </a:ln>
+          <a:effectLst/>
+        </p:spPr>
+        <p:style>
+          <a:lnRef idx="1">
+            <a:schemeClr val="accent1"/>
+          </a:lnRef>
+          <a:fillRef idx="3">
+            <a:schemeClr val="accent1"/>
+          </a:fillRef>
+          <a:effectRef idx="2">
+            <a:schemeClr val="accent1"/>
+          </a:effectRef>
+          <a:fontRef idx="minor">
+            <a:schemeClr val="lt1"/>
+          </a:fontRef>
+        </p:style>
+        <p:txBody>
+          <a:bodyPr rtlCol="0" anchor="ctr" wrap="square" lIns="101600" rIns="101600" tIns="50800" bIns="50800"/>
+          <a:lstStyle/>
+          <a:p>
+            <a:pPr algn="ctr">
+              <a:lnSpc>
+                <a:spcPct val="112000"/>
+              </a:lnSpc>
+            </a:pPr>
+            <a:r>
+              <a:rPr sz="1400" b="1">
+                <a:solidFill>
+                  <a:srgbClr val="7CB342"/>
+                </a:solidFill>
+                <a:latin typeface="맑은 고딕"/>
+              </a:rPr>
+              <a:t>6</a:t>
+            </a:r>
+          </a:p>
+        </p:txBody>
+      </p:sp>
+      <p:sp>
+        <p:nvSpPr>
+          <p:cNvPr id="19" name="TextBox 18"/>
+          <p:cNvSpPr txBox="1"/>
+          <p:nvPr/>
+        </p:nvSpPr>
+        <p:spPr>
+          <a:xfrm>
+            <a:off x="9144000" y="4270248"/>
+            <a:ext cx="2743200" cy="502920"/>
+          </a:xfrm>
+          <a:prstGeom prst="rect">
+            <a:avLst/>
+          </a:prstGeom>
+          <a:noFill/>
+        </p:spPr>
+        <p:txBody>
+          <a:bodyPr wrap="square" anchor="t" lIns="101600" rIns="101600" tIns="50800" bIns="50800">
+            <a:spAutoFit/>
+          </a:bodyPr>
+          <a:lstStyle/>
+          <a:p>
+            <a:pPr algn="l">
+              <a:lnSpc>
+                <a:spcPct val="112000"/>
+              </a:lnSpc>
+            </a:pPr>
+            <a:r>
+              <a:rPr sz="1250" b="1">
+                <a:solidFill>
+                  <a:srgbClr val="3A3A3A"/>
+                </a:solidFill>
+                <a:latin typeface="맑은 고딕"/>
+              </a:rPr>
+              <a:t>RAG 답변 + 공식 문서 출처 확인</a:t>
+            </a:r>
+          </a:p>
+        </p:txBody>
+      </p:sp>
+      <p:sp>
+        <p:nvSpPr>
+          <p:cNvPr id="20" name="Rounded Rectangle 19"/>
+          <p:cNvSpPr/>
+          <p:nvPr/>
+        </p:nvSpPr>
+        <p:spPr>
+          <a:xfrm>
+            <a:off x="8641080" y="5029200"/>
+            <a:ext cx="3063240" cy="1234440"/>
+          </a:xfrm>
+          <a:prstGeom prst="roundRect">
+            <a:avLst/>
+          </a:prstGeom>
+          <a:solidFill>
+            <a:srgbClr val="F1F7F1"/>
+          </a:solidFill>
+          <a:ln>
+            <a:noFill/>
+          </a:ln>
+          <a:effectLst/>
+        </p:spPr>
+        <p:style>
+          <a:lnRef idx="1">
+            <a:schemeClr val="accent1"/>
+          </a:lnRef>
+          <a:fillRef idx="3">
+            <a:schemeClr val="accent1"/>
+          </a:fillRef>
+          <a:effectRef idx="2">
+            <a:schemeClr val="accent1"/>
+          </a:effectRef>
+          <a:fontRef idx="minor">
+            <a:schemeClr val="lt1"/>
+          </a:fontRef>
+        </p:style>
+        <p:txBody>
+          <a:bodyPr rtlCol="0" anchor="ctr" wrap="square" lIns="101600" rIns="101600" tIns="50800" bIns="50800"/>
+          <a:lstStyle/>
+          <a:p>
+            <a:pPr algn="ctr">
+              <a:lnSpc>
+                <a:spcPct val="112000"/>
+              </a:lnSpc>
+            </a:pPr>
+            <a:r>
+              <a:rPr sz="1250" b="1">
+                <a:solidFill>
+                  <a:srgbClr val="1E4D2B"/>
+                </a:solidFill>
+                <a:latin typeface="맑은 고딕"/>
+              </a:rPr>
+              <a:t>사용자별 식물 관리</a:t>
+            </a:r>
+          </a:p>
+          <a:p>
+            <a:pPr algn="ctr">
+              <a:lnSpc>
+                <a:spcPct val="112000"/>
+              </a:lnSpc>
+            </a:pPr>
+            <a:r>
+              <a:rPr sz="1250" b="1">
+                <a:solidFill>
+                  <a:srgbClr val="1E4D2B"/>
+                </a:solidFill>
+                <a:latin typeface="맑은 고딕"/>
+              </a:rPr>
+              <a:t>식물별 상담 기록 보존</a:t>
+            </a:r>
+          </a:p>
+          <a:p>
+            <a:pPr algn="ctr">
+              <a:lnSpc>
+                <a:spcPct val="112000"/>
+              </a:lnSpc>
+            </a:pPr>
+            <a:r>
+              <a:rPr sz="1250" b="1">
+                <a:solidFill>
+                  <a:srgbClr val="1E4D2B"/>
+                </a:solidFill>
+                <a:latin typeface="맑은 고딕"/>
+              </a:rPr>
+              <a:t>공식 문서 출처 제공</a:t>
+            </a:r>
+          </a:p>
+        </p:txBody>
+      </p:sp>
+    </p:spTree>
+  </p:cSld>
+  <p:clrMapOvr>
+    <a:masterClrMapping/>
+  </p:clrMapOvr>
+</p:sld>
+</file>
+
+<file path=ppt/slides/slide12.xml><?xml version="1.0" encoding="utf-8"?>
+<p:sld xmlns:a="http://schemas.openxmlformats.org/drawingml/2006/main" xmlns:p="http://schemas.openxmlformats.org/presentationml/2006/main" xmlns:r="http://schemas.openxmlformats.org/officeDocument/2006/relationships">
+  <p:cSld>
+    <p:bg>
+      <p:bgPr>
+        <a:solidFill>
+          <a:srgbClr val="FFFFFF"/>
+        </a:solidFill>
+        <a:effectLst/>
+      </p:bgPr>
+    </p:bg>
+    <p:spTree>
+      <p:nvGrpSpPr>
+        <p:cNvPr id="1" name=""/>
+        <p:cNvGrpSpPr/>
+        <p:nvPr/>
+      </p:nvGrpSpPr>
+      <p:grpSpPr/>
+      <p:sp>
+        <p:nvSpPr>
           <p:cNvPr id="2" name="Oval 1"/>
           <p:cNvSpPr/>
           <p:nvPr/>
@@ -5971,7 +6641,7 @@
         </p:nvSpPr>
         <p:spPr>
           <a:xfrm>
-            <a:off x="960120" y="1280160"/>
+            <a:off x="960120" y="1463040"/>
             <a:ext cx="10332720" cy="1188720"/>
           </a:xfrm>
           <a:prstGeom prst="rect">
@@ -6010,7 +6680,7 @@
         </p:nvSpPr>
         <p:spPr>
           <a:xfrm>
-            <a:off x="1051560" y="2377440"/>
+            <a:off x="1051560" y="2560320"/>
             <a:ext cx="1645920" cy="82296"/>
           </a:xfrm>
           <a:prstGeom prst="rect">
@@ -6054,7 +6724,7 @@
         </p:nvSpPr>
         <p:spPr>
           <a:xfrm>
-            <a:off x="1005840" y="2651760"/>
+            <a:off x="1005840" y="2880360"/>
             <a:ext cx="10058400" cy="822960"/>
           </a:xfrm>
           <a:prstGeom prst="rect">
@@ -6109,8 +6779,8 @@
         </p:nvSpPr>
         <p:spPr>
           <a:xfrm>
-            <a:off x="960120" y="4114800"/>
-            <a:ext cx="10332720" cy="1920240"/>
+            <a:off x="960120" y="4389120"/>
+            <a:ext cx="10332720" cy="1600200"/>
           </a:xfrm>
           <a:prstGeom prst="roundRect">
             <a:avLst/>
@@ -6169,7 +6839,7 @@
                 </a:solidFill>
                 <a:latin typeface="맑은 고딕"/>
               </a:rPr>
-              <a:t>·  식물·작물 데이터 커버리지 지속 확장</a:t>
+              <a:t>·  식물·작물 데이터 커버리지 지속 확장  ·  물주기 자동 리마인드 및 모바일 알림</a:t>
             </a:r>
           </a:p>
           <a:p>
@@ -6185,39 +6855,7 @@
                 </a:solidFill>
                 <a:latin typeface="맑은 고딕"/>
               </a:rPr>
-              <a:t>·  물주기 자동 리마인드 및 모바일 알림</a:t>
-            </a:r>
-          </a:p>
-          <a:p>
-            <a:pPr algn="l">
-              <a:lnSpc>
-                <a:spcPct val="118000"/>
-              </a:lnSpc>
-            </a:pPr>
-            <a:r>
-              <a:rPr sz="1400" b="0">
-                <a:solidFill>
-                  <a:srgbClr val="3A3A3A"/>
-                </a:solidFill>
-                <a:latin typeface="맑은 고딕"/>
-              </a:rPr>
-              <a:t>·  이미지 진단 정확도 고도화</a:t>
-            </a:r>
-          </a:p>
-          <a:p>
-            <a:pPr algn="l">
-              <a:lnSpc>
-                <a:spcPct val="118000"/>
-              </a:lnSpc>
-            </a:pPr>
-            <a:r>
-              <a:rPr sz="1400" b="0">
-                <a:solidFill>
-                  <a:srgbClr val="3A3A3A"/>
-                </a:solidFill>
-                <a:latin typeface="맑은 고딕"/>
-              </a:rPr>
-              <a:t>·  무정보 상황의 안전한 거절 패턴 및 RAG 평가 자동화 지속 개선</a:t>
+              <a:t>·  이미지 진단 정확도 고도화  ·  전문 농가 대상 방제 가이드 확장 (PSIS 데이터 활용)</a:t>
             </a:r>
           </a:p>
         </p:txBody>
@@ -6596,7 +7234,7 @@
         <p:spPr>
           <a:xfrm>
             <a:off x="2240280" y="1554480"/>
-            <a:ext cx="5303520" cy="457200"/>
+            <a:ext cx="5669280" cy="457200"/>
           </a:xfrm>
           <a:prstGeom prst="rect">
             <a:avLst/>
@@ -6634,8 +7272,8 @@
         </p:nvSpPr>
         <p:spPr>
           <a:xfrm>
-            <a:off x="7406640" y="1645920"/>
-            <a:ext cx="3840480" cy="457200"/>
+            <a:off x="7955279" y="1645920"/>
+            <a:ext cx="3291840" cy="457200"/>
           </a:xfrm>
           <a:prstGeom prst="rect">
             <a:avLst/>
@@ -6654,7 +7292,7 @@
               </a:lnSpc>
             </a:pPr>
             <a:r>
-              <a:rPr sz="1250" b="0">
+              <a:rPr sz="1200" b="0">
                 <a:solidFill>
                   <a:srgbClr val="8A8A8A"/>
                 </a:solidFill>
@@ -6847,7 +7485,7 @@
         <p:spPr>
           <a:xfrm>
             <a:off x="2240280" y="2560320"/>
-            <a:ext cx="5303520" cy="457200"/>
+            <a:ext cx="5669280" cy="457200"/>
           </a:xfrm>
           <a:prstGeom prst="rect">
             <a:avLst/>
@@ -6885,8 +7523,8 @@
         </p:nvSpPr>
         <p:spPr>
           <a:xfrm>
-            <a:off x="7406640" y="2651760"/>
-            <a:ext cx="3840480" cy="457200"/>
+            <a:off x="7955279" y="2651760"/>
+            <a:ext cx="3291840" cy="457200"/>
           </a:xfrm>
           <a:prstGeom prst="rect">
             <a:avLst/>
@@ -6905,13 +7543,13 @@
               </a:lnSpc>
             </a:pPr>
             <a:r>
-              <a:rPr sz="1250" b="0">
+              <a:rPr sz="1200" b="0">
                 <a:solidFill>
                   <a:srgbClr val="8A8A8A"/>
                 </a:solidFill>
                 <a:latin typeface="맑은 고딕"/>
               </a:rPr>
-              <a:t>공식 데이터 1,000건 파이프라인</a:t>
+              <a:t>공식 데이터 1,682건 파이프라인</a:t>
             </a:r>
           </a:p>
         </p:txBody>
@@ -7098,7 +7736,7 @@
         <p:spPr>
           <a:xfrm>
             <a:off x="2240280" y="3566160"/>
-            <a:ext cx="5303520" cy="457200"/>
+            <a:ext cx="5669280" cy="457200"/>
           </a:xfrm>
           <a:prstGeom prst="rect">
             <a:avLst/>
@@ -7136,8 +7774,8 @@
         </p:nvSpPr>
         <p:spPr>
           <a:xfrm>
-            <a:off x="7406640" y="3657600"/>
-            <a:ext cx="3840480" cy="457200"/>
+            <a:off x="7955279" y="3657600"/>
+            <a:ext cx="3291840" cy="457200"/>
           </a:xfrm>
           <a:prstGeom prst="rect">
             <a:avLst/>
@@ -7156,7 +7794,7 @@
               </a:lnSpc>
             </a:pPr>
             <a:r>
-              <a:rPr sz="1250" b="0">
+              <a:rPr sz="1200" b="0">
                 <a:solidFill>
                   <a:srgbClr val="8A8A8A"/>
                 </a:solidFill>
@@ -7349,7 +7987,7 @@
         <p:spPr>
           <a:xfrm>
             <a:off x="2240280" y="4572000"/>
-            <a:ext cx="5303520" cy="457200"/>
+            <a:ext cx="5669280" cy="457200"/>
           </a:xfrm>
           <a:prstGeom prst="rect">
             <a:avLst/>
@@ -7374,7 +8012,7 @@
                 </a:solidFill>
                 <a:latin typeface="맑은 고딕"/>
               </a:rPr>
-              <a:t>서비스 시연</a:t>
+              <a:t>시스템 아키텍처 및 배포</a:t>
             </a:r>
           </a:p>
         </p:txBody>
@@ -7387,8 +8025,8 @@
         </p:nvSpPr>
         <p:spPr>
           <a:xfrm>
-            <a:off x="7406640" y="4663440"/>
-            <a:ext cx="3840480" cy="457200"/>
+            <a:off x="7955279" y="4663440"/>
+            <a:ext cx="3291840" cy="457200"/>
           </a:xfrm>
           <a:prstGeom prst="rect">
             <a:avLst/>
@@ -7407,13 +8045,13 @@
               </a:lnSpc>
             </a:pPr>
             <a:r>
-              <a:rPr sz="1250" b="0">
+              <a:rPr sz="1200" b="0">
                 <a:solidFill>
                   <a:srgbClr val="8A8A8A"/>
                 </a:solidFill>
                 <a:latin typeface="맑은 고딕"/>
               </a:rPr>
-              <a:t>대시보드부터 AI 상담까지</a:t>
+              <a:t>Vercel · Render · Supabase 실배포</a:t>
             </a:r>
           </a:p>
         </p:txBody>
@@ -7600,7 +8238,7 @@
         <p:spPr>
           <a:xfrm>
             <a:off x="2240280" y="5577840"/>
-            <a:ext cx="5303520" cy="457200"/>
+            <a:ext cx="5669280" cy="457200"/>
           </a:xfrm>
           <a:prstGeom prst="rect">
             <a:avLst/>
@@ -7625,7 +8263,7 @@
                 </a:solidFill>
                 <a:latin typeface="맑은 고딕"/>
               </a:rPr>
-              <a:t>Q&amp;A</a:t>
+              <a:t>한계와 확장성 · 서비스 시연 · Q&amp;A</a:t>
             </a:r>
           </a:p>
         </p:txBody>
@@ -7638,8 +8276,8 @@
         </p:nvSpPr>
         <p:spPr>
           <a:xfrm>
-            <a:off x="7406640" y="5669280"/>
-            <a:ext cx="3840480" cy="457200"/>
+            <a:off x="7955279" y="5669280"/>
+            <a:ext cx="3291840" cy="457200"/>
           </a:xfrm>
           <a:prstGeom prst="rect">
             <a:avLst/>
@@ -7658,13 +8296,13 @@
               </a:lnSpc>
             </a:pPr>
             <a:r>
-              <a:rPr sz="1250" b="0">
+              <a:rPr sz="1200" b="0">
                 <a:solidFill>
                   <a:srgbClr val="8A8A8A"/>
                 </a:solidFill>
                 <a:latin typeface="맑은 고딕"/>
               </a:rPr>
-              <a:t>질의응답 및 향후 계획</a:t>
+              <a:t>향후 도메인 확장 계획과 데모</a:t>
             </a:r>
           </a:p>
         </p:txBody>
@@ -9150,7 +9788,7 @@
                 </a:solidFill>
                 <a:latin typeface="맑은 고딕"/>
               </a:rPr>
-              <a:t>공공·공식 데이터 12개 소스 → Supabase 통합 적재 1,000건</a:t>
+              <a:t>공공·공식 데이터 소스 → Supabase 통합 적재 1,682건</a:t>
             </a:r>
           </a:p>
         </p:txBody>
@@ -9298,7 +9936,7 @@
         <p:spPr>
           <a:xfrm>
             <a:off x="804672" y="1645920"/>
-            <a:ext cx="2468880" cy="365760"/>
+            <a:ext cx="2606040" cy="365760"/>
           </a:xfrm>
           <a:prstGeom prst="rect">
             <a:avLst/>
@@ -9317,7 +9955,7 @@
               </a:lnSpc>
             </a:pPr>
             <a:r>
-              <a:rPr sz="1500" b="1">
+              <a:rPr sz="1400" b="1">
                 <a:solidFill>
                   <a:srgbClr val="1E4D2B"/>
                 </a:solidFill>
@@ -9356,13 +9994,13 @@
               </a:lnSpc>
             </a:pPr>
             <a:r>
-              <a:rPr sz="1150" b="0">
+              <a:rPr sz="1050" b="0">
                 <a:solidFill>
                   <a:srgbClr val="8A8A8A"/>
                 </a:solidFill>
                 <a:latin typeface="맑은 고딕"/>
               </a:rPr>
-              <a:t>작목 정보·전자책·농작업 일정</a:t>
+              <a:t>작목정보·전자책·농작업일정·주간농사정보·실내식물</a:t>
             </a:r>
           </a:p>
         </p:txBody>
@@ -9375,8 +10013,8 @@
         </p:nvSpPr>
         <p:spPr>
           <a:xfrm>
-            <a:off x="3154680" y="1645920"/>
-            <a:ext cx="960120" cy="411480"/>
+            <a:off x="3291840" y="1645920"/>
+            <a:ext cx="841248" cy="411480"/>
           </a:xfrm>
           <a:prstGeom prst="rect">
             <a:avLst/>
@@ -9395,13 +10033,13 @@
               </a:lnSpc>
             </a:pPr>
             <a:r>
-              <a:rPr sz="1600" b="1">
+              <a:rPr sz="1500" b="1">
                 <a:solidFill>
                   <a:srgbClr val="3B7A57"/>
                 </a:solidFill>
                 <a:latin typeface="맑은 고딕"/>
               </a:rPr>
-              <a:t>603건</a:t>
+              <a:t>711건</a:t>
             </a:r>
           </a:p>
         </p:txBody>
@@ -9505,7 +10143,7 @@
         <p:spPr>
           <a:xfrm>
             <a:off x="4736592" y="1645920"/>
-            <a:ext cx="2468880" cy="365760"/>
+            <a:ext cx="2606040" cy="365760"/>
           </a:xfrm>
           <a:prstGeom prst="rect">
             <a:avLst/>
@@ -9524,7 +10162,7 @@
               </a:lnSpc>
             </a:pPr>
             <a:r>
-              <a:rPr sz="1500" b="1">
+              <a:rPr sz="1400" b="1">
                 <a:solidFill>
                   <a:srgbClr val="1E4D2B"/>
                 </a:solidFill>
@@ -9563,13 +10201,13 @@
               </a:lnSpc>
             </a:pPr>
             <a:r>
-              <a:rPr sz="1150" b="0">
+              <a:rPr sz="1050" b="0">
                 <a:solidFill>
                   <a:srgbClr val="8A8A8A"/>
                 </a:solidFill>
                 <a:latin typeface="맑은 고딕"/>
               </a:rPr>
-              <a:t>병·해충 발생조건, 증상, 예방</a:t>
+              <a:t>병·해충 발생조건, 증상, 예방 (OpenAPI)</a:t>
             </a:r>
           </a:p>
         </p:txBody>
@@ -9582,8 +10220,8 @@
         </p:nvSpPr>
         <p:spPr>
           <a:xfrm>
-            <a:off x="7086600" y="1645920"/>
-            <a:ext cx="960120" cy="411480"/>
+            <a:off x="7223760" y="1645920"/>
+            <a:ext cx="841248" cy="411480"/>
           </a:xfrm>
           <a:prstGeom prst="rect">
             <a:avLst/>
@@ -9602,13 +10240,13 @@
               </a:lnSpc>
             </a:pPr>
             <a:r>
-              <a:rPr sz="1600" b="1">
+              <a:rPr sz="1500" b="1">
                 <a:solidFill>
                   <a:srgbClr val="3B7A57"/>
                 </a:solidFill>
                 <a:latin typeface="맑은 고딕"/>
               </a:rPr>
-              <a:t>61건</a:t>
+              <a:t>479건</a:t>
             </a:r>
           </a:p>
         </p:txBody>
@@ -9712,7 +10350,7 @@
         <p:spPr>
           <a:xfrm>
             <a:off x="804672" y="3054096"/>
-            <a:ext cx="2468880" cy="365760"/>
+            <a:ext cx="2606040" cy="365760"/>
           </a:xfrm>
           <a:prstGeom prst="rect">
             <a:avLst/>
@@ -9731,13 +10369,13 @@
               </a:lnSpc>
             </a:pPr>
             <a:r>
-              <a:rPr sz="1500" b="1">
+              <a:rPr sz="1400" b="1">
                 <a:solidFill>
                   <a:srgbClr val="1E4D2B"/>
                 </a:solidFill>
                 <a:latin typeface="맑은 고딕"/>
               </a:rPr>
-              <a:t>국립수목원 도감</a:t>
+              <a:t>AI Hub</a:t>
             </a:r>
           </a:p>
         </p:txBody>
@@ -9770,13 +10408,13 @@
               </a:lnSpc>
             </a:pPr>
             <a:r>
-              <a:rPr sz="1150" b="0">
+              <a:rPr sz="1050" b="0">
                 <a:solidFill>
                   <a:srgbClr val="8A8A8A"/>
                 </a:solidFill>
                 <a:latin typeface="맑은 고딕"/>
               </a:rPr>
-              <a:t>식물 특징·학명·과명 (OpenAPI)</a:t>
+              <a:t>농축수산 목록·화훼 물주기·육묘 생장</a:t>
             </a:r>
           </a:p>
         </p:txBody>
@@ -9789,8 +10427,8 @@
         </p:nvSpPr>
         <p:spPr>
           <a:xfrm>
-            <a:off x="3154680" y="3054096"/>
-            <a:ext cx="960120" cy="411480"/>
+            <a:off x="3291840" y="3054096"/>
+            <a:ext cx="841248" cy="411480"/>
           </a:xfrm>
           <a:prstGeom prst="rect">
             <a:avLst/>
@@ -9809,13 +10447,13 @@
               </a:lnSpc>
             </a:pPr>
             <a:r>
-              <a:rPr sz="1600" b="1">
+              <a:rPr sz="1500" b="1">
                 <a:solidFill>
                   <a:srgbClr val="3B7A57"/>
                 </a:solidFill>
                 <a:latin typeface="맑은 고딕"/>
               </a:rPr>
-              <a:t>100건</a:t>
+              <a:t>143건</a:t>
             </a:r>
           </a:p>
         </p:txBody>
@@ -9919,7 +10557,7 @@
         <p:spPr>
           <a:xfrm>
             <a:off x="4736592" y="3054096"/>
-            <a:ext cx="2468880" cy="365760"/>
+            <a:ext cx="2606040" cy="365760"/>
           </a:xfrm>
           <a:prstGeom prst="rect">
             <a:avLst/>
@@ -9938,13 +10576,13 @@
               </a:lnSpc>
             </a:pPr>
             <a:r>
-              <a:rPr sz="1500" b="1">
+              <a:rPr sz="1400" b="1">
                 <a:solidFill>
                   <a:srgbClr val="1E4D2B"/>
                 </a:solidFill>
                 <a:latin typeface="맑은 고딕"/>
               </a:rPr>
-              <a:t>AI Hub</a:t>
+              <a:t>국립수목원 도감</a:t>
             </a:r>
           </a:p>
         </p:txBody>
@@ -9977,13 +10615,13 @@
               </a:lnSpc>
             </a:pPr>
             <a:r>
-              <a:rPr sz="1150" b="0">
+              <a:rPr sz="1050" b="0">
                 <a:solidFill>
                   <a:srgbClr val="8A8A8A"/>
                 </a:solidFill>
                 <a:latin typeface="맑은 고딕"/>
               </a:rPr>
-              <a:t>이미지 메타·병해충 분류·육묘·물주기</a:t>
+              <a:t>식물 특징·학명·과명 — 실내·관상·작물</a:t>
             </a:r>
           </a:p>
         </p:txBody>
@@ -9996,8 +10634,8 @@
         </p:nvSpPr>
         <p:spPr>
           <a:xfrm>
-            <a:off x="7086600" y="3054096"/>
-            <a:ext cx="960120" cy="411480"/>
+            <a:off x="7223760" y="3054096"/>
+            <a:ext cx="841248" cy="411480"/>
           </a:xfrm>
           <a:prstGeom prst="rect">
             <a:avLst/>
@@ -10016,13 +10654,13 @@
               </a:lnSpc>
             </a:pPr>
             <a:r>
-              <a:rPr sz="1600" b="1">
+              <a:rPr sz="1500" b="1">
                 <a:solidFill>
                   <a:srgbClr val="3B7A57"/>
                 </a:solidFill>
                 <a:latin typeface="맑은 고딕"/>
               </a:rPr>
-              <a:t>146건</a:t>
+              <a:t>100건</a:t>
             </a:r>
           </a:p>
         </p:txBody>
@@ -10126,7 +10764,7 @@
         <p:spPr>
           <a:xfrm>
             <a:off x="804672" y="4462272"/>
-            <a:ext cx="2468880" cy="365760"/>
+            <a:ext cx="2606040" cy="365760"/>
           </a:xfrm>
           <a:prstGeom prst="rect">
             <a:avLst/>
@@ -10145,7 +10783,7 @@
               </a:lnSpc>
             </a:pPr>
             <a:r>
-              <a:rPr sz="1500" b="1">
+              <a:rPr sz="1400" b="1">
                 <a:solidFill>
                   <a:srgbClr val="1E4D2B"/>
                 </a:solidFill>
@@ -10184,13 +10822,13 @@
               </a:lnSpc>
             </a:pPr>
             <a:r>
-              <a:rPr sz="1150" b="0">
+              <a:rPr sz="1050" b="0">
                 <a:solidFill>
                   <a:srgbClr val="8A8A8A"/>
                 </a:solidFill>
                 <a:latin typeface="맑은 고딕"/>
               </a:rPr>
-              <a:t>적용 약제·안전 희석 배수</a:t>
+              <a:t>농약등록정보 — 안전 참고 전용(safety_reference_only)</a:t>
             </a:r>
           </a:p>
         </p:txBody>
@@ -10203,8 +10841,8 @@
         </p:nvSpPr>
         <p:spPr>
           <a:xfrm>
-            <a:off x="3154680" y="4462272"/>
-            <a:ext cx="960120" cy="411480"/>
+            <a:off x="3291840" y="4462272"/>
+            <a:ext cx="841248" cy="411480"/>
           </a:xfrm>
           <a:prstGeom prst="rect">
             <a:avLst/>
@@ -10223,13 +10861,13 @@
               </a:lnSpc>
             </a:pPr>
             <a:r>
-              <a:rPr sz="1600" b="1">
+              <a:rPr sz="1500" b="1">
                 <a:solidFill>
                   <a:srgbClr val="3B7A57"/>
                 </a:solidFill>
                 <a:latin typeface="맑은 고딕"/>
               </a:rPr>
-              <a:t>82건</a:t>
+              <a:t>100건</a:t>
             </a:r>
           </a:p>
         </p:txBody>
@@ -10333,7 +10971,7 @@
         <p:spPr>
           <a:xfrm>
             <a:off x="4736592" y="4462272"/>
-            <a:ext cx="2468880" cy="365760"/>
+            <a:ext cx="2606040" cy="365760"/>
           </a:xfrm>
           <a:prstGeom prst="rect">
             <a:avLst/>
@@ -10352,13 +10990,13 @@
               </a:lnSpc>
             </a:pPr>
             <a:r>
-              <a:rPr sz="1500" b="1">
+              <a:rPr sz="1400" b="1">
                 <a:solidFill>
                   <a:srgbClr val="1E4D2B"/>
                 </a:solidFill>
                 <a:latin typeface="맑은 고딕"/>
               </a:rPr>
-              <a:t>네이버 지식백과</a:t>
+              <a:t>농업날씨365 · 네이버</a:t>
             </a:r>
           </a:p>
         </p:txBody>
@@ -10391,13 +11029,13 @@
               </a:lnSpc>
             </a:pPr>
             <a:r>
-              <a:rPr sz="1150" b="0">
+              <a:rPr sz="1050" b="0">
                 <a:solidFill>
                   <a:srgbClr val="8A8A8A"/>
                 </a:solidFill>
                 <a:latin typeface="맑은 고딕"/>
               </a:rPr>
-              <a:t>실내식물 보조 지식 문서</a:t>
+              <a:t>기상 컨텍스트 100건 + 지식백과 보조 문서 49건</a:t>
             </a:r>
           </a:p>
         </p:txBody>
@@ -10410,8 +11048,8 @@
         </p:nvSpPr>
         <p:spPr>
           <a:xfrm>
-            <a:off x="7086600" y="4462272"/>
-            <a:ext cx="960120" cy="411480"/>
+            <a:off x="7223760" y="4462272"/>
+            <a:ext cx="841248" cy="411480"/>
           </a:xfrm>
           <a:prstGeom prst="rect">
             <a:avLst/>
@@ -10430,13 +11068,13 @@
               </a:lnSpc>
             </a:pPr>
             <a:r>
-              <a:rPr sz="1600" b="1">
+              <a:rPr sz="1500" b="1">
                 <a:solidFill>
                   <a:srgbClr val="3B7A57"/>
                 </a:solidFill>
                 <a:latin typeface="맑은 고딕"/>
               </a:rPr>
-              <a:t>8건</a:t>
+              <a:t>149건</a:t>
             </a:r>
           </a:p>
         </p:txBody>
@@ -10525,7 +11163,7 @@
                 </a:solidFill>
                 <a:latin typeface="맑은 고딕"/>
               </a:rPr>
-              <a:t>1,000건</a:t>
+              <a:t>1,682건</a:t>
             </a:r>
           </a:p>
         </p:txBody>
@@ -10598,7 +11236,7 @@
                 </a:solidFill>
                 <a:latin typeface="맑은 고딕"/>
               </a:rPr>
-              <a:t>·  rag_sources / rag_chunks 테이블 통합 적재</a:t>
+              <a:t>·  rag_sources / rag_chunks 테이블 통합 적재 (16개 세부 출처)</a:t>
             </a:r>
           </a:p>
           <a:p>
@@ -11371,7 +12009,7 @@
                 </a:solidFill>
                 <a:latin typeface="맑은 고딕"/>
               </a:rPr>
-              <a:t>2200자/250자 overlap</a:t>
+              <a:t>출처별 가변 크기</a:t>
             </a:r>
           </a:p>
         </p:txBody>
@@ -11652,115 +12290,158 @@
           <a:bodyPr rtlCol="0" anchor="ctr" wrap="square" lIns="203200" rIns="203200" tIns="152400"/>
           <a:lstStyle/>
           <a:p>
-            <a:pPr algn="l">
+            <a:pPr algn="ctr">
               <a:spcAft>
                 <a:spcPts val="600"/>
               </a:spcAft>
             </a:pPr>
             <a:r>
-              <a:rPr sz="1550" b="1">
+              <a:rPr sz="1600" b="1">
                 <a:solidFill>
                   <a:srgbClr val="1E4D2B"/>
                 </a:solidFill>
                 <a:latin typeface="맑은 고딕"/>
               </a:rPr>
-              <a:t>핵심 설계 포인트</a:t>
-            </a:r>
-          </a:p>
-          <a:p>
-            <a:pPr algn="l">
-              <a:lnSpc>
-                <a:spcPct val="118000"/>
-              </a:lnSpc>
-            </a:pPr>
-            <a:r>
-              <a:rPr sz="1300" b="0">
+              <a:t>출처별 가변 청킹 전략</a:t>
+            </a:r>
+          </a:p>
+          <a:p>
+            <a:pPr>
+              <a:lnSpc>
+                <a:spcPct val="115000"/>
+              </a:lnSpc>
+            </a:pPr>
+            <a:r>
+              <a:rPr sz="1250" b="1">
                 <a:solidFill>
                   <a:srgbClr val="3A3A3A"/>
                 </a:solidFill>
                 <a:latin typeface="맑은 고딕"/>
               </a:rPr>
-              <a:t>·  청킹 2200자: 정보 희석과 문맥 손실 사이의 최적 규격</a:t>
-            </a:r>
-          </a:p>
-          <a:p>
-            <a:pPr algn="l">
-              <a:lnSpc>
-                <a:spcPct val="118000"/>
-              </a:lnSpc>
-            </a:pPr>
-            <a:r>
-              <a:rPr sz="1300" b="0">
+              <a:t>·  기본값 (HWPX 작업일정 등) — </a:t>
+            </a:r>
+            <a:r>
+              <a:rPr sz="1250" b="1">
+                <a:solidFill>
+                  <a:srgbClr val="3B7A57"/>
+                </a:solidFill>
+                <a:latin typeface="맑은 고딕"/>
+              </a:rPr>
+              <a:t>2200자 / overlap 250자</a:t>
+            </a:r>
+          </a:p>
+          <a:p>
+            <a:pPr>
+              <a:lnSpc>
+                <a:spcPct val="110000"/>
+              </a:lnSpc>
+            </a:pPr>
+            <a:r>
+              <a:rPr sz="1100">
+                <a:solidFill>
+                  <a:srgbClr val="8A8A8A"/>
+                </a:solidFill>
+                <a:latin typeface="맑은 고딕"/>
+              </a:rPr>
+              <a:t>      표·문단 재구성 문서 — 일정 흐름 맥락 보존</a:t>
+            </a:r>
+          </a:p>
+          <a:p>
+            <a:pPr>
+              <a:lnSpc>
+                <a:spcPct val="115000"/>
+              </a:lnSpc>
+            </a:pPr>
+            <a:r>
+              <a:rPr sz="1250" b="1">
                 <a:solidFill>
                   <a:srgbClr val="3A3A3A"/>
                 </a:solidFill>
                 <a:latin typeface="맑은 고딕"/>
               </a:rPr>
-              <a:t>·  Overlap 250자: 청크 경계에서의 의미 단절 방지</a:t>
-            </a:r>
-          </a:p>
-          <a:p>
-            <a:pPr algn="l">
-              <a:lnSpc>
-                <a:spcPct val="118000"/>
-              </a:lnSpc>
-            </a:pPr>
-            <a:r>
-              <a:rPr sz="1300" b="0">
+              <a:t>·  NCPMS 병해충 문서 — </a:t>
+            </a:r>
+            <a:r>
+              <a:rPr sz="1250" b="1">
+                <a:solidFill>
+                  <a:srgbClr val="3B7A57"/>
+                </a:solidFill>
+                <a:latin typeface="맑은 고딕"/>
+              </a:rPr>
+              <a:t>1400자 / overlap 160자</a:t>
+            </a:r>
+          </a:p>
+          <a:p>
+            <a:pPr>
+              <a:lnSpc>
+                <a:spcPct val="110000"/>
+              </a:lnSpc>
+            </a:pPr>
+            <a:r>
+              <a:rPr sz="1100">
+                <a:solidFill>
+                  <a:srgbClr val="8A8A8A"/>
+                </a:solidFill>
+                <a:latin typeface="맑은 고딕"/>
+              </a:rPr>
+              <a:t>      증상·발생조건·예방이 짧고 밀도 높음</a:t>
+            </a:r>
+          </a:p>
+          <a:p>
+            <a:pPr>
+              <a:lnSpc>
+                <a:spcPct val="115000"/>
+              </a:lnSpc>
+            </a:pPr>
+            <a:r>
+              <a:rPr sz="1250" b="1">
                 <a:solidFill>
                   <a:srgbClr val="3A3A3A"/>
                 </a:solidFill>
                 <a:latin typeface="맑은 고딕"/>
               </a:rPr>
-              <a:t>·  문장 마침표·개행 경계를 추적하는 문맥 보존형 분할</a:t>
-            </a:r>
-          </a:p>
-          <a:p>
-            <a:pPr algn="l">
-              <a:lnSpc>
-                <a:spcPct val="118000"/>
-              </a:lnSpc>
-            </a:pPr>
-            <a:r>
-              <a:rPr sz="1300" b="0">
+              <a:t>·  농사로 실내식물·작물 — </a:t>
+            </a:r>
+            <a:r>
+              <a:rPr sz="1250" b="1">
+                <a:solidFill>
+                  <a:srgbClr val="3B7A57"/>
+                </a:solidFill>
+                <a:latin typeface="맑은 고딕"/>
+              </a:rPr>
+              <a:t>1200자 / overlap 140자</a:t>
+            </a:r>
+          </a:p>
+          <a:p>
+            <a:pPr>
+              <a:lnSpc>
+                <a:spcPct val="110000"/>
+              </a:lnSpc>
+            </a:pPr>
+            <a:r>
+              <a:rPr sz="1100">
+                <a:solidFill>
+                  <a:srgbClr val="8A8A8A"/>
+                </a:solidFill>
+                <a:latin typeface="맑은 고딕"/>
+              </a:rPr>
+              <a:t>      물주기·광도 등 항목형 정보에 최적</a:t>
+            </a:r>
+          </a:p>
+          <a:p>
+            <a:pPr>
+              <a:lnSpc>
+                <a:spcPct val="120000"/>
+              </a:lnSpc>
+            </a:pPr>
+            <a:r>
+              <a:rPr sz="1150">
                 <a:solidFill>
                   <a:srgbClr val="3A3A3A"/>
                 </a:solidFill>
                 <a:latin typeface="맑은 고딕"/>
               </a:rPr>
-              <a:t>·  임베딩: OpenAI text-embedding-3-small (1536차원)</a:t>
-            </a:r>
-          </a:p>
-          <a:p>
-            <a:pPr algn="l">
-              <a:lnSpc>
-                <a:spcPct val="118000"/>
-              </a:lnSpc>
-            </a:pPr>
-            <a:r>
-              <a:rPr sz="1300" b="0">
-                <a:solidFill>
-                  <a:srgbClr val="3A3A3A"/>
-                </a:solidFill>
-                <a:latin typeface="맑은 고딕"/>
-              </a:rPr>
-              <a:t>·  로컬 선캐싱(Decoupling) 후 DB 적재로 정합성 확보</a:t>
-            </a:r>
-          </a:p>
-          <a:p>
-            <a:pPr algn="l">
-              <a:lnSpc>
-                <a:spcPct val="118000"/>
-              </a:lnSpc>
-            </a:pPr>
-            <a:r>
-              <a:rPr sz="1300" b="0">
-                <a:solidFill>
-                  <a:srgbClr val="3A3A3A"/>
-                </a:solidFill>
-                <a:latin typeface="맑은 고딕"/>
-              </a:rPr>
-              <a:t>·  식물명 메타 태깅으로 타 식물 문서 오검색 예방</a:t>
+              <a:t>·  문장 마침표·개행 경계를 추적하는 문맥 보존형 분할 + overlap으로 경계 유실 방지</a:t>
             </a:r>
           </a:p>
         </p:txBody>
@@ -11819,7 +12500,7 @@
                 </a:solidFill>
                 <a:latin typeface="맑은 고딕"/>
               </a:rPr>
-              <a:t>자동 정합성 검증 (QA)</a:t>
+              <a:t>임베딩 · 자동 정합성 검증 (QA)</a:t>
             </a:r>
           </a:p>
           <a:p>
@@ -11854,13 +12535,13 @@
               </a:lnSpc>
             </a:pPr>
             <a:r>
-              <a:rPr sz="1300">
+              <a:rPr sz="1250">
                 <a:solidFill>
                   <a:srgbClr val="3A3A3A"/>
                 </a:solidFill>
                 <a:latin typeface="맑은 고딕"/>
               </a:rPr>
-              <a:t>·  청크 chunk_id UUID 고유성 검증</a:t>
+              <a:t>·  임베딩: OpenAI text-embedding-3-small (1536차원)</a:t>
             </a:r>
           </a:p>
           <a:p>
@@ -11870,13 +12551,13 @@
               </a:lnSpc>
             </a:pPr>
             <a:r>
-              <a:rPr sz="1300">
+              <a:rPr sz="1250">
                 <a:solidFill>
                   <a:srgbClr val="3A3A3A"/>
                 </a:solidFill>
                 <a:latin typeface="맑은 고딕"/>
               </a:rPr>
-              <a:t>·  source_id ↔ rag_sources FK 연결 검증</a:t>
+              <a:t>·  로컬 선캐싱(Decoupling) 후 DB 적재로 정합성 확보</a:t>
             </a:r>
           </a:p>
           <a:p>
@@ -11886,12 +12567,28 @@
               </a:lnSpc>
             </a:pPr>
             <a:r>
-              <a:rPr sz="1300">
+              <a:rPr sz="1250">
                 <a:solidFill>
                   <a:srgbClr val="3A3A3A"/>
                 </a:solidFill>
                 <a:latin typeface="맑은 고딕"/>
               </a:rPr>
+              <a:t>·  청크 chunk_id UUID 고유성 · rag_sources FK 연결 검증</a:t>
+            </a:r>
+          </a:p>
+          <a:p>
+            <a:pPr>
+              <a:lnSpc>
+                <a:spcPct val="120000"/>
+              </a:lnSpc>
+            </a:pPr>
+            <a:r>
+              <a:rPr sz="1250">
+                <a:solidFill>
+                  <a:srgbClr val="3A3A3A"/>
+                </a:solidFill>
+                <a:latin typeface="맑은 고딕"/>
+              </a:rPr>
               <a:t>·  임베딩 벡터 1536차원 일치 확인</a:t>
             </a:r>
           </a:p>
@@ -11902,7 +12599,7 @@
               </a:lnSpc>
             </a:pPr>
             <a:r>
-              <a:rPr sz="1300">
+              <a:rPr sz="1250">
                 <a:solidFill>
                   <a:srgbClr val="3A3A3A"/>
                 </a:solidFill>
@@ -12061,7 +12758,7 @@
                 </a:solidFill>
                 <a:latin typeface="맑은 고딕"/>
               </a:rPr>
-              <a:t>RAG 기술 ① 시스템 아키텍처</a:t>
+              <a:t>RAG 기술 ① LangGraph 파이프라인</a:t>
             </a:r>
           </a:p>
         </p:txBody>
@@ -12100,7 +12797,7 @@
                 </a:solidFill>
                 <a:latin typeface="맑은 고딕"/>
               </a:rPr>
-              <a:t>Vercel + Render + Supabase + OpenAI</a:t>
+              <a:t>10단계 에이전틱 워크플로우 — StateGraph 시각화</a:t>
             </a:r>
           </a:p>
         </p:txBody>
@@ -12149,25 +12846,56 @@
           </a:p>
         </p:txBody>
       </p:sp>
-      <p:sp>
-        <p:nvSpPr>
-          <p:cNvPr id="6" name="Rounded Rectangle 5"/>
+      <p:pic>
+        <p:nvPicPr>
+          <p:cNvPr id="6" name="Picture 5" descr="langgraph_flow.png"/>
+          <p:cNvPicPr>
+            <a:picLocks noChangeAspect="1"/>
+          </p:cNvPicPr>
+          <p:nvPr/>
+        </p:nvPicPr>
+        <p:blipFill>
+          <a:blip r:embed="rId2"/>
+          <a:stretch>
+            <a:fillRect/>
+          </a:stretch>
+        </p:blipFill>
+        <p:spPr>
+          <a:xfrm>
+            <a:off x="685800" y="1371600"/>
+            <a:ext cx="1932753" cy="5212080"/>
+          </a:xfrm>
+          <a:prstGeom prst="rect">
+            <a:avLst/>
+          </a:prstGeom>
+          <a:ln w="15875">
+            <a:solidFill>
+              <a:srgbClr val="E8E8E8"/>
+            </a:solidFill>
+          </a:ln>
+        </p:spPr>
+      </p:pic>
+      <p:sp>
+        <p:nvSpPr>
+          <p:cNvPr id="7" name="Rounded Rectangle 6"/>
           <p:cNvSpPr/>
           <p:nvPr/>
         </p:nvSpPr>
         <p:spPr>
           <a:xfrm>
-            <a:off x="457200" y="1600200"/>
-            <a:ext cx="1188720" cy="960120"/>
+            <a:off x="3108960" y="1371600"/>
+            <a:ext cx="8503920" cy="969264"/>
           </a:xfrm>
           <a:prstGeom prst="roundRect">
             <a:avLst/>
           </a:prstGeom>
           <a:solidFill>
-            <a:srgbClr val="3A3A3A"/>
+            <a:srgbClr val="FFFFFF"/>
           </a:solidFill>
-          <a:ln>
-            <a:noFill/>
+          <a:ln w="12700">
+            <a:solidFill>
+              <a:srgbClr val="E8E8E8"/>
+            </a:solidFill>
           </a:ln>
           <a:effectLst/>
         </p:spPr>
@@ -12186,82 +12914,25 @@
           </a:fontRef>
         </p:style>
         <p:txBody>
-          <a:bodyPr rtlCol="0" anchor="ctr" wrap="square" lIns="101600" rIns="101600" tIns="50800" bIns="50800"/>
-          <a:lstStyle/>
-          <a:p>
-            <a:pPr algn="ctr">
-              <a:lnSpc>
-                <a:spcPct val="112000"/>
-              </a:lnSpc>
-            </a:pPr>
-            <a:r>
-              <a:rPr sz="1300" b="1">
-                <a:solidFill>
-                  <a:srgbClr val="FFFFFF"/>
-                </a:solidFill>
-                <a:latin typeface="맑은 고딕"/>
-              </a:rPr>
-              <a:t>사용자</a:t>
-            </a:r>
-          </a:p>
-        </p:txBody>
-      </p:sp>
-      <p:sp>
-        <p:nvSpPr>
-          <p:cNvPr id="7" name="Right Arrow 6"/>
+          <a:bodyPr rtlCol="0" anchor="ctr"/>
+          <a:lstStyle/>
+          <a:p>
+            <a:pPr algn="ctr"/>
+          </a:p>
+        </p:txBody>
+      </p:sp>
+      <p:sp>
+        <p:nvSpPr>
+          <p:cNvPr id="8" name="Rectangle 7"/>
           <p:cNvSpPr/>
           <p:nvPr/>
         </p:nvSpPr>
         <p:spPr>
           <a:xfrm>
-            <a:off x="1655064" y="1947672"/>
-            <a:ext cx="182880" cy="256032"/>
-          </a:xfrm>
-          <a:prstGeom prst="rightArrow">
-            <a:avLst/>
-          </a:prstGeom>
-          <a:solidFill>
-            <a:srgbClr val="7CB342"/>
-          </a:solidFill>
-          <a:ln>
-            <a:noFill/>
-          </a:ln>
-          <a:effectLst/>
-        </p:spPr>
-        <p:style>
-          <a:lnRef idx="1">
-            <a:schemeClr val="accent1"/>
-          </a:lnRef>
-          <a:fillRef idx="3">
-            <a:schemeClr val="accent1"/>
-          </a:fillRef>
-          <a:effectRef idx="2">
-            <a:schemeClr val="accent1"/>
-          </a:effectRef>
-          <a:fontRef idx="minor">
-            <a:schemeClr val="lt1"/>
-          </a:fontRef>
-        </p:style>
-        <p:txBody>
-          <a:bodyPr rtlCol="0" anchor="ctr"/>
-          <a:lstStyle/>
-          <a:p>
-            <a:pPr algn="ctr"/>
-          </a:p>
-        </p:txBody>
-      </p:sp>
-      <p:sp>
-        <p:nvSpPr>
-          <p:cNvPr id="8" name="Rounded Rectangle 7"/>
-          <p:cNvSpPr/>
-          <p:nvPr/>
-        </p:nvSpPr>
-        <p:spPr>
-          <a:xfrm>
-            <a:off x="1856232" y="1600200"/>
-            <a:ext cx="2011680" cy="960120"/>
-          </a:xfrm>
-          <a:prstGeom prst="roundRect">
+            <a:off x="3108960" y="1371600"/>
+            <a:ext cx="82296" cy="969264"/>
+          </a:xfrm>
+          <a:prstGeom prst="rect">
             <a:avLst/>
           </a:prstGeom>
           <a:solidFill>
@@ -12287,61 +12958,128 @@
           </a:fontRef>
         </p:style>
         <p:txBody>
-          <a:bodyPr rtlCol="0" anchor="ctr" wrap="square" lIns="101600" rIns="101600" tIns="50800" bIns="50800"/>
-          <a:lstStyle/>
-          <a:p>
-            <a:pPr algn="ctr">
+          <a:bodyPr rtlCol="0" anchor="ctr"/>
+          <a:lstStyle/>
+          <a:p>
+            <a:pPr algn="ctr"/>
+          </a:p>
+        </p:txBody>
+      </p:sp>
+      <p:sp>
+        <p:nvSpPr>
+          <p:cNvPr id="9" name="TextBox 8"/>
+          <p:cNvSpPr txBox="1"/>
+          <p:nvPr/>
+        </p:nvSpPr>
+        <p:spPr>
+          <a:xfrm>
+            <a:off x="3337560" y="1417320"/>
+            <a:ext cx="8138160" cy="320040"/>
+          </a:xfrm>
+          <a:prstGeom prst="rect">
+            <a:avLst/>
+          </a:prstGeom>
+          <a:noFill/>
+        </p:spPr>
+        <p:txBody>
+          <a:bodyPr wrap="square" anchor="t" lIns="101600" rIns="101600" tIns="50800" bIns="50800">
+            <a:spAutoFit/>
+          </a:bodyPr>
+          <a:lstStyle/>
+          <a:p>
+            <a:pPr algn="l">
               <a:lnSpc>
                 <a:spcPct val="112000"/>
               </a:lnSpc>
             </a:pPr>
             <a:r>
-              <a:rPr sz="1300" b="1">
-                <a:solidFill>
-                  <a:srgbClr val="FFFFFF"/>
-                </a:solidFill>
-                <a:latin typeface="맑은 고딕"/>
-              </a:rPr>
-              <a:t>Vercel</a:t>
-            </a:r>
-          </a:p>
-          <a:p>
-            <a:pPr algn="ctr">
+              <a:rPr sz="1350" b="1">
+                <a:solidFill>
+                  <a:srgbClr val="3B7A57"/>
+                </a:solidFill>
+                <a:latin typeface="맑은 고딕"/>
+              </a:rPr>
+              <a:t>입력 이해  (1~4단계)</a:t>
+            </a:r>
+          </a:p>
+        </p:txBody>
+      </p:sp>
+      <p:sp>
+        <p:nvSpPr>
+          <p:cNvPr id="10" name="TextBox 9"/>
+          <p:cNvSpPr txBox="1"/>
+          <p:nvPr/>
+        </p:nvSpPr>
+        <p:spPr>
+          <a:xfrm>
+            <a:off x="3337560" y="1755648"/>
+            <a:ext cx="8138160" cy="548640"/>
+          </a:xfrm>
+          <a:prstGeom prst="rect">
+            <a:avLst/>
+          </a:prstGeom>
+          <a:noFill/>
+        </p:spPr>
+        <p:txBody>
+          <a:bodyPr wrap="square" anchor="t" lIns="101600" rIns="101600" tIns="50800" bIns="50800">
+            <a:spAutoFit/>
+          </a:bodyPr>
+          <a:lstStyle/>
+          <a:p>
+            <a:pPr algn="l">
               <a:lnSpc>
                 <a:spcPct val="112000"/>
               </a:lnSpc>
             </a:pPr>
             <a:r>
-              <a:rPr sz="1300" b="1">
-                <a:solidFill>
-                  <a:srgbClr val="FFFFFF"/>
-                </a:solidFill>
-                <a:latin typeface="맑은 고딕"/>
-              </a:rPr>
-              <a:t>React·TS 프론트</a:t>
-            </a:r>
-          </a:p>
-        </p:txBody>
-      </p:sp>
-      <p:sp>
-        <p:nvSpPr>
-          <p:cNvPr id="9" name="Right Arrow 8"/>
+              <a:rPr sz="1100" b="0">
+                <a:solidFill>
+                  <a:srgbClr val="3A3A3A"/>
+                </a:solidFill>
+                <a:latin typeface="맑은 고딕"/>
+              </a:rPr>
+              <a:t>식물·일지·사진 검증 → 대화 이력 로드 → Vision 이상 신호 추출 → 사용자 맥락 요약</a:t>
+            </a:r>
+          </a:p>
+          <a:p>
+            <a:pPr algn="l">
+              <a:lnSpc>
+                <a:spcPct val="112000"/>
+              </a:lnSpc>
+            </a:pPr>
+            <a:r>
+              <a:rPr sz="1100" b="0">
+                <a:solidFill>
+                  <a:srgbClr val="3A3A3A"/>
+                </a:solidFill>
+                <a:latin typeface="맑은 고딕"/>
+              </a:rPr>
+              <a:t>사용자의 식물 상태와 질문 의도를 구조화된 컨텍스트로 정리</a:t>
+            </a:r>
+          </a:p>
+        </p:txBody>
+      </p:sp>
+      <p:sp>
+        <p:nvSpPr>
+          <p:cNvPr id="11" name="Rounded Rectangle 10"/>
           <p:cNvSpPr/>
           <p:nvPr/>
         </p:nvSpPr>
         <p:spPr>
           <a:xfrm>
-            <a:off x="3877056" y="1947672"/>
-            <a:ext cx="182880" cy="256032"/>
-          </a:xfrm>
-          <a:prstGeom prst="rightArrow">
+            <a:off x="3108960" y="2450591"/>
+            <a:ext cx="8503920" cy="969264"/>
+          </a:xfrm>
+          <a:prstGeom prst="roundRect">
             <a:avLst/>
           </a:prstGeom>
           <a:solidFill>
-            <a:srgbClr val="7CB342"/>
+            <a:srgbClr val="FFFFFF"/>
           </a:solidFill>
-          <a:ln>
-            <a:noFill/>
+          <a:ln w="12700">
+            <a:solidFill>
+              <a:srgbClr val="E8E8E8"/>
+            </a:solidFill>
           </a:ln>
           <a:effectLst/>
         </p:spPr>
@@ -12369,16 +13107,16 @@
       </p:sp>
       <p:sp>
         <p:nvSpPr>
-          <p:cNvPr id="10" name="Rounded Rectangle 9"/>
+          <p:cNvPr id="12" name="Rectangle 11"/>
           <p:cNvSpPr/>
           <p:nvPr/>
         </p:nvSpPr>
         <p:spPr>
           <a:xfrm>
-            <a:off x="4078224" y="1600200"/>
-            <a:ext cx="2011680" cy="960120"/>
-          </a:xfrm>
-          <a:prstGeom prst="roundRect">
+            <a:off x="3108960" y="2450591"/>
+            <a:ext cx="82296" cy="969264"/>
+          </a:xfrm>
+          <a:prstGeom prst="rect">
             <a:avLst/>
           </a:prstGeom>
           <a:solidFill>
@@ -12404,58 +13142,169 @@
           </a:fontRef>
         </p:style>
         <p:txBody>
-          <a:bodyPr rtlCol="0" anchor="ctr" wrap="square" lIns="101600" rIns="101600" tIns="50800" bIns="50800"/>
-          <a:lstStyle/>
-          <a:p>
-            <a:pPr algn="ctr">
+          <a:bodyPr rtlCol="0" anchor="ctr"/>
+          <a:lstStyle/>
+          <a:p>
+            <a:pPr algn="ctr"/>
+          </a:p>
+        </p:txBody>
+      </p:sp>
+      <p:sp>
+        <p:nvSpPr>
+          <p:cNvPr id="13" name="TextBox 12"/>
+          <p:cNvSpPr txBox="1"/>
+          <p:nvPr/>
+        </p:nvSpPr>
+        <p:spPr>
+          <a:xfrm>
+            <a:off x="3337560" y="2496311"/>
+            <a:ext cx="8138160" cy="320040"/>
+          </a:xfrm>
+          <a:prstGeom prst="rect">
+            <a:avLst/>
+          </a:prstGeom>
+          <a:noFill/>
+        </p:spPr>
+        <p:txBody>
+          <a:bodyPr wrap="square" anchor="t" lIns="101600" rIns="101600" tIns="50800" bIns="50800">
+            <a:spAutoFit/>
+          </a:bodyPr>
+          <a:lstStyle/>
+          <a:p>
+            <a:pPr algn="l">
               <a:lnSpc>
                 <a:spcPct val="112000"/>
               </a:lnSpc>
             </a:pPr>
             <a:r>
-              <a:rPr sz="1300" b="1">
-                <a:solidFill>
-                  <a:srgbClr val="FFFFFF"/>
-                </a:solidFill>
-                <a:latin typeface="맑은 고딕"/>
-              </a:rPr>
-              <a:t>Render</a:t>
-            </a:r>
-          </a:p>
-          <a:p>
-            <a:pPr algn="ctr">
+              <a:rPr sz="1350" b="1">
+                <a:solidFill>
+                  <a:srgbClr val="3B7A57"/>
+                </a:solidFill>
+                <a:latin typeface="맑은 고딕"/>
+              </a:rPr>
+              <a:t>검색  (5~6단계)</a:t>
+            </a:r>
+          </a:p>
+        </p:txBody>
+      </p:sp>
+      <p:sp>
+        <p:nvSpPr>
+          <p:cNvPr id="14" name="TextBox 13"/>
+          <p:cNvSpPr txBox="1"/>
+          <p:nvPr/>
+        </p:nvSpPr>
+        <p:spPr>
+          <a:xfrm>
+            <a:off x="3337560" y="2834639"/>
+            <a:ext cx="8138160" cy="548640"/>
+          </a:xfrm>
+          <a:prstGeom prst="rect">
+            <a:avLst/>
+          </a:prstGeom>
+          <a:noFill/>
+        </p:spPr>
+        <p:txBody>
+          <a:bodyPr wrap="square" anchor="t" lIns="101600" rIns="101600" tIns="50800" bIns="50800">
+            <a:spAutoFit/>
+          </a:bodyPr>
+          <a:lstStyle/>
+          <a:p>
+            <a:pPr algn="l">
               <a:lnSpc>
                 <a:spcPct val="112000"/>
               </a:lnSpc>
             </a:pPr>
             <a:r>
-              <a:rPr sz="1300" b="1">
-                <a:solidFill>
-                  <a:srgbClr val="FFFFFF"/>
-                </a:solidFill>
-                <a:latin typeface="맑은 고딕"/>
-              </a:rPr>
-              <a:t>FastAPI 백엔드</a:t>
-            </a:r>
-          </a:p>
-        </p:txBody>
-      </p:sp>
-      <p:sp>
-        <p:nvSpPr>
-          <p:cNvPr id="11" name="Right Arrow 10"/>
+              <a:rPr sz="1100" b="0">
+                <a:solidFill>
+                  <a:srgbClr val="3A3A3A"/>
+                </a:solidFill>
+                <a:latin typeface="맑은 고딕"/>
+              </a:rPr>
+              <a:t>LLM 쿼리 확장(3개 생성) → pgvector 유사도 + 키워드 하이브리드 검색(RRF 병합)</a:t>
+            </a:r>
+          </a:p>
+          <a:p>
+            <a:pPr algn="l">
+              <a:lnSpc>
+                <a:spcPct val="112000"/>
+              </a:lnSpc>
+            </a:pPr>
+            <a:r>
+              <a:rPr sz="1100" b="0">
+                <a:solidFill>
+                  <a:srgbClr val="3A3A3A"/>
+                </a:solidFill>
+                <a:latin typeface="맑은 고딕"/>
+              </a:rPr>
+              <a:t>임계값을 완화해 후보 문서를 폭넓게 수집 (Recall 확보)</a:t>
+            </a:r>
+          </a:p>
+        </p:txBody>
+      </p:sp>
+      <p:sp>
+        <p:nvSpPr>
+          <p:cNvPr id="15" name="Rounded Rectangle 14"/>
           <p:cNvSpPr/>
           <p:nvPr/>
         </p:nvSpPr>
         <p:spPr>
           <a:xfrm>
-            <a:off x="6099048" y="1947672"/>
-            <a:ext cx="182880" cy="256032"/>
-          </a:xfrm>
-          <a:prstGeom prst="rightArrow">
+            <a:off x="3108960" y="3529583"/>
+            <a:ext cx="8503920" cy="969264"/>
+          </a:xfrm>
+          <a:prstGeom prst="roundRect">
             <a:avLst/>
           </a:prstGeom>
           <a:solidFill>
-            <a:srgbClr val="7CB342"/>
+            <a:srgbClr val="FFFFFF"/>
+          </a:solidFill>
+          <a:ln w="12700">
+            <a:solidFill>
+              <a:srgbClr val="E8E8E8"/>
+            </a:solidFill>
+          </a:ln>
+          <a:effectLst/>
+        </p:spPr>
+        <p:style>
+          <a:lnRef idx="1">
+            <a:schemeClr val="accent1"/>
+          </a:lnRef>
+          <a:fillRef idx="3">
+            <a:schemeClr val="accent1"/>
+          </a:fillRef>
+          <a:effectRef idx="2">
+            <a:schemeClr val="accent1"/>
+          </a:effectRef>
+          <a:fontRef idx="minor">
+            <a:schemeClr val="lt1"/>
+          </a:fontRef>
+        </p:style>
+        <p:txBody>
+          <a:bodyPr rtlCol="0" anchor="ctr"/>
+          <a:lstStyle/>
+          <a:p>
+            <a:pPr algn="ctr"/>
+          </a:p>
+        </p:txBody>
+      </p:sp>
+      <p:sp>
+        <p:nvSpPr>
+          <p:cNvPr id="16" name="Rectangle 15"/>
+          <p:cNvSpPr/>
+          <p:nvPr/>
+        </p:nvSpPr>
+        <p:spPr>
+          <a:xfrm>
+            <a:off x="3108960" y="3529583"/>
+            <a:ext cx="82296" cy="969264"/>
+          </a:xfrm>
+          <a:prstGeom prst="rect">
+            <a:avLst/>
+          </a:prstGeom>
+          <a:solidFill>
+            <a:srgbClr val="C0453E"/>
           </a:solidFill>
           <a:ln>
             <a:noFill/>
@@ -12486,16 +13335,340 @@
       </p:sp>
       <p:sp>
         <p:nvSpPr>
-          <p:cNvPr id="12" name="Rounded Rectangle 11"/>
+          <p:cNvPr id="17" name="TextBox 16"/>
+          <p:cNvSpPr txBox="1"/>
+          <p:nvPr/>
+        </p:nvSpPr>
+        <p:spPr>
+          <a:xfrm>
+            <a:off x="3337560" y="3575303"/>
+            <a:ext cx="8138160" cy="320040"/>
+          </a:xfrm>
+          <a:prstGeom prst="rect">
+            <a:avLst/>
+          </a:prstGeom>
+          <a:noFill/>
+        </p:spPr>
+        <p:txBody>
+          <a:bodyPr wrap="square" anchor="t" lIns="101600" rIns="101600" tIns="50800" bIns="50800">
+            <a:spAutoFit/>
+          </a:bodyPr>
+          <a:lstStyle/>
+          <a:p>
+            <a:pPr algn="l">
+              <a:lnSpc>
+                <a:spcPct val="112000"/>
+              </a:lnSpc>
+            </a:pPr>
+            <a:r>
+              <a:rPr sz="1350" b="1">
+                <a:solidFill>
+                  <a:srgbClr val="C0453E"/>
+                </a:solidFill>
+                <a:latin typeface="맑은 고딕"/>
+              </a:rPr>
+              <a:t>검증 · 필터링  (7단계)  — 핵심</a:t>
+            </a:r>
+          </a:p>
+        </p:txBody>
+      </p:sp>
+      <p:sp>
+        <p:nvSpPr>
+          <p:cNvPr id="18" name="TextBox 17"/>
+          <p:cNvSpPr txBox="1"/>
+          <p:nvPr/>
+        </p:nvSpPr>
+        <p:spPr>
+          <a:xfrm>
+            <a:off x="3337560" y="3913631"/>
+            <a:ext cx="8138160" cy="548640"/>
+          </a:xfrm>
+          <a:prstGeom prst="rect">
+            <a:avLst/>
+          </a:prstGeom>
+          <a:noFill/>
+        </p:spPr>
+        <p:txBody>
+          <a:bodyPr wrap="square" anchor="t" lIns="101600" rIns="101600" tIns="50800" bIns="50800">
+            <a:spAutoFit/>
+          </a:bodyPr>
+          <a:lstStyle/>
+          <a:p>
+            <a:pPr algn="l">
+              <a:lnSpc>
+                <a:spcPct val="112000"/>
+              </a:lnSpc>
+            </a:pPr>
+            <a:r>
+              <a:rPr sz="1100" b="0">
+                <a:solidFill>
+                  <a:srgbClr val="3A3A3A"/>
+                </a:solidFill>
+                <a:latin typeface="맑은 고딕"/>
+              </a:rPr>
+              <a:t>grade_or_rerank: LLM이 후보 문서를 하나씩 읽고 질문 식물종과 일치하는지 검증</a:t>
+            </a:r>
+          </a:p>
+          <a:p>
+            <a:pPr algn="l">
+              <a:lnSpc>
+                <a:spcPct val="112000"/>
+              </a:lnSpc>
+            </a:pPr>
+            <a:r>
+              <a:rPr sz="1100" b="0">
+                <a:solidFill>
+                  <a:srgbClr val="3A3A3A"/>
+                </a:solidFill>
+                <a:latin typeface="맑은 고딕"/>
+              </a:rPr>
+              <a:t>무관한 문서를 엄격히 탈락시켜 환각을 원천 차단 (Precision 확보)</a:t>
+            </a:r>
+          </a:p>
+        </p:txBody>
+      </p:sp>
+      <p:sp>
+        <p:nvSpPr>
+          <p:cNvPr id="19" name="Rounded Rectangle 18"/>
           <p:cNvSpPr/>
           <p:nvPr/>
         </p:nvSpPr>
         <p:spPr>
           <a:xfrm>
-            <a:off x="6300216" y="1600200"/>
-            <a:ext cx="3108960" cy="960120"/>
+            <a:off x="3108960" y="4608575"/>
+            <a:ext cx="8503920" cy="969264"/>
           </a:xfrm>
           <a:prstGeom prst="roundRect">
+            <a:avLst/>
+          </a:prstGeom>
+          <a:solidFill>
+            <a:srgbClr val="FFFFFF"/>
+          </a:solidFill>
+          <a:ln w="12700">
+            <a:solidFill>
+              <a:srgbClr val="E8E8E8"/>
+            </a:solidFill>
+          </a:ln>
+          <a:effectLst/>
+        </p:spPr>
+        <p:style>
+          <a:lnRef idx="1">
+            <a:schemeClr val="accent1"/>
+          </a:lnRef>
+          <a:fillRef idx="3">
+            <a:schemeClr val="accent1"/>
+          </a:fillRef>
+          <a:effectRef idx="2">
+            <a:schemeClr val="accent1"/>
+          </a:effectRef>
+          <a:fontRef idx="minor">
+            <a:schemeClr val="lt1"/>
+          </a:fontRef>
+        </p:style>
+        <p:txBody>
+          <a:bodyPr rtlCol="0" anchor="ctr"/>
+          <a:lstStyle/>
+          <a:p>
+            <a:pPr algn="ctr"/>
+          </a:p>
+        </p:txBody>
+      </p:sp>
+      <p:sp>
+        <p:nvSpPr>
+          <p:cNvPr id="20" name="Rectangle 19"/>
+          <p:cNvSpPr/>
+          <p:nvPr/>
+        </p:nvSpPr>
+        <p:spPr>
+          <a:xfrm>
+            <a:off x="3108960" y="4608575"/>
+            <a:ext cx="82296" cy="969264"/>
+          </a:xfrm>
+          <a:prstGeom prst="rect">
+            <a:avLst/>
+          </a:prstGeom>
+          <a:solidFill>
+            <a:srgbClr val="E8A317"/>
+          </a:solidFill>
+          <a:ln>
+            <a:noFill/>
+          </a:ln>
+          <a:effectLst/>
+        </p:spPr>
+        <p:style>
+          <a:lnRef idx="1">
+            <a:schemeClr val="accent1"/>
+          </a:lnRef>
+          <a:fillRef idx="3">
+            <a:schemeClr val="accent1"/>
+          </a:fillRef>
+          <a:effectRef idx="2">
+            <a:schemeClr val="accent1"/>
+          </a:effectRef>
+          <a:fontRef idx="minor">
+            <a:schemeClr val="lt1"/>
+          </a:fontRef>
+        </p:style>
+        <p:txBody>
+          <a:bodyPr rtlCol="0" anchor="ctr"/>
+          <a:lstStyle/>
+          <a:p>
+            <a:pPr algn="ctr"/>
+          </a:p>
+        </p:txBody>
+      </p:sp>
+      <p:sp>
+        <p:nvSpPr>
+          <p:cNvPr id="21" name="TextBox 20"/>
+          <p:cNvSpPr txBox="1"/>
+          <p:nvPr/>
+        </p:nvSpPr>
+        <p:spPr>
+          <a:xfrm>
+            <a:off x="3337560" y="4654295"/>
+            <a:ext cx="8138160" cy="320040"/>
+          </a:xfrm>
+          <a:prstGeom prst="rect">
+            <a:avLst/>
+          </a:prstGeom>
+          <a:noFill/>
+        </p:spPr>
+        <p:txBody>
+          <a:bodyPr wrap="square" anchor="t" lIns="101600" rIns="101600" tIns="50800" bIns="50800">
+            <a:spAutoFit/>
+          </a:bodyPr>
+          <a:lstStyle/>
+          <a:p>
+            <a:pPr algn="l">
+              <a:lnSpc>
+                <a:spcPct val="112000"/>
+              </a:lnSpc>
+            </a:pPr>
+            <a:r>
+              <a:rPr sz="1350" b="1">
+                <a:solidFill>
+                  <a:srgbClr val="E8A317"/>
+                </a:solidFill>
+                <a:latin typeface="맑은 고딕"/>
+              </a:rPr>
+              <a:t>생성 · 안전  (8~9단계)</a:t>
+            </a:r>
+          </a:p>
+        </p:txBody>
+      </p:sp>
+      <p:sp>
+        <p:nvSpPr>
+          <p:cNvPr id="22" name="TextBox 21"/>
+          <p:cNvSpPr txBox="1"/>
+          <p:nvPr/>
+        </p:nvSpPr>
+        <p:spPr>
+          <a:xfrm>
+            <a:off x="3337560" y="4992623"/>
+            <a:ext cx="8138160" cy="548640"/>
+          </a:xfrm>
+          <a:prstGeom prst="rect">
+            <a:avLst/>
+          </a:prstGeom>
+          <a:noFill/>
+        </p:spPr>
+        <p:txBody>
+          <a:bodyPr wrap="square" anchor="t" lIns="101600" rIns="101600" tIns="50800" bIns="50800">
+            <a:spAutoFit/>
+          </a:bodyPr>
+          <a:lstStyle/>
+          <a:p>
+            <a:pPr algn="l">
+              <a:lnSpc>
+                <a:spcPct val="112000"/>
+              </a:lnSpc>
+            </a:pPr>
+            <a:r>
+              <a:rPr sz="1100" b="0">
+                <a:solidFill>
+                  <a:srgbClr val="3A3A3A"/>
+                </a:solidFill>
+                <a:latin typeface="맑은 고딕"/>
+              </a:rPr>
+              <a:t>전문가 모드 / 반려식물 1인칭 모드에 맞춘 답변 생성 + 출처(citations) 바인딩</a:t>
+            </a:r>
+          </a:p>
+          <a:p>
+            <a:pPr algn="l">
+              <a:lnSpc>
+                <a:spcPct val="112000"/>
+              </a:lnSpc>
+            </a:pPr>
+            <a:r>
+              <a:rPr sz="1100" b="0">
+                <a:solidFill>
+                  <a:srgbClr val="3A3A3A"/>
+                </a:solidFill>
+                <a:latin typeface="맑은 고딕"/>
+              </a:rPr>
+              <a:t>safety_review가 농약 관련 답변에 안전 고지를 강제 조립</a:t>
+            </a:r>
+          </a:p>
+        </p:txBody>
+      </p:sp>
+      <p:sp>
+        <p:nvSpPr>
+          <p:cNvPr id="23" name="Rounded Rectangle 22"/>
+          <p:cNvSpPr/>
+          <p:nvPr/>
+        </p:nvSpPr>
+        <p:spPr>
+          <a:xfrm>
+            <a:off x="3108960" y="5687567"/>
+            <a:ext cx="8503920" cy="969264"/>
+          </a:xfrm>
+          <a:prstGeom prst="roundRect">
+            <a:avLst/>
+          </a:prstGeom>
+          <a:solidFill>
+            <a:srgbClr val="FFFFFF"/>
+          </a:solidFill>
+          <a:ln w="12700">
+            <a:solidFill>
+              <a:srgbClr val="E8E8E8"/>
+            </a:solidFill>
+          </a:ln>
+          <a:effectLst/>
+        </p:spPr>
+        <p:style>
+          <a:lnRef idx="1">
+            <a:schemeClr val="accent1"/>
+          </a:lnRef>
+          <a:fillRef idx="3">
+            <a:schemeClr val="accent1"/>
+          </a:fillRef>
+          <a:effectRef idx="2">
+            <a:schemeClr val="accent1"/>
+          </a:effectRef>
+          <a:fontRef idx="minor">
+            <a:schemeClr val="lt1"/>
+          </a:fontRef>
+        </p:style>
+        <p:txBody>
+          <a:bodyPr rtlCol="0" anchor="ctr"/>
+          <a:lstStyle/>
+          <a:p>
+            <a:pPr algn="ctr"/>
+          </a:p>
+        </p:txBody>
+      </p:sp>
+      <p:sp>
+        <p:nvSpPr>
+          <p:cNvPr id="24" name="Rectangle 23"/>
+          <p:cNvSpPr/>
+          <p:nvPr/>
+        </p:nvSpPr>
+        <p:spPr>
+          <a:xfrm>
+            <a:off x="3108960" y="5687567"/>
+            <a:ext cx="82296" cy="969264"/>
+          </a:xfrm>
+          <a:prstGeom prst="rect">
             <a:avLst/>
           </a:prstGeom>
           <a:solidFill>
@@ -12521,79 +13694,6 @@
           </a:fontRef>
         </p:style>
         <p:txBody>
-          <a:bodyPr rtlCol="0" anchor="ctr" wrap="square" lIns="101600" rIns="101600" tIns="50800" bIns="50800"/>
-          <a:lstStyle/>
-          <a:p>
-            <a:pPr algn="ctr">
-              <a:lnSpc>
-                <a:spcPct val="112000"/>
-              </a:lnSpc>
-            </a:pPr>
-            <a:r>
-              <a:rPr sz="1300" b="1">
-                <a:solidFill>
-                  <a:srgbClr val="FFFFFF"/>
-                </a:solidFill>
-                <a:latin typeface="맑은 고딕"/>
-              </a:rPr>
-              <a:t>Supabase</a:t>
-            </a:r>
-          </a:p>
-          <a:p>
-            <a:pPr algn="ctr">
-              <a:lnSpc>
-                <a:spcPct val="112000"/>
-              </a:lnSpc>
-            </a:pPr>
-            <a:r>
-              <a:rPr sz="1300" b="1">
-                <a:solidFill>
-                  <a:srgbClr val="FFFFFF"/>
-                </a:solidFill>
-                <a:latin typeface="맑은 고딕"/>
-              </a:rPr>
-              <a:t>Auth·Postgres·pgvector·Storage</a:t>
-            </a:r>
-          </a:p>
-        </p:txBody>
-      </p:sp>
-      <p:sp>
-        <p:nvSpPr>
-          <p:cNvPr id="13" name="Right Arrow 12"/>
-          <p:cNvSpPr/>
-          <p:nvPr/>
-        </p:nvSpPr>
-        <p:spPr>
-          <a:xfrm>
-            <a:off x="9418320" y="1947672"/>
-            <a:ext cx="182880" cy="256032"/>
-          </a:xfrm>
-          <a:prstGeom prst="rightArrow">
-            <a:avLst/>
-          </a:prstGeom>
-          <a:solidFill>
-            <a:srgbClr val="7CB342"/>
-          </a:solidFill>
-          <a:ln>
-            <a:noFill/>
-          </a:ln>
-          <a:effectLst/>
-        </p:spPr>
-        <p:style>
-          <a:lnRef idx="1">
-            <a:schemeClr val="accent1"/>
-          </a:lnRef>
-          <a:fillRef idx="3">
-            <a:schemeClr val="accent1"/>
-          </a:fillRef>
-          <a:effectRef idx="2">
-            <a:schemeClr val="accent1"/>
-          </a:effectRef>
-          <a:fontRef idx="minor">
-            <a:schemeClr val="lt1"/>
-          </a:fontRef>
-        </p:style>
-        <p:txBody>
           <a:bodyPr rtlCol="0" anchor="ctr"/>
           <a:lstStyle/>
           <a:p>
@@ -12603,402 +13703,14 @@
       </p:sp>
       <p:sp>
         <p:nvSpPr>
-          <p:cNvPr id="14" name="Rounded Rectangle 13"/>
-          <p:cNvSpPr/>
-          <p:nvPr/>
-        </p:nvSpPr>
-        <p:spPr>
-          <a:xfrm>
-            <a:off x="9619488" y="1600200"/>
-            <a:ext cx="2377440" cy="960120"/>
-          </a:xfrm>
-          <a:prstGeom prst="roundRect">
-            <a:avLst/>
-          </a:prstGeom>
-          <a:solidFill>
-            <a:srgbClr val="7CB342"/>
-          </a:solidFill>
-          <a:ln>
-            <a:noFill/>
-          </a:ln>
-          <a:effectLst/>
-        </p:spPr>
-        <p:style>
-          <a:lnRef idx="1">
-            <a:schemeClr val="accent1"/>
-          </a:lnRef>
-          <a:fillRef idx="3">
-            <a:schemeClr val="accent1"/>
-          </a:fillRef>
-          <a:effectRef idx="2">
-            <a:schemeClr val="accent1"/>
-          </a:effectRef>
-          <a:fontRef idx="minor">
-            <a:schemeClr val="lt1"/>
-          </a:fontRef>
-        </p:style>
-        <p:txBody>
-          <a:bodyPr rtlCol="0" anchor="ctr" wrap="square" lIns="101600" rIns="101600" tIns="50800" bIns="50800"/>
-          <a:lstStyle/>
-          <a:p>
-            <a:pPr algn="ctr">
-              <a:lnSpc>
-                <a:spcPct val="112000"/>
-              </a:lnSpc>
-            </a:pPr>
-            <a:r>
-              <a:rPr sz="1300" b="1">
-                <a:solidFill>
-                  <a:srgbClr val="1E4D2B"/>
-                </a:solidFill>
-                <a:latin typeface="맑은 고딕"/>
-              </a:rPr>
-              <a:t>OpenAI</a:t>
-            </a:r>
-          </a:p>
-          <a:p>
-            <a:pPr algn="ctr">
-              <a:lnSpc>
-                <a:spcPct val="112000"/>
-              </a:lnSpc>
-            </a:pPr>
-            <a:r>
-              <a:rPr sz="1300" b="1">
-                <a:solidFill>
-                  <a:srgbClr val="1E4D2B"/>
-                </a:solidFill>
-                <a:latin typeface="맑은 고딕"/>
-              </a:rPr>
-              <a:t>LLM·임베딩·Vision</a:t>
-            </a:r>
-          </a:p>
-        </p:txBody>
-      </p:sp>
-      <p:sp>
-        <p:nvSpPr>
-          <p:cNvPr id="15" name="Rounded Rectangle 14"/>
-          <p:cNvSpPr/>
-          <p:nvPr/>
-        </p:nvSpPr>
-        <p:spPr>
-          <a:xfrm>
-            <a:off x="548640" y="3063240"/>
-            <a:ext cx="3611880" cy="2286000"/>
-          </a:xfrm>
-          <a:prstGeom prst="roundRect">
-            <a:avLst/>
-          </a:prstGeom>
-          <a:solidFill>
-            <a:srgbClr val="F1F7F1"/>
-          </a:solidFill>
-          <a:ln>
-            <a:noFill/>
-          </a:ln>
-          <a:effectLst/>
-        </p:spPr>
-        <p:style>
-          <a:lnRef idx="1">
-            <a:schemeClr val="accent1"/>
-          </a:lnRef>
-          <a:fillRef idx="3">
-            <a:schemeClr val="accent1"/>
-          </a:fillRef>
-          <a:effectRef idx="2">
-            <a:schemeClr val="accent1"/>
-          </a:effectRef>
-          <a:fontRef idx="minor">
-            <a:schemeClr val="lt1"/>
-          </a:fontRef>
-        </p:style>
-        <p:txBody>
-          <a:bodyPr rtlCol="0" anchor="ctr" wrap="square" lIns="203200" rIns="203200" tIns="152400"/>
-          <a:lstStyle/>
-          <a:p>
-            <a:pPr algn="l">
-              <a:spcAft>
-                <a:spcPts val="600"/>
-              </a:spcAft>
-            </a:pPr>
-            <a:r>
-              <a:rPr sz="1500" b="1">
-                <a:solidFill>
-                  <a:srgbClr val="1E4D2B"/>
-                </a:solidFill>
-                <a:latin typeface="맑은 고딕"/>
-              </a:rPr>
-              <a:t>Frontend — Vercel</a:t>
-            </a:r>
-          </a:p>
-          <a:p>
-            <a:pPr algn="l">
-              <a:lnSpc>
-                <a:spcPct val="118000"/>
-              </a:lnSpc>
-            </a:pPr>
-            <a:r>
-              <a:rPr sz="1250" b="0">
-                <a:solidFill>
-                  <a:srgbClr val="3A3A3A"/>
-                </a:solidFill>
-                <a:latin typeface="맑은 고딕"/>
-              </a:rPr>
-              <a:t>·  React + TypeScript + Vite</a:t>
-            </a:r>
-          </a:p>
-          <a:p>
-            <a:pPr algn="l">
-              <a:lnSpc>
-                <a:spcPct val="118000"/>
-              </a:lnSpc>
-            </a:pPr>
-            <a:r>
-              <a:rPr sz="1250" b="0">
-                <a:solidFill>
-                  <a:srgbClr val="3A3A3A"/>
-                </a:solidFill>
-                <a:latin typeface="맑은 고딕"/>
-              </a:rPr>
-              <a:t>·  로그인·식물 등록·대시보드·AI 상담 UI</a:t>
-            </a:r>
-          </a:p>
-          <a:p>
-            <a:pPr algn="l">
-              <a:lnSpc>
-                <a:spcPct val="118000"/>
-              </a:lnSpc>
-            </a:pPr>
-            <a:r>
-              <a:rPr sz="1250" b="0">
-                <a:solidFill>
-                  <a:srgbClr val="3A3A3A"/>
-                </a:solidFill>
-                <a:latin typeface="맑은 고딕"/>
-              </a:rPr>
-              <a:t>·  해시 라우팅 + 디자인 HTML 주입 구조</a:t>
-            </a:r>
-          </a:p>
-        </p:txBody>
-      </p:sp>
-      <p:sp>
-        <p:nvSpPr>
-          <p:cNvPr id="16" name="Rounded Rectangle 15"/>
-          <p:cNvSpPr/>
-          <p:nvPr/>
-        </p:nvSpPr>
-        <p:spPr>
-          <a:xfrm>
-            <a:off x="4361688" y="3063240"/>
-            <a:ext cx="3611880" cy="2286000"/>
-          </a:xfrm>
-          <a:prstGeom prst="roundRect">
-            <a:avLst/>
-          </a:prstGeom>
-          <a:solidFill>
-            <a:srgbClr val="F1F7F1"/>
-          </a:solidFill>
-          <a:ln>
-            <a:noFill/>
-          </a:ln>
-          <a:effectLst/>
-        </p:spPr>
-        <p:style>
-          <a:lnRef idx="1">
-            <a:schemeClr val="accent1"/>
-          </a:lnRef>
-          <a:fillRef idx="3">
-            <a:schemeClr val="accent1"/>
-          </a:fillRef>
-          <a:effectRef idx="2">
-            <a:schemeClr val="accent1"/>
-          </a:effectRef>
-          <a:fontRef idx="minor">
-            <a:schemeClr val="lt1"/>
-          </a:fontRef>
-        </p:style>
-        <p:txBody>
-          <a:bodyPr rtlCol="0" anchor="ctr" wrap="square" lIns="203200" rIns="203200" tIns="152400"/>
-          <a:lstStyle/>
-          <a:p>
-            <a:pPr algn="l">
-              <a:spcAft>
-                <a:spcPts val="600"/>
-              </a:spcAft>
-            </a:pPr>
-            <a:r>
-              <a:rPr sz="1500" b="1">
-                <a:solidFill>
-                  <a:srgbClr val="1E4D2B"/>
-                </a:solidFill>
-                <a:latin typeface="맑은 고딕"/>
-              </a:rPr>
-              <a:t>Backend — Render</a:t>
-            </a:r>
-          </a:p>
-          <a:p>
-            <a:pPr algn="l">
-              <a:lnSpc>
-                <a:spcPct val="118000"/>
-              </a:lnSpc>
-            </a:pPr>
-            <a:r>
-              <a:rPr sz="1250" b="0">
-                <a:solidFill>
-                  <a:srgbClr val="3A3A3A"/>
-                </a:solidFill>
-                <a:latin typeface="맑은 고딕"/>
-              </a:rPr>
-              <a:t>·  FastAPI + Pydantic</a:t>
-            </a:r>
-          </a:p>
-          <a:p>
-            <a:pPr algn="l">
-              <a:lnSpc>
-                <a:spcPct val="118000"/>
-              </a:lnSpc>
-            </a:pPr>
-            <a:r>
-              <a:rPr sz="1250" b="0">
-                <a:solidFill>
-                  <a:srgbClr val="3A3A3A"/>
-                </a:solidFill>
-                <a:latin typeface="맑은 고딕"/>
-              </a:rPr>
-              <a:t>·  Supabase JWT 인증 검증</a:t>
-            </a:r>
-          </a:p>
-          <a:p>
-            <a:pPr algn="l">
-              <a:lnSpc>
-                <a:spcPct val="118000"/>
-              </a:lnSpc>
-            </a:pPr>
-            <a:r>
-              <a:rPr sz="1250" b="0">
-                <a:solidFill>
-                  <a:srgbClr val="3A3A3A"/>
-                </a:solidFill>
-                <a:latin typeface="맑은 고딕"/>
-              </a:rPr>
-              <a:t>·  RAG 파이프라인(LangGraph) 실행</a:t>
-            </a:r>
-          </a:p>
-        </p:txBody>
-      </p:sp>
-      <p:sp>
-        <p:nvSpPr>
-          <p:cNvPr id="17" name="Rounded Rectangle 16"/>
-          <p:cNvSpPr/>
-          <p:nvPr/>
-        </p:nvSpPr>
-        <p:spPr>
-          <a:xfrm>
-            <a:off x="8174736" y="3063240"/>
-            <a:ext cx="3611880" cy="2286000"/>
-          </a:xfrm>
-          <a:prstGeom prst="roundRect">
-            <a:avLst/>
-          </a:prstGeom>
-          <a:solidFill>
-            <a:srgbClr val="F1F7F1"/>
-          </a:solidFill>
-          <a:ln>
-            <a:noFill/>
-          </a:ln>
-          <a:effectLst/>
-        </p:spPr>
-        <p:style>
-          <a:lnRef idx="1">
-            <a:schemeClr val="accent1"/>
-          </a:lnRef>
-          <a:fillRef idx="3">
-            <a:schemeClr val="accent1"/>
-          </a:fillRef>
-          <a:effectRef idx="2">
-            <a:schemeClr val="accent1"/>
-          </a:effectRef>
-          <a:fontRef idx="minor">
-            <a:schemeClr val="lt1"/>
-          </a:fontRef>
-        </p:style>
-        <p:txBody>
-          <a:bodyPr rtlCol="0" anchor="ctr" wrap="square" lIns="203200" rIns="203200" tIns="152400"/>
-          <a:lstStyle/>
-          <a:p>
-            <a:pPr algn="l">
-              <a:spcAft>
-                <a:spcPts val="600"/>
-              </a:spcAft>
-            </a:pPr>
-            <a:r>
-              <a:rPr sz="1500" b="1">
-                <a:solidFill>
-                  <a:srgbClr val="1E4D2B"/>
-                </a:solidFill>
-                <a:latin typeface="맑은 고딕"/>
-              </a:rPr>
-              <a:t>Supabase / OpenAI</a:t>
-            </a:r>
-          </a:p>
-          <a:p>
-            <a:pPr algn="l">
-              <a:lnSpc>
-                <a:spcPct val="118000"/>
-              </a:lnSpc>
-            </a:pPr>
-            <a:r>
-              <a:rPr sz="1250" b="0">
-                <a:solidFill>
-                  <a:srgbClr val="3A3A3A"/>
-                </a:solidFill>
-                <a:latin typeface="맑은 고딕"/>
-              </a:rPr>
-              <a:t>·  Auth·Postgres·Storage 통합</a:t>
-            </a:r>
-          </a:p>
-          <a:p>
-            <a:pPr algn="l">
-              <a:lnSpc>
-                <a:spcPct val="118000"/>
-              </a:lnSpc>
-            </a:pPr>
-            <a:r>
-              <a:rPr sz="1250" b="0">
-                <a:solidFill>
-                  <a:srgbClr val="3A3A3A"/>
-                </a:solidFill>
-                <a:latin typeface="맑은 고딕"/>
-              </a:rPr>
-              <a:t>·  pgvector 벡터 유사도 검색</a:t>
-            </a:r>
-          </a:p>
-          <a:p>
-            <a:pPr algn="l">
-              <a:lnSpc>
-                <a:spcPct val="118000"/>
-              </a:lnSpc>
-            </a:pPr>
-            <a:r>
-              <a:rPr sz="1250" b="0">
-                <a:solidFill>
-                  <a:srgbClr val="3A3A3A"/>
-                </a:solidFill>
-                <a:latin typeface="맑은 고딕"/>
-              </a:rPr>
-              <a:t>·  GPT-4o-mini 채팅·Vision·임베딩</a:t>
-            </a:r>
-          </a:p>
-        </p:txBody>
-      </p:sp>
-      <p:sp>
-        <p:nvSpPr>
-          <p:cNvPr id="18" name="TextBox 17"/>
+          <p:cNvPr id="25" name="TextBox 24"/>
           <p:cNvSpPr txBox="1"/>
           <p:nvPr/>
         </p:nvSpPr>
         <p:spPr>
           <a:xfrm>
-            <a:off x="548640" y="5623560"/>
-            <a:ext cx="11064240" cy="731520"/>
+            <a:off x="3337560" y="5733287"/>
+            <a:ext cx="8138160" cy="320040"/>
           </a:xfrm>
           <a:prstGeom prst="rect">
             <a:avLst/>
@@ -13017,13 +13729,52 @@
               </a:lnSpc>
             </a:pPr>
             <a:r>
-              <a:rPr sz="1400" b="1">
-                <a:solidFill>
-                  <a:srgbClr val="3B7A57"/>
-                </a:solidFill>
-                <a:latin typeface="맑은 고딕"/>
-              </a:rPr>
-              <a:t>사용자 인증(JWT)부터 벡터 검색, 이미지 스토리지까지 Supabase로 통합 — 서비스 전 구간 실배포 완료</a:t>
+              <a:rPr sz="1350" b="1">
+                <a:solidFill>
+                  <a:srgbClr val="1E4D2B"/>
+                </a:solidFill>
+                <a:latin typeface="맑은 고딕"/>
+              </a:rPr>
+              <a:t>영속화  (10단계)</a:t>
+            </a:r>
+          </a:p>
+        </p:txBody>
+      </p:sp>
+      <p:sp>
+        <p:nvSpPr>
+          <p:cNvPr id="26" name="TextBox 25"/>
+          <p:cNvSpPr txBox="1"/>
+          <p:nvPr/>
+        </p:nvSpPr>
+        <p:spPr>
+          <a:xfrm>
+            <a:off x="3337560" y="6071615"/>
+            <a:ext cx="8138160" cy="548640"/>
+          </a:xfrm>
+          <a:prstGeom prst="rect">
+            <a:avLst/>
+          </a:prstGeom>
+          <a:noFill/>
+        </p:spPr>
+        <p:txBody>
+          <a:bodyPr wrap="square" anchor="t" lIns="101600" rIns="101600" tIns="50800" bIns="50800">
+            <a:spAutoFit/>
+          </a:bodyPr>
+          <a:lstStyle/>
+          <a:p>
+            <a:pPr algn="l">
+              <a:lnSpc>
+                <a:spcPct val="112000"/>
+              </a:lnSpc>
+            </a:pPr>
+            <a:r>
+              <a:rPr sz="1100" b="0">
+                <a:solidFill>
+                  <a:srgbClr val="3A3A3A"/>
+                </a:solidFill>
+                <a:latin typeface="맑은 고딕"/>
+              </a:rPr>
+              <a:t>답변·출처·세션 제목을 Supabase에 저장 — 식물별 상담 이력 보존</a:t>
             </a:r>
           </a:p>
         </p:txBody>
@@ -13132,7 +13883,7 @@
                 </a:solidFill>
                 <a:latin typeface="맑은 고딕"/>
               </a:rPr>
-              <a:t>RAG 기술 ② LangGraph 파이프라인</a:t>
+              <a:t>RAG 기술 ② 품질 개선 및 평가</a:t>
             </a:r>
           </a:p>
         </p:txBody>
@@ -13171,7 +13922,7 @@
                 </a:solidFill>
                 <a:latin typeface="맑은 고딕"/>
               </a:rPr>
-              <a:t>10단계 에이전틱 워크플로우 — StateGraph 시각화</a:t>
+              <a:t>LLM-as-a-Judge 자동 평가 기반 Two-Stage Retrieval 개선</a:t>
             </a:r>
           </a:p>
         </p:txBody>
@@ -13220,45 +13971,16 @@
           </a:p>
         </p:txBody>
       </p:sp>
-      <p:pic>
-        <p:nvPicPr>
-          <p:cNvPr id="6" name="Picture 5" descr="langgraph_flow.png"/>
-          <p:cNvPicPr>
-            <a:picLocks noChangeAspect="1"/>
-          </p:cNvPicPr>
-          <p:nvPr/>
-        </p:nvPicPr>
-        <p:blipFill>
-          <a:blip r:embed="rId2"/>
-          <a:stretch>
-            <a:fillRect/>
-          </a:stretch>
-        </p:blipFill>
-        <p:spPr>
-          <a:xfrm>
-            <a:off x="685800" y="1371600"/>
-            <a:ext cx="1932753" cy="5212080"/>
-          </a:xfrm>
-          <a:prstGeom prst="rect">
-            <a:avLst/>
-          </a:prstGeom>
-          <a:ln w="15875">
-            <a:solidFill>
-              <a:srgbClr val="E8E8E8"/>
-            </a:solidFill>
-          </a:ln>
-        </p:spPr>
-      </p:pic>
-      <p:sp>
-        <p:nvSpPr>
-          <p:cNvPr id="7" name="Rounded Rectangle 6"/>
+      <p:sp>
+        <p:nvSpPr>
+          <p:cNvPr id="6" name="Rounded Rectangle 5"/>
           <p:cNvSpPr/>
           <p:nvPr/>
         </p:nvSpPr>
         <p:spPr>
           <a:xfrm>
-            <a:off x="3108960" y="1371600"/>
-            <a:ext cx="8503920" cy="969264"/>
+            <a:off x="502920" y="1417320"/>
+            <a:ext cx="5212080" cy="1783080"/>
           </a:xfrm>
           <a:prstGeom prst="roundRect">
             <a:avLst/>
@@ -13288,29 +14010,90 @@
           </a:fontRef>
         </p:style>
         <p:txBody>
-          <a:bodyPr rtlCol="0" anchor="ctr"/>
-          <a:lstStyle/>
-          <a:p>
-            <a:pPr algn="ctr"/>
-          </a:p>
-        </p:txBody>
-      </p:sp>
-      <p:sp>
-        <p:nvSpPr>
-          <p:cNvPr id="8" name="Rectangle 7"/>
+          <a:bodyPr rtlCol="0" anchor="ctr" wrap="square" lIns="203200" rIns="203200" tIns="152400"/>
+          <a:lstStyle/>
+          <a:p>
+            <a:pPr algn="l">
+              <a:spcAft>
+                <a:spcPts val="600"/>
+              </a:spcAft>
+            </a:pPr>
+            <a:r>
+              <a:rPr sz="1500" b="1">
+                <a:solidFill>
+                  <a:srgbClr val="C0453E"/>
+                </a:solidFill>
+                <a:latin typeface="맑은 고딕"/>
+              </a:rPr>
+              <a:t>Before — 초기 한계</a:t>
+            </a:r>
+          </a:p>
+          <a:p>
+            <a:pPr algn="l">
+              <a:lnSpc>
+                <a:spcPct val="118000"/>
+              </a:lnSpc>
+            </a:pPr>
+            <a:r>
+              <a:rPr sz="1250" b="0">
+                <a:solidFill>
+                  <a:srgbClr val="3A3A3A"/>
+                </a:solidFill>
+                <a:latin typeface="맑은 고딕"/>
+              </a:rPr>
+              <a:t>·  몬스테라 질문에 '윌마'·'무화과' 문서 검색 (오매칭)</a:t>
+            </a:r>
+          </a:p>
+          <a:p>
+            <a:pPr algn="l">
+              <a:lnSpc>
+                <a:spcPct val="118000"/>
+              </a:lnSpc>
+            </a:pPr>
+            <a:r>
+              <a:rPr sz="1250" b="0">
+                <a:solidFill>
+                  <a:srgbClr val="3A3A3A"/>
+                </a:solidFill>
+                <a:latin typeface="맑은 고딕"/>
+              </a:rPr>
+              <a:t>·  무관 문서 강제 주입 → 거짓 답변 생성 (환각)</a:t>
+            </a:r>
+          </a:p>
+          <a:p>
+            <a:pPr algn="l">
+              <a:lnSpc>
+                <a:spcPct val="118000"/>
+              </a:lnSpc>
+            </a:pPr>
+            <a:r>
+              <a:rPr sz="1250" b="0">
+                <a:solidFill>
+                  <a:srgbClr val="3A3A3A"/>
+                </a:solidFill>
+                <a:latin typeface="맑은 고딕"/>
+              </a:rPr>
+              <a:t>·  이미지 케이스 추가 후 검색 정확도 3.58점 하락</a:t>
+            </a:r>
+          </a:p>
+        </p:txBody>
+      </p:sp>
+      <p:sp>
+        <p:nvSpPr>
+          <p:cNvPr id="7" name="Rectangle 6"/>
           <p:cNvSpPr/>
           <p:nvPr/>
         </p:nvSpPr>
         <p:spPr>
           <a:xfrm>
-            <a:off x="3108960" y="1371600"/>
-            <a:ext cx="82296" cy="969264"/>
+            <a:off x="502920" y="1417320"/>
+            <a:ext cx="5212080" cy="73152"/>
           </a:xfrm>
           <a:prstGeom prst="rect">
             <a:avLst/>
           </a:prstGeom>
           <a:solidFill>
-            <a:srgbClr val="3B7A57"/>
+            <a:srgbClr val="C0453E"/>
           </a:solidFill>
           <a:ln>
             <a:noFill/>
@@ -13341,108 +14124,14 @@
       </p:sp>
       <p:sp>
         <p:nvSpPr>
-          <p:cNvPr id="9" name="TextBox 8"/>
-          <p:cNvSpPr txBox="1"/>
-          <p:nvPr/>
-        </p:nvSpPr>
-        <p:spPr>
-          <a:xfrm>
-            <a:off x="3337560" y="1417320"/>
-            <a:ext cx="8138160" cy="320040"/>
-          </a:xfrm>
-          <a:prstGeom prst="rect">
-            <a:avLst/>
-          </a:prstGeom>
-          <a:noFill/>
-        </p:spPr>
-        <p:txBody>
-          <a:bodyPr wrap="square" anchor="t" lIns="101600" rIns="101600" tIns="50800" bIns="50800">
-            <a:spAutoFit/>
-          </a:bodyPr>
-          <a:lstStyle/>
-          <a:p>
-            <a:pPr algn="l">
-              <a:lnSpc>
-                <a:spcPct val="112000"/>
-              </a:lnSpc>
-            </a:pPr>
-            <a:r>
-              <a:rPr sz="1350" b="1">
-                <a:solidFill>
-                  <a:srgbClr val="3B7A57"/>
-                </a:solidFill>
-                <a:latin typeface="맑은 고딕"/>
-              </a:rPr>
-              <a:t>입력 이해  (1~4단계)</a:t>
-            </a:r>
-          </a:p>
-        </p:txBody>
-      </p:sp>
-      <p:sp>
-        <p:nvSpPr>
-          <p:cNvPr id="10" name="TextBox 9"/>
-          <p:cNvSpPr txBox="1"/>
-          <p:nvPr/>
-        </p:nvSpPr>
-        <p:spPr>
-          <a:xfrm>
-            <a:off x="3337560" y="1755648"/>
-            <a:ext cx="8138160" cy="548640"/>
-          </a:xfrm>
-          <a:prstGeom prst="rect">
-            <a:avLst/>
-          </a:prstGeom>
-          <a:noFill/>
-        </p:spPr>
-        <p:txBody>
-          <a:bodyPr wrap="square" anchor="t" lIns="101600" rIns="101600" tIns="50800" bIns="50800">
-            <a:spAutoFit/>
-          </a:bodyPr>
-          <a:lstStyle/>
-          <a:p>
-            <a:pPr algn="l">
-              <a:lnSpc>
-                <a:spcPct val="112000"/>
-              </a:lnSpc>
-            </a:pPr>
-            <a:r>
-              <a:rPr sz="1100" b="0">
-                <a:solidFill>
-                  <a:srgbClr val="3A3A3A"/>
-                </a:solidFill>
-                <a:latin typeface="맑은 고딕"/>
-              </a:rPr>
-              <a:t>식물·일지·사진 검증 → 대화 이력 로드 → Vision 이상 신호 추출 → 사용자 맥락 요약</a:t>
-            </a:r>
-          </a:p>
-          <a:p>
-            <a:pPr algn="l">
-              <a:lnSpc>
-                <a:spcPct val="112000"/>
-              </a:lnSpc>
-            </a:pPr>
-            <a:r>
-              <a:rPr sz="1100" b="0">
-                <a:solidFill>
-                  <a:srgbClr val="3A3A3A"/>
-                </a:solidFill>
-                <a:latin typeface="맑은 고딕"/>
-              </a:rPr>
-              <a:t>사용자의 식물 상태와 질문 의도를 구조화된 컨텍스트로 정리</a:t>
-            </a:r>
-          </a:p>
-        </p:txBody>
-      </p:sp>
-      <p:sp>
-        <p:nvSpPr>
-          <p:cNvPr id="11" name="Rounded Rectangle 10"/>
+          <p:cNvPr id="8" name="Rounded Rectangle 7"/>
           <p:cNvSpPr/>
           <p:nvPr/>
         </p:nvSpPr>
         <p:spPr>
           <a:xfrm>
-            <a:off x="3108960" y="2450591"/>
-            <a:ext cx="8503920" cy="969264"/>
+            <a:off x="502920" y="3383280"/>
+            <a:ext cx="5212080" cy="2697480"/>
           </a:xfrm>
           <a:prstGeom prst="roundRect">
             <a:avLst/>
@@ -13472,29 +14161,122 @@
           </a:fontRef>
         </p:style>
         <p:txBody>
-          <a:bodyPr rtlCol="0" anchor="ctr"/>
-          <a:lstStyle/>
-          <a:p>
-            <a:pPr algn="ctr"/>
-          </a:p>
-        </p:txBody>
-      </p:sp>
-      <p:sp>
-        <p:nvSpPr>
-          <p:cNvPr id="12" name="Rectangle 11"/>
+          <a:bodyPr rtlCol="0" anchor="ctr" wrap="square" lIns="203200" rIns="203200" tIns="152400"/>
+          <a:lstStyle/>
+          <a:p>
+            <a:pPr algn="l">
+              <a:spcAft>
+                <a:spcPts val="600"/>
+              </a:spcAft>
+            </a:pPr>
+            <a:r>
+              <a:rPr sz="1500" b="1">
+                <a:solidFill>
+                  <a:srgbClr val="3B7A57"/>
+                </a:solidFill>
+                <a:latin typeface="맑은 고딕"/>
+              </a:rPr>
+              <a:t>After — 핵심 개선 기법</a:t>
+            </a:r>
+          </a:p>
+          <a:p>
+            <a:pPr algn="l">
+              <a:lnSpc>
+                <a:spcPct val="118000"/>
+              </a:lnSpc>
+            </a:pPr>
+            <a:r>
+              <a:rPr sz="1250" b="1">
+                <a:solidFill>
+                  <a:srgbClr val="1E4D2B"/>
+                </a:solidFill>
+                <a:latin typeface="맑은 고딕"/>
+              </a:rPr>
+              <a:t>·  Two-Stage Retrieval: 임계값 0.32→0.25 완화로 Recall 확보 후 grade_or_rerank로 Precision 정제</a:t>
+            </a:r>
+          </a:p>
+          <a:p>
+            <a:pPr algn="l">
+              <a:lnSpc>
+                <a:spcPct val="118000"/>
+              </a:lnSpc>
+            </a:pPr>
+            <a:r>
+              <a:rPr sz="1250" b="0">
+                <a:solidFill>
+                  <a:srgbClr val="3A3A3A"/>
+                </a:solidFill>
+                <a:latin typeface="맑은 고딕"/>
+              </a:rPr>
+              <a:t>·  한국어 조사 제거 휴리스틱 ("몬스테라는"→"몬스테라")</a:t>
+            </a:r>
+          </a:p>
+          <a:p>
+            <a:pPr algn="l">
+              <a:lnSpc>
+                <a:spcPct val="118000"/>
+              </a:lnSpc>
+            </a:pPr>
+            <a:r>
+              <a:rPr sz="1250" b="0">
+                <a:solidFill>
+                  <a:srgbClr val="3A3A3A"/>
+                </a:solidFill>
+                <a:latin typeface="맑은 고딕"/>
+              </a:rPr>
+              <a:t>·  RRF 하이브리드 병합 (벡터+키워드 검색 재정렬)</a:t>
+            </a:r>
+          </a:p>
+          <a:p>
+            <a:pPr algn="l">
+              <a:lnSpc>
+                <a:spcPct val="118000"/>
+              </a:lnSpc>
+            </a:pPr>
+            <a:r>
+              <a:rPr sz="1250" b="0">
+                <a:solidFill>
+                  <a:srgbClr val="3A3A3A"/>
+                </a:solidFill>
+                <a:latin typeface="맑은 고딕"/>
+              </a:rPr>
+              <a:t>·  LLM 쿼리 확장 · 식물명 불일치 문서 강제 탈락</a:t>
+            </a:r>
+          </a:p>
+          <a:p>
+            <a:pPr algn="l">
+              <a:lnSpc>
+                <a:spcPct val="118000"/>
+              </a:lnSpc>
+            </a:pPr>
+            <a:r>
+              <a:rPr sz="1250" b="0">
+                <a:solidFill>
+                  <a:srgbClr val="3A3A3A"/>
+                </a:solidFill>
+                <a:latin typeface="맑은 고딕"/>
+              </a:rPr>
+              <a:t>·  근거 없으면 "모른다" 선언 — 강제 문서 주입 제거</a:t>
+            </a:r>
+          </a:p>
+        </p:txBody>
+      </p:sp>
+      <p:sp>
+        <p:nvSpPr>
+          <p:cNvPr id="9" name="Rectangle 8"/>
           <p:cNvSpPr/>
           <p:nvPr/>
         </p:nvSpPr>
         <p:spPr>
           <a:xfrm>
-            <a:off x="3108960" y="2450591"/>
-            <a:ext cx="82296" cy="969264"/>
+            <a:off x="502920" y="3383280"/>
+            <a:ext cx="5212080" cy="73152"/>
           </a:xfrm>
           <a:prstGeom prst="rect">
             <a:avLst/>
           </a:prstGeom>
           <a:solidFill>
-            <a:srgbClr val="3B7A57"/>
+            <a:srgbClr val="7CB342"/>
           </a:solidFill>
           <a:ln>
             <a:noFill/>
@@ -13523,121 +14305,43 @@
           </a:p>
         </p:txBody>
       </p:sp>
-      <p:sp>
-        <p:nvSpPr>
-          <p:cNvPr id="13" name="TextBox 12"/>
-          <p:cNvSpPr txBox="1"/>
-          <p:nvPr/>
-        </p:nvSpPr>
-        <p:spPr>
-          <a:xfrm>
-            <a:off x="3337560" y="2496311"/>
-            <a:ext cx="8138160" cy="320040"/>
-          </a:xfrm>
-          <a:prstGeom prst="rect">
-            <a:avLst/>
-          </a:prstGeom>
-          <a:noFill/>
-        </p:spPr>
-        <p:txBody>
-          <a:bodyPr wrap="square" anchor="t" lIns="101600" rIns="101600" tIns="50800" bIns="50800">
-            <a:spAutoFit/>
-          </a:bodyPr>
-          <a:lstStyle/>
-          <a:p>
-            <a:pPr algn="l">
-              <a:lnSpc>
-                <a:spcPct val="112000"/>
-              </a:lnSpc>
-            </a:pPr>
-            <a:r>
-              <a:rPr sz="1350" b="1">
-                <a:solidFill>
-                  <a:srgbClr val="3B7A57"/>
-                </a:solidFill>
-                <a:latin typeface="맑은 고딕"/>
-              </a:rPr>
-              <a:t>검색  (5~6단계)</a:t>
-            </a:r>
-          </a:p>
-        </p:txBody>
-      </p:sp>
-      <p:sp>
-        <p:nvSpPr>
-          <p:cNvPr id="14" name="TextBox 13"/>
-          <p:cNvSpPr txBox="1"/>
-          <p:nvPr/>
-        </p:nvSpPr>
-        <p:spPr>
-          <a:xfrm>
-            <a:off x="3337560" y="2834639"/>
-            <a:ext cx="8138160" cy="548640"/>
-          </a:xfrm>
-          <a:prstGeom prst="rect">
-            <a:avLst/>
-          </a:prstGeom>
-          <a:noFill/>
-        </p:spPr>
-        <p:txBody>
-          <a:bodyPr wrap="square" anchor="t" lIns="101600" rIns="101600" tIns="50800" bIns="50800">
-            <a:spAutoFit/>
-          </a:bodyPr>
-          <a:lstStyle/>
-          <a:p>
-            <a:pPr algn="l">
-              <a:lnSpc>
-                <a:spcPct val="112000"/>
-              </a:lnSpc>
-            </a:pPr>
-            <a:r>
-              <a:rPr sz="1100" b="0">
-                <a:solidFill>
-                  <a:srgbClr val="3A3A3A"/>
-                </a:solidFill>
-                <a:latin typeface="맑은 고딕"/>
-              </a:rPr>
-              <a:t>LLM 쿼리 확장(3개 생성) → pgvector 유사도 + 키워드 하이브리드 검색(RRF 병합)</a:t>
-            </a:r>
-          </a:p>
-          <a:p>
-            <a:pPr algn="l">
-              <a:lnSpc>
-                <a:spcPct val="112000"/>
-              </a:lnSpc>
-            </a:pPr>
-            <a:r>
-              <a:rPr sz="1100" b="0">
-                <a:solidFill>
-                  <a:srgbClr val="3A3A3A"/>
-                </a:solidFill>
-                <a:latin typeface="맑은 고딕"/>
-              </a:rPr>
-              <a:t>임계값을 완화해 후보 문서를 폭넓게 수집 (Recall 확보)</a:t>
-            </a:r>
-          </a:p>
-        </p:txBody>
-      </p:sp>
-      <p:sp>
-        <p:nvSpPr>
-          <p:cNvPr id="15" name="Rounded Rectangle 14"/>
+      <p:graphicFrame>
+        <p:nvGraphicFramePr>
+          <p:cNvPr id="10" name="Chart 9"/>
+          <p:cNvGraphicFramePr>
+            <a:graphicFrameLocks noGrp="1"/>
+          </p:cNvGraphicFramePr>
+          <p:nvPr/>
+        </p:nvGraphicFramePr>
+        <p:xfrm>
+          <a:off x="5989320" y="1417320"/>
+          <a:ext cx="5760720" cy="3520440"/>
+        </p:xfrm>
+        <a:graphic>
+          <a:graphicData uri="http://schemas.openxmlformats.org/drawingml/2006/chart">
+            <c:chart xmlns:c="http://schemas.openxmlformats.org/drawingml/2006/chart" r:id="rId2"/>
+          </a:graphicData>
+        </a:graphic>
+      </p:graphicFrame>
+      <p:sp>
+        <p:nvSpPr>
+          <p:cNvPr id="11" name="Rounded Rectangle 10"/>
           <p:cNvSpPr/>
           <p:nvPr/>
         </p:nvSpPr>
         <p:spPr>
           <a:xfrm>
-            <a:off x="3108960" y="3529583"/>
-            <a:ext cx="8503920" cy="969264"/>
+            <a:off x="5989320" y="5120640"/>
+            <a:ext cx="5760720" cy="1188720"/>
           </a:xfrm>
           <a:prstGeom prst="roundRect">
             <a:avLst/>
           </a:prstGeom>
           <a:solidFill>
-            <a:srgbClr val="FFFFFF"/>
+            <a:srgbClr val="F1F7F1"/>
           </a:solidFill>
-          <a:ln w="12700">
-            <a:solidFill>
-              <a:srgbClr val="E8E8E8"/>
-            </a:solidFill>
+          <a:ln>
+            <a:noFill/>
           </a:ln>
           <a:effectLst/>
         </p:spPr>
@@ -13656,499 +14360,54 @@
           </a:fontRef>
         </p:style>
         <p:txBody>
-          <a:bodyPr rtlCol="0" anchor="ctr"/>
-          <a:lstStyle/>
-          <a:p>
-            <a:pPr algn="ctr"/>
-          </a:p>
-        </p:txBody>
-      </p:sp>
-      <p:sp>
-        <p:nvSpPr>
-          <p:cNvPr id="16" name="Rectangle 15"/>
-          <p:cNvSpPr/>
-          <p:nvPr/>
-        </p:nvSpPr>
-        <p:spPr>
-          <a:xfrm>
-            <a:off x="3108960" y="3529583"/>
-            <a:ext cx="82296" cy="969264"/>
-          </a:xfrm>
-          <a:prstGeom prst="rect">
-            <a:avLst/>
-          </a:prstGeom>
-          <a:solidFill>
-            <a:srgbClr val="C0453E"/>
-          </a:solidFill>
-          <a:ln>
-            <a:noFill/>
-          </a:ln>
-          <a:effectLst/>
-        </p:spPr>
-        <p:style>
-          <a:lnRef idx="1">
-            <a:schemeClr val="accent1"/>
-          </a:lnRef>
-          <a:fillRef idx="3">
-            <a:schemeClr val="accent1"/>
-          </a:fillRef>
-          <a:effectRef idx="2">
-            <a:schemeClr val="accent1"/>
-          </a:effectRef>
-          <a:fontRef idx="minor">
-            <a:schemeClr val="lt1"/>
-          </a:fontRef>
-        </p:style>
-        <p:txBody>
-          <a:bodyPr rtlCol="0" anchor="ctr"/>
-          <a:lstStyle/>
-          <a:p>
-            <a:pPr algn="ctr"/>
-          </a:p>
-        </p:txBody>
-      </p:sp>
-      <p:sp>
-        <p:nvSpPr>
-          <p:cNvPr id="17" name="TextBox 16"/>
-          <p:cNvSpPr txBox="1"/>
-          <p:nvPr/>
-        </p:nvSpPr>
-        <p:spPr>
-          <a:xfrm>
-            <a:off x="3337560" y="3575303"/>
-            <a:ext cx="8138160" cy="320040"/>
-          </a:xfrm>
-          <a:prstGeom prst="rect">
-            <a:avLst/>
-          </a:prstGeom>
-          <a:noFill/>
-        </p:spPr>
-        <p:txBody>
-          <a:bodyPr wrap="square" anchor="t" lIns="101600" rIns="101600" tIns="50800" bIns="50800">
-            <a:spAutoFit/>
-          </a:bodyPr>
+          <a:bodyPr rtlCol="0" anchor="ctr" wrap="square" lIns="203200" rIns="203200" tIns="152400"/>
           <a:lstStyle/>
           <a:p>
             <a:pPr algn="l">
-              <a:lnSpc>
-                <a:spcPct val="112000"/>
-              </a:lnSpc>
-            </a:pPr>
-            <a:r>
-              <a:rPr sz="1350" b="1">
-                <a:solidFill>
-                  <a:srgbClr val="C0453E"/>
-                </a:solidFill>
-                <a:latin typeface="맑은 고딕"/>
-              </a:rPr>
-              <a:t>검증 · 필터링  (7단계)  — 핵심</a:t>
-            </a:r>
-          </a:p>
-        </p:txBody>
-      </p:sp>
-      <p:sp>
-        <p:nvSpPr>
-          <p:cNvPr id="18" name="TextBox 17"/>
-          <p:cNvSpPr txBox="1"/>
-          <p:nvPr/>
-        </p:nvSpPr>
-        <p:spPr>
-          <a:xfrm>
-            <a:off x="3337560" y="3913631"/>
-            <a:ext cx="8138160" cy="548640"/>
-          </a:xfrm>
-          <a:prstGeom prst="rect">
-            <a:avLst/>
-          </a:prstGeom>
-          <a:noFill/>
-        </p:spPr>
-        <p:txBody>
-          <a:bodyPr wrap="square" anchor="t" lIns="101600" rIns="101600" tIns="50800" bIns="50800">
-            <a:spAutoFit/>
-          </a:bodyPr>
-          <a:lstStyle/>
+              <a:spcAft>
+                <a:spcPts val="600"/>
+              </a:spcAft>
+            </a:pPr>
+            <a:r>
+              <a:rPr sz="1450" b="1">
+                <a:solidFill>
+                  <a:srgbClr val="1E4D2B"/>
+                </a:solidFill>
+                <a:latin typeface="맑은 고딕"/>
+              </a:rPr>
+              <a:t>결과 해석</a:t>
+            </a:r>
+          </a:p>
           <a:p>
             <a:pPr algn="l">
               <a:lnSpc>
-                <a:spcPct val="112000"/>
-              </a:lnSpc>
-            </a:pPr>
-            <a:r>
-              <a:rPr sz="1100" b="0">
+                <a:spcPct val="118000"/>
+              </a:lnSpc>
+            </a:pPr>
+            <a:r>
+              <a:rPr sz="1200" b="1">
+                <a:solidFill>
+                  <a:srgbClr val="1E4D2B"/>
+                </a:solidFill>
+                <a:latin typeface="맑은 고딕"/>
+              </a:rPr>
+              <a:t>·  검색 정확도 3.58 → 4.83점 대폭 개선, 사진 반영 만점(5.00)</a:t>
+            </a:r>
+          </a:p>
+          <a:p>
+            <a:pPr algn="l">
+              <a:lnSpc>
+                <a:spcPct val="118000"/>
+              </a:lnSpc>
+            </a:pPr>
+            <a:r>
+              <a:rPr sz="1200" b="0">
                 <a:solidFill>
                   <a:srgbClr val="3A3A3A"/>
                 </a:solidFill>
                 <a:latin typeface="맑은 고딕"/>
               </a:rPr>
-              <a:t>grade_or_rerank: LLM이 후보 문서를 하나씩 읽고 질문 식물종과 일치하는지 검증</a:t>
-            </a:r>
-          </a:p>
-          <a:p>
-            <a:pPr algn="l">
-              <a:lnSpc>
-                <a:spcPct val="112000"/>
-              </a:lnSpc>
-            </a:pPr>
-            <a:r>
-              <a:rPr sz="1100" b="0">
-                <a:solidFill>
-                  <a:srgbClr val="3A3A3A"/>
-                </a:solidFill>
-                <a:latin typeface="맑은 고딕"/>
-              </a:rPr>
-              <a:t>무관한 문서를 엄격히 탈락시켜 환각을 원천 차단 (Precision 확보)</a:t>
-            </a:r>
-          </a:p>
-        </p:txBody>
-      </p:sp>
-      <p:sp>
-        <p:nvSpPr>
-          <p:cNvPr id="19" name="Rounded Rectangle 18"/>
-          <p:cNvSpPr/>
-          <p:nvPr/>
-        </p:nvSpPr>
-        <p:spPr>
-          <a:xfrm>
-            <a:off x="3108960" y="4608575"/>
-            <a:ext cx="8503920" cy="969264"/>
-          </a:xfrm>
-          <a:prstGeom prst="roundRect">
-            <a:avLst/>
-          </a:prstGeom>
-          <a:solidFill>
-            <a:srgbClr val="FFFFFF"/>
-          </a:solidFill>
-          <a:ln w="12700">
-            <a:solidFill>
-              <a:srgbClr val="E8E8E8"/>
-            </a:solidFill>
-          </a:ln>
-          <a:effectLst/>
-        </p:spPr>
-        <p:style>
-          <a:lnRef idx="1">
-            <a:schemeClr val="accent1"/>
-          </a:lnRef>
-          <a:fillRef idx="3">
-            <a:schemeClr val="accent1"/>
-          </a:fillRef>
-          <a:effectRef idx="2">
-            <a:schemeClr val="accent1"/>
-          </a:effectRef>
-          <a:fontRef idx="minor">
-            <a:schemeClr val="lt1"/>
-          </a:fontRef>
-        </p:style>
-        <p:txBody>
-          <a:bodyPr rtlCol="0" anchor="ctr"/>
-          <a:lstStyle/>
-          <a:p>
-            <a:pPr algn="ctr"/>
-          </a:p>
-        </p:txBody>
-      </p:sp>
-      <p:sp>
-        <p:nvSpPr>
-          <p:cNvPr id="20" name="Rectangle 19"/>
-          <p:cNvSpPr/>
-          <p:nvPr/>
-        </p:nvSpPr>
-        <p:spPr>
-          <a:xfrm>
-            <a:off x="3108960" y="4608575"/>
-            <a:ext cx="82296" cy="969264"/>
-          </a:xfrm>
-          <a:prstGeom prst="rect">
-            <a:avLst/>
-          </a:prstGeom>
-          <a:solidFill>
-            <a:srgbClr val="E8A317"/>
-          </a:solidFill>
-          <a:ln>
-            <a:noFill/>
-          </a:ln>
-          <a:effectLst/>
-        </p:spPr>
-        <p:style>
-          <a:lnRef idx="1">
-            <a:schemeClr val="accent1"/>
-          </a:lnRef>
-          <a:fillRef idx="3">
-            <a:schemeClr val="accent1"/>
-          </a:fillRef>
-          <a:effectRef idx="2">
-            <a:schemeClr val="accent1"/>
-          </a:effectRef>
-          <a:fontRef idx="minor">
-            <a:schemeClr val="lt1"/>
-          </a:fontRef>
-        </p:style>
-        <p:txBody>
-          <a:bodyPr rtlCol="0" anchor="ctr"/>
-          <a:lstStyle/>
-          <a:p>
-            <a:pPr algn="ctr"/>
-          </a:p>
-        </p:txBody>
-      </p:sp>
-      <p:sp>
-        <p:nvSpPr>
-          <p:cNvPr id="21" name="TextBox 20"/>
-          <p:cNvSpPr txBox="1"/>
-          <p:nvPr/>
-        </p:nvSpPr>
-        <p:spPr>
-          <a:xfrm>
-            <a:off x="3337560" y="4654295"/>
-            <a:ext cx="8138160" cy="320040"/>
-          </a:xfrm>
-          <a:prstGeom prst="rect">
-            <a:avLst/>
-          </a:prstGeom>
-          <a:noFill/>
-        </p:spPr>
-        <p:txBody>
-          <a:bodyPr wrap="square" anchor="t" lIns="101600" rIns="101600" tIns="50800" bIns="50800">
-            <a:spAutoFit/>
-          </a:bodyPr>
-          <a:lstStyle/>
-          <a:p>
-            <a:pPr algn="l">
-              <a:lnSpc>
-                <a:spcPct val="112000"/>
-              </a:lnSpc>
-            </a:pPr>
-            <a:r>
-              <a:rPr sz="1350" b="1">
-                <a:solidFill>
-                  <a:srgbClr val="E8A317"/>
-                </a:solidFill>
-                <a:latin typeface="맑은 고딕"/>
-              </a:rPr>
-              <a:t>생성 · 안전  (8~9단계)</a:t>
-            </a:r>
-          </a:p>
-        </p:txBody>
-      </p:sp>
-      <p:sp>
-        <p:nvSpPr>
-          <p:cNvPr id="22" name="TextBox 21"/>
-          <p:cNvSpPr txBox="1"/>
-          <p:nvPr/>
-        </p:nvSpPr>
-        <p:spPr>
-          <a:xfrm>
-            <a:off x="3337560" y="4992623"/>
-            <a:ext cx="8138160" cy="548640"/>
-          </a:xfrm>
-          <a:prstGeom prst="rect">
-            <a:avLst/>
-          </a:prstGeom>
-          <a:noFill/>
-        </p:spPr>
-        <p:txBody>
-          <a:bodyPr wrap="square" anchor="t" lIns="101600" rIns="101600" tIns="50800" bIns="50800">
-            <a:spAutoFit/>
-          </a:bodyPr>
-          <a:lstStyle/>
-          <a:p>
-            <a:pPr algn="l">
-              <a:lnSpc>
-                <a:spcPct val="112000"/>
-              </a:lnSpc>
-            </a:pPr>
-            <a:r>
-              <a:rPr sz="1100" b="0">
-                <a:solidFill>
-                  <a:srgbClr val="3A3A3A"/>
-                </a:solidFill>
-                <a:latin typeface="맑은 고딕"/>
-              </a:rPr>
-              <a:t>전문가 모드 / 반려식물 1인칭 모드에 맞춘 답변 생성 + 출처(citations) 바인딩</a:t>
-            </a:r>
-          </a:p>
-          <a:p>
-            <a:pPr algn="l">
-              <a:lnSpc>
-                <a:spcPct val="112000"/>
-              </a:lnSpc>
-            </a:pPr>
-            <a:r>
-              <a:rPr sz="1100" b="0">
-                <a:solidFill>
-                  <a:srgbClr val="3A3A3A"/>
-                </a:solidFill>
-                <a:latin typeface="맑은 고딕"/>
-              </a:rPr>
-              <a:t>safety_review가 농약 관련 답변에 안전 고지를 강제 조립</a:t>
-            </a:r>
-          </a:p>
-        </p:txBody>
-      </p:sp>
-      <p:sp>
-        <p:nvSpPr>
-          <p:cNvPr id="23" name="Rounded Rectangle 22"/>
-          <p:cNvSpPr/>
-          <p:nvPr/>
-        </p:nvSpPr>
-        <p:spPr>
-          <a:xfrm>
-            <a:off x="3108960" y="5687567"/>
-            <a:ext cx="8503920" cy="969264"/>
-          </a:xfrm>
-          <a:prstGeom prst="roundRect">
-            <a:avLst/>
-          </a:prstGeom>
-          <a:solidFill>
-            <a:srgbClr val="FFFFFF"/>
-          </a:solidFill>
-          <a:ln w="12700">
-            <a:solidFill>
-              <a:srgbClr val="E8E8E8"/>
-            </a:solidFill>
-          </a:ln>
-          <a:effectLst/>
-        </p:spPr>
-        <p:style>
-          <a:lnRef idx="1">
-            <a:schemeClr val="accent1"/>
-          </a:lnRef>
-          <a:fillRef idx="3">
-            <a:schemeClr val="accent1"/>
-          </a:fillRef>
-          <a:effectRef idx="2">
-            <a:schemeClr val="accent1"/>
-          </a:effectRef>
-          <a:fontRef idx="minor">
-            <a:schemeClr val="lt1"/>
-          </a:fontRef>
-        </p:style>
-        <p:txBody>
-          <a:bodyPr rtlCol="0" anchor="ctr"/>
-          <a:lstStyle/>
-          <a:p>
-            <a:pPr algn="ctr"/>
-          </a:p>
-        </p:txBody>
-      </p:sp>
-      <p:sp>
-        <p:nvSpPr>
-          <p:cNvPr id="24" name="Rectangle 23"/>
-          <p:cNvSpPr/>
-          <p:nvPr/>
-        </p:nvSpPr>
-        <p:spPr>
-          <a:xfrm>
-            <a:off x="3108960" y="5687567"/>
-            <a:ext cx="82296" cy="969264"/>
-          </a:xfrm>
-          <a:prstGeom prst="rect">
-            <a:avLst/>
-          </a:prstGeom>
-          <a:solidFill>
-            <a:srgbClr val="1E4D2B"/>
-          </a:solidFill>
-          <a:ln>
-            <a:noFill/>
-          </a:ln>
-          <a:effectLst/>
-        </p:spPr>
-        <p:style>
-          <a:lnRef idx="1">
-            <a:schemeClr val="accent1"/>
-          </a:lnRef>
-          <a:fillRef idx="3">
-            <a:schemeClr val="accent1"/>
-          </a:fillRef>
-          <a:effectRef idx="2">
-            <a:schemeClr val="accent1"/>
-          </a:effectRef>
-          <a:fontRef idx="minor">
-            <a:schemeClr val="lt1"/>
-          </a:fontRef>
-        </p:style>
-        <p:txBody>
-          <a:bodyPr rtlCol="0" anchor="ctr"/>
-          <a:lstStyle/>
-          <a:p>
-            <a:pPr algn="ctr"/>
-          </a:p>
-        </p:txBody>
-      </p:sp>
-      <p:sp>
-        <p:nvSpPr>
-          <p:cNvPr id="25" name="TextBox 24"/>
-          <p:cNvSpPr txBox="1"/>
-          <p:nvPr/>
-        </p:nvSpPr>
-        <p:spPr>
-          <a:xfrm>
-            <a:off x="3337560" y="5733287"/>
-            <a:ext cx="8138160" cy="320040"/>
-          </a:xfrm>
-          <a:prstGeom prst="rect">
-            <a:avLst/>
-          </a:prstGeom>
-          <a:noFill/>
-        </p:spPr>
-        <p:txBody>
-          <a:bodyPr wrap="square" anchor="t" lIns="101600" rIns="101600" tIns="50800" bIns="50800">
-            <a:spAutoFit/>
-          </a:bodyPr>
-          <a:lstStyle/>
-          <a:p>
-            <a:pPr algn="l">
-              <a:lnSpc>
-                <a:spcPct val="112000"/>
-              </a:lnSpc>
-            </a:pPr>
-            <a:r>
-              <a:rPr sz="1350" b="1">
-                <a:solidFill>
-                  <a:srgbClr val="1E4D2B"/>
-                </a:solidFill>
-                <a:latin typeface="맑은 고딕"/>
-              </a:rPr>
-              <a:t>영속화  (10단계)</a:t>
-            </a:r>
-          </a:p>
-        </p:txBody>
-      </p:sp>
-      <p:sp>
-        <p:nvSpPr>
-          <p:cNvPr id="26" name="TextBox 25"/>
-          <p:cNvSpPr txBox="1"/>
-          <p:nvPr/>
-        </p:nvSpPr>
-        <p:spPr>
-          <a:xfrm>
-            <a:off x="3337560" y="6071615"/>
-            <a:ext cx="8138160" cy="548640"/>
-          </a:xfrm>
-          <a:prstGeom prst="rect">
-            <a:avLst/>
-          </a:prstGeom>
-          <a:noFill/>
-        </p:spPr>
-        <p:txBody>
-          <a:bodyPr wrap="square" anchor="t" lIns="101600" rIns="101600" tIns="50800" bIns="50800">
-            <a:spAutoFit/>
-          </a:bodyPr>
-          <a:lstStyle/>
-          <a:p>
-            <a:pPr algn="l">
-              <a:lnSpc>
-                <a:spcPct val="112000"/>
-              </a:lnSpc>
-            </a:pPr>
-            <a:r>
-              <a:rPr sz="1100" b="0">
-                <a:solidFill>
-                  <a:srgbClr val="3A3A3A"/>
-                </a:solidFill>
-                <a:latin typeface="맑은 고딕"/>
-              </a:rPr>
-              <a:t>답변·출처·세션 제목을 Supabase에 저장 — 식물별 상담 이력 보존</a:t>
+              <a:t>·  근거 없으면 답변 대신 안전한 거절을 택하는 구조로 전환</a:t>
             </a:r>
           </a:p>
         </p:txBody>
@@ -14257,7 +14516,7 @@
                 </a:solidFill>
                 <a:latin typeface="맑은 고딕"/>
               </a:rPr>
-              <a:t>RAG 기술 ③ 품질 개선 및 평가</a:t>
+              <a:t>시스템 아키텍처 및 배포</a:t>
             </a:r>
           </a:p>
         </p:txBody>
@@ -14296,7 +14555,7 @@
                 </a:solidFill>
                 <a:latin typeface="맑은 고딕"/>
               </a:rPr>
-              <a:t>LLM-as-a-Judge 자동 평가 기반 Two-Stage Retrieval 개선</a:t>
+              <a:t>Vercel + Render + Supabase + OpenAI — 전 구간 실배포 완료</a:t>
             </a:r>
           </a:p>
         </p:txBody>
@@ -14353,19 +14612,17 @@
         </p:nvSpPr>
         <p:spPr>
           <a:xfrm>
-            <a:off x="502920" y="1417320"/>
-            <a:ext cx="5212080" cy="1783080"/>
+            <a:off x="457200" y="1600200"/>
+            <a:ext cx="1188720" cy="960120"/>
           </a:xfrm>
           <a:prstGeom prst="roundRect">
             <a:avLst/>
           </a:prstGeom>
           <a:solidFill>
-            <a:srgbClr val="FFFFFF"/>
+            <a:srgbClr val="3A3A3A"/>
           </a:solidFill>
-          <a:ln w="12700">
-            <a:solidFill>
-              <a:srgbClr val="E8E8E8"/>
-            </a:solidFill>
+          <a:ln>
+            <a:noFill/>
           </a:ln>
           <a:effectLst/>
         </p:spPr>
@@ -14384,269 +14641,38 @@
           </a:fontRef>
         </p:style>
         <p:txBody>
-          <a:bodyPr rtlCol="0" anchor="ctr" wrap="square" lIns="203200" rIns="203200" tIns="152400"/>
-          <a:lstStyle/>
-          <a:p>
-            <a:pPr algn="l">
-              <a:spcAft>
-                <a:spcPts val="600"/>
-              </a:spcAft>
-            </a:pPr>
-            <a:r>
-              <a:rPr sz="1500" b="1">
-                <a:solidFill>
-                  <a:srgbClr val="C0453E"/>
-                </a:solidFill>
-                <a:latin typeface="맑은 고딕"/>
-              </a:rPr>
-              <a:t>Before — 초기 한계</a:t>
-            </a:r>
-          </a:p>
-          <a:p>
-            <a:pPr algn="l">
-              <a:lnSpc>
-                <a:spcPct val="118000"/>
-              </a:lnSpc>
-            </a:pPr>
-            <a:r>
-              <a:rPr sz="1250" b="0">
-                <a:solidFill>
-                  <a:srgbClr val="3A3A3A"/>
-                </a:solidFill>
-                <a:latin typeface="맑은 고딕"/>
-              </a:rPr>
-              <a:t>·  몬스테라 질문에 '윌마'·'무화과' 문서 검색 (오매칭)</a:t>
-            </a:r>
-          </a:p>
-          <a:p>
-            <a:pPr algn="l">
-              <a:lnSpc>
-                <a:spcPct val="118000"/>
-              </a:lnSpc>
-            </a:pPr>
-            <a:r>
-              <a:rPr sz="1250" b="0">
-                <a:solidFill>
-                  <a:srgbClr val="3A3A3A"/>
-                </a:solidFill>
-                <a:latin typeface="맑은 고딕"/>
-              </a:rPr>
-              <a:t>·  무관 문서 강제 주입 → 거짓 답변 생성 (환각)</a:t>
-            </a:r>
-          </a:p>
-          <a:p>
-            <a:pPr algn="l">
-              <a:lnSpc>
-                <a:spcPct val="118000"/>
-              </a:lnSpc>
-            </a:pPr>
-            <a:r>
-              <a:rPr sz="1250" b="0">
-                <a:solidFill>
-                  <a:srgbClr val="3A3A3A"/>
-                </a:solidFill>
-                <a:latin typeface="맑은 고딕"/>
-              </a:rPr>
-              <a:t>·  이미지 케이스 추가 후 검색 정확도 3.58점 하락</a:t>
-            </a:r>
-          </a:p>
-        </p:txBody>
-      </p:sp>
-      <p:sp>
-        <p:nvSpPr>
-          <p:cNvPr id="7" name="Rectangle 6"/>
+          <a:bodyPr rtlCol="0" anchor="ctr" wrap="square" lIns="101600" rIns="101600" tIns="50800" bIns="50800"/>
+          <a:lstStyle/>
+          <a:p>
+            <a:pPr algn="ctr">
+              <a:lnSpc>
+                <a:spcPct val="112000"/>
+              </a:lnSpc>
+            </a:pPr>
+            <a:r>
+              <a:rPr sz="1300" b="1">
+                <a:solidFill>
+                  <a:srgbClr val="FFFFFF"/>
+                </a:solidFill>
+                <a:latin typeface="맑은 고딕"/>
+              </a:rPr>
+              <a:t>사용자</a:t>
+            </a:r>
+          </a:p>
+        </p:txBody>
+      </p:sp>
+      <p:sp>
+        <p:nvSpPr>
+          <p:cNvPr id="7" name="Right Arrow 6"/>
           <p:cNvSpPr/>
           <p:nvPr/>
         </p:nvSpPr>
         <p:spPr>
           <a:xfrm>
-            <a:off x="502920" y="1417320"/>
-            <a:ext cx="5212080" cy="73152"/>
-          </a:xfrm>
-          <a:prstGeom prst="rect">
-            <a:avLst/>
-          </a:prstGeom>
-          <a:solidFill>
-            <a:srgbClr val="C0453E"/>
-          </a:solidFill>
-          <a:ln>
-            <a:noFill/>
-          </a:ln>
-          <a:effectLst/>
-        </p:spPr>
-        <p:style>
-          <a:lnRef idx="1">
-            <a:schemeClr val="accent1"/>
-          </a:lnRef>
-          <a:fillRef idx="3">
-            <a:schemeClr val="accent1"/>
-          </a:fillRef>
-          <a:effectRef idx="2">
-            <a:schemeClr val="accent1"/>
-          </a:effectRef>
-          <a:fontRef idx="minor">
-            <a:schemeClr val="lt1"/>
-          </a:fontRef>
-        </p:style>
-        <p:txBody>
-          <a:bodyPr rtlCol="0" anchor="ctr"/>
-          <a:lstStyle/>
-          <a:p>
-            <a:pPr algn="ctr"/>
-          </a:p>
-        </p:txBody>
-      </p:sp>
-      <p:sp>
-        <p:nvSpPr>
-          <p:cNvPr id="8" name="Rounded Rectangle 7"/>
-          <p:cNvSpPr/>
-          <p:nvPr/>
-        </p:nvSpPr>
-        <p:spPr>
-          <a:xfrm>
-            <a:off x="502920" y="3383280"/>
-            <a:ext cx="5212080" cy="2697480"/>
-          </a:xfrm>
-          <a:prstGeom prst="roundRect">
-            <a:avLst/>
-          </a:prstGeom>
-          <a:solidFill>
-            <a:srgbClr val="FFFFFF"/>
-          </a:solidFill>
-          <a:ln w="12700">
-            <a:solidFill>
-              <a:srgbClr val="E8E8E8"/>
-            </a:solidFill>
-          </a:ln>
-          <a:effectLst/>
-        </p:spPr>
-        <p:style>
-          <a:lnRef idx="1">
-            <a:schemeClr val="accent1"/>
-          </a:lnRef>
-          <a:fillRef idx="3">
-            <a:schemeClr val="accent1"/>
-          </a:fillRef>
-          <a:effectRef idx="2">
-            <a:schemeClr val="accent1"/>
-          </a:effectRef>
-          <a:fontRef idx="minor">
-            <a:schemeClr val="lt1"/>
-          </a:fontRef>
-        </p:style>
-        <p:txBody>
-          <a:bodyPr rtlCol="0" anchor="ctr" wrap="square" lIns="203200" rIns="203200" tIns="152400"/>
-          <a:lstStyle/>
-          <a:p>
-            <a:pPr algn="l">
-              <a:spcAft>
-                <a:spcPts val="600"/>
-              </a:spcAft>
-            </a:pPr>
-            <a:r>
-              <a:rPr sz="1500" b="1">
-                <a:solidFill>
-                  <a:srgbClr val="3B7A57"/>
-                </a:solidFill>
-                <a:latin typeface="맑은 고딕"/>
-              </a:rPr>
-              <a:t>After — 핵심 개선 기법</a:t>
-            </a:r>
-          </a:p>
-          <a:p>
-            <a:pPr algn="l">
-              <a:lnSpc>
-                <a:spcPct val="118000"/>
-              </a:lnSpc>
-            </a:pPr>
-            <a:r>
-              <a:rPr sz="1250" b="1">
-                <a:solidFill>
-                  <a:srgbClr val="1E4D2B"/>
-                </a:solidFill>
-                <a:latin typeface="맑은 고딕"/>
-              </a:rPr>
-              <a:t>·  Two-Stage Retrieval: 임계값 0.32→0.25 완화로 Recall 확보 후 grade_or_rerank로 Precision 정제</a:t>
-            </a:r>
-          </a:p>
-          <a:p>
-            <a:pPr algn="l">
-              <a:lnSpc>
-                <a:spcPct val="118000"/>
-              </a:lnSpc>
-            </a:pPr>
-            <a:r>
-              <a:rPr sz="1250" b="0">
-                <a:solidFill>
-                  <a:srgbClr val="3A3A3A"/>
-                </a:solidFill>
-                <a:latin typeface="맑은 고딕"/>
-              </a:rPr>
-              <a:t>·  한국어 조사 제거 휴리스틱 ("몬스테라는"→"몬스테라")</a:t>
-            </a:r>
-          </a:p>
-          <a:p>
-            <a:pPr algn="l">
-              <a:lnSpc>
-                <a:spcPct val="118000"/>
-              </a:lnSpc>
-            </a:pPr>
-            <a:r>
-              <a:rPr sz="1250" b="0">
-                <a:solidFill>
-                  <a:srgbClr val="3A3A3A"/>
-                </a:solidFill>
-                <a:latin typeface="맑은 고딕"/>
-              </a:rPr>
-              <a:t>·  RRF 하이브리드 병합 (벡터+키워드 검색 재정렬)</a:t>
-            </a:r>
-          </a:p>
-          <a:p>
-            <a:pPr algn="l">
-              <a:lnSpc>
-                <a:spcPct val="118000"/>
-              </a:lnSpc>
-            </a:pPr>
-            <a:r>
-              <a:rPr sz="1250" b="0">
-                <a:solidFill>
-                  <a:srgbClr val="3A3A3A"/>
-                </a:solidFill>
-                <a:latin typeface="맑은 고딕"/>
-              </a:rPr>
-              <a:t>·  LLM 쿼리 확장 · 식물명 불일치 문서 강제 탈락</a:t>
-            </a:r>
-          </a:p>
-          <a:p>
-            <a:pPr algn="l">
-              <a:lnSpc>
-                <a:spcPct val="118000"/>
-              </a:lnSpc>
-            </a:pPr>
-            <a:r>
-              <a:rPr sz="1250" b="0">
-                <a:solidFill>
-                  <a:srgbClr val="3A3A3A"/>
-                </a:solidFill>
-                <a:latin typeface="맑은 고딕"/>
-              </a:rPr>
-              <a:t>·  근거 없으면 "모른다" 선언 — 강제 문서 주입 제거</a:t>
-            </a:r>
-          </a:p>
-        </p:txBody>
-      </p:sp>
-      <p:sp>
-        <p:nvSpPr>
-          <p:cNvPr id="9" name="Rectangle 8"/>
-          <p:cNvSpPr/>
-          <p:nvPr/>
-        </p:nvSpPr>
-        <p:spPr>
-          <a:xfrm>
-            <a:off x="502920" y="3383280"/>
-            <a:ext cx="5212080" cy="73152"/>
-          </a:xfrm>
-          <a:prstGeom prst="rect">
+            <a:off x="1655064" y="1947672"/>
+            <a:ext cx="182880" cy="256032"/>
+          </a:xfrm>
+          <a:prstGeom prst="rightArrow">
             <a:avLst/>
           </a:prstGeom>
           <a:solidFill>
@@ -14679,34 +14705,440 @@
           </a:p>
         </p:txBody>
       </p:sp>
-      <p:graphicFrame>
-        <p:nvGraphicFramePr>
-          <p:cNvPr id="10" name="Chart 9"/>
-          <p:cNvGraphicFramePr>
-            <a:graphicFrameLocks noGrp="1"/>
-          </p:cNvGraphicFramePr>
-          <p:nvPr/>
-        </p:nvGraphicFramePr>
-        <p:xfrm>
-          <a:off x="5989320" y="1417320"/>
-          <a:ext cx="5760720" cy="3520440"/>
-        </p:xfrm>
-        <a:graphic>
-          <a:graphicData uri="http://schemas.openxmlformats.org/drawingml/2006/chart">
-            <c:chart xmlns:c="http://schemas.openxmlformats.org/drawingml/2006/chart" r:id="rId2"/>
-          </a:graphicData>
-        </a:graphic>
-      </p:graphicFrame>
-      <p:sp>
-        <p:nvSpPr>
-          <p:cNvPr id="11" name="Rounded Rectangle 10"/>
+      <p:sp>
+        <p:nvSpPr>
+          <p:cNvPr id="8" name="Rounded Rectangle 7"/>
           <p:cNvSpPr/>
           <p:nvPr/>
         </p:nvSpPr>
         <p:spPr>
           <a:xfrm>
-            <a:off x="5989320" y="5120640"/>
-            <a:ext cx="5760720" cy="1188720"/>
+            <a:off x="1856232" y="1600200"/>
+            <a:ext cx="2011680" cy="960120"/>
+          </a:xfrm>
+          <a:prstGeom prst="roundRect">
+            <a:avLst/>
+          </a:prstGeom>
+          <a:solidFill>
+            <a:srgbClr val="3B7A57"/>
+          </a:solidFill>
+          <a:ln>
+            <a:noFill/>
+          </a:ln>
+          <a:effectLst/>
+        </p:spPr>
+        <p:style>
+          <a:lnRef idx="1">
+            <a:schemeClr val="accent1"/>
+          </a:lnRef>
+          <a:fillRef idx="3">
+            <a:schemeClr val="accent1"/>
+          </a:fillRef>
+          <a:effectRef idx="2">
+            <a:schemeClr val="accent1"/>
+          </a:effectRef>
+          <a:fontRef idx="minor">
+            <a:schemeClr val="lt1"/>
+          </a:fontRef>
+        </p:style>
+        <p:txBody>
+          <a:bodyPr rtlCol="0" anchor="ctr" wrap="square" lIns="101600" rIns="101600" tIns="50800" bIns="50800"/>
+          <a:lstStyle/>
+          <a:p>
+            <a:pPr algn="ctr">
+              <a:lnSpc>
+                <a:spcPct val="112000"/>
+              </a:lnSpc>
+            </a:pPr>
+            <a:r>
+              <a:rPr sz="1300" b="1">
+                <a:solidFill>
+                  <a:srgbClr val="FFFFFF"/>
+                </a:solidFill>
+                <a:latin typeface="맑은 고딕"/>
+              </a:rPr>
+              <a:t>Vercel</a:t>
+            </a:r>
+          </a:p>
+          <a:p>
+            <a:pPr algn="ctr">
+              <a:lnSpc>
+                <a:spcPct val="112000"/>
+              </a:lnSpc>
+            </a:pPr>
+            <a:r>
+              <a:rPr sz="1300" b="1">
+                <a:solidFill>
+                  <a:srgbClr val="FFFFFF"/>
+                </a:solidFill>
+                <a:latin typeface="맑은 고딕"/>
+              </a:rPr>
+              <a:t>React·TS 프론트</a:t>
+            </a:r>
+          </a:p>
+        </p:txBody>
+      </p:sp>
+      <p:sp>
+        <p:nvSpPr>
+          <p:cNvPr id="9" name="Right Arrow 8"/>
+          <p:cNvSpPr/>
+          <p:nvPr/>
+        </p:nvSpPr>
+        <p:spPr>
+          <a:xfrm>
+            <a:off x="3877056" y="1947672"/>
+            <a:ext cx="182880" cy="256032"/>
+          </a:xfrm>
+          <a:prstGeom prst="rightArrow">
+            <a:avLst/>
+          </a:prstGeom>
+          <a:solidFill>
+            <a:srgbClr val="7CB342"/>
+          </a:solidFill>
+          <a:ln>
+            <a:noFill/>
+          </a:ln>
+          <a:effectLst/>
+        </p:spPr>
+        <p:style>
+          <a:lnRef idx="1">
+            <a:schemeClr val="accent1"/>
+          </a:lnRef>
+          <a:fillRef idx="3">
+            <a:schemeClr val="accent1"/>
+          </a:fillRef>
+          <a:effectRef idx="2">
+            <a:schemeClr val="accent1"/>
+          </a:effectRef>
+          <a:fontRef idx="minor">
+            <a:schemeClr val="lt1"/>
+          </a:fontRef>
+        </p:style>
+        <p:txBody>
+          <a:bodyPr rtlCol="0" anchor="ctr"/>
+          <a:lstStyle/>
+          <a:p>
+            <a:pPr algn="ctr"/>
+          </a:p>
+        </p:txBody>
+      </p:sp>
+      <p:sp>
+        <p:nvSpPr>
+          <p:cNvPr id="10" name="Rounded Rectangle 9"/>
+          <p:cNvSpPr/>
+          <p:nvPr/>
+        </p:nvSpPr>
+        <p:spPr>
+          <a:xfrm>
+            <a:off x="4078224" y="1600200"/>
+            <a:ext cx="2011680" cy="960120"/>
+          </a:xfrm>
+          <a:prstGeom prst="roundRect">
+            <a:avLst/>
+          </a:prstGeom>
+          <a:solidFill>
+            <a:srgbClr val="3B7A57"/>
+          </a:solidFill>
+          <a:ln>
+            <a:noFill/>
+          </a:ln>
+          <a:effectLst/>
+        </p:spPr>
+        <p:style>
+          <a:lnRef idx="1">
+            <a:schemeClr val="accent1"/>
+          </a:lnRef>
+          <a:fillRef idx="3">
+            <a:schemeClr val="accent1"/>
+          </a:fillRef>
+          <a:effectRef idx="2">
+            <a:schemeClr val="accent1"/>
+          </a:effectRef>
+          <a:fontRef idx="minor">
+            <a:schemeClr val="lt1"/>
+          </a:fontRef>
+        </p:style>
+        <p:txBody>
+          <a:bodyPr rtlCol="0" anchor="ctr" wrap="square" lIns="101600" rIns="101600" tIns="50800" bIns="50800"/>
+          <a:lstStyle/>
+          <a:p>
+            <a:pPr algn="ctr">
+              <a:lnSpc>
+                <a:spcPct val="112000"/>
+              </a:lnSpc>
+            </a:pPr>
+            <a:r>
+              <a:rPr sz="1300" b="1">
+                <a:solidFill>
+                  <a:srgbClr val="FFFFFF"/>
+                </a:solidFill>
+                <a:latin typeface="맑은 고딕"/>
+              </a:rPr>
+              <a:t>Render</a:t>
+            </a:r>
+          </a:p>
+          <a:p>
+            <a:pPr algn="ctr">
+              <a:lnSpc>
+                <a:spcPct val="112000"/>
+              </a:lnSpc>
+            </a:pPr>
+            <a:r>
+              <a:rPr sz="1300" b="1">
+                <a:solidFill>
+                  <a:srgbClr val="FFFFFF"/>
+                </a:solidFill>
+                <a:latin typeface="맑은 고딕"/>
+              </a:rPr>
+              <a:t>FastAPI 백엔드</a:t>
+            </a:r>
+          </a:p>
+        </p:txBody>
+      </p:sp>
+      <p:sp>
+        <p:nvSpPr>
+          <p:cNvPr id="11" name="Right Arrow 10"/>
+          <p:cNvSpPr/>
+          <p:nvPr/>
+        </p:nvSpPr>
+        <p:spPr>
+          <a:xfrm>
+            <a:off x="6099048" y="1947672"/>
+            <a:ext cx="182880" cy="256032"/>
+          </a:xfrm>
+          <a:prstGeom prst="rightArrow">
+            <a:avLst/>
+          </a:prstGeom>
+          <a:solidFill>
+            <a:srgbClr val="7CB342"/>
+          </a:solidFill>
+          <a:ln>
+            <a:noFill/>
+          </a:ln>
+          <a:effectLst/>
+        </p:spPr>
+        <p:style>
+          <a:lnRef idx="1">
+            <a:schemeClr val="accent1"/>
+          </a:lnRef>
+          <a:fillRef idx="3">
+            <a:schemeClr val="accent1"/>
+          </a:fillRef>
+          <a:effectRef idx="2">
+            <a:schemeClr val="accent1"/>
+          </a:effectRef>
+          <a:fontRef idx="minor">
+            <a:schemeClr val="lt1"/>
+          </a:fontRef>
+        </p:style>
+        <p:txBody>
+          <a:bodyPr rtlCol="0" anchor="ctr"/>
+          <a:lstStyle/>
+          <a:p>
+            <a:pPr algn="ctr"/>
+          </a:p>
+        </p:txBody>
+      </p:sp>
+      <p:sp>
+        <p:nvSpPr>
+          <p:cNvPr id="12" name="Rounded Rectangle 11"/>
+          <p:cNvSpPr/>
+          <p:nvPr/>
+        </p:nvSpPr>
+        <p:spPr>
+          <a:xfrm>
+            <a:off x="6300216" y="1600200"/>
+            <a:ext cx="3108960" cy="960120"/>
+          </a:xfrm>
+          <a:prstGeom prst="roundRect">
+            <a:avLst/>
+          </a:prstGeom>
+          <a:solidFill>
+            <a:srgbClr val="1E4D2B"/>
+          </a:solidFill>
+          <a:ln>
+            <a:noFill/>
+          </a:ln>
+          <a:effectLst/>
+        </p:spPr>
+        <p:style>
+          <a:lnRef idx="1">
+            <a:schemeClr val="accent1"/>
+          </a:lnRef>
+          <a:fillRef idx="3">
+            <a:schemeClr val="accent1"/>
+          </a:fillRef>
+          <a:effectRef idx="2">
+            <a:schemeClr val="accent1"/>
+          </a:effectRef>
+          <a:fontRef idx="minor">
+            <a:schemeClr val="lt1"/>
+          </a:fontRef>
+        </p:style>
+        <p:txBody>
+          <a:bodyPr rtlCol="0" anchor="ctr" wrap="square" lIns="101600" rIns="101600" tIns="50800" bIns="50800"/>
+          <a:lstStyle/>
+          <a:p>
+            <a:pPr algn="ctr">
+              <a:lnSpc>
+                <a:spcPct val="112000"/>
+              </a:lnSpc>
+            </a:pPr>
+            <a:r>
+              <a:rPr sz="1300" b="1">
+                <a:solidFill>
+                  <a:srgbClr val="FFFFFF"/>
+                </a:solidFill>
+                <a:latin typeface="맑은 고딕"/>
+              </a:rPr>
+              <a:t>Supabase</a:t>
+            </a:r>
+          </a:p>
+          <a:p>
+            <a:pPr algn="ctr">
+              <a:lnSpc>
+                <a:spcPct val="112000"/>
+              </a:lnSpc>
+            </a:pPr>
+            <a:r>
+              <a:rPr sz="1300" b="1">
+                <a:solidFill>
+                  <a:srgbClr val="FFFFFF"/>
+                </a:solidFill>
+                <a:latin typeface="맑은 고딕"/>
+              </a:rPr>
+              <a:t>Auth·Postgres·pgvector·Storage</a:t>
+            </a:r>
+          </a:p>
+        </p:txBody>
+      </p:sp>
+      <p:sp>
+        <p:nvSpPr>
+          <p:cNvPr id="13" name="Right Arrow 12"/>
+          <p:cNvSpPr/>
+          <p:nvPr/>
+        </p:nvSpPr>
+        <p:spPr>
+          <a:xfrm>
+            <a:off x="9418320" y="1947672"/>
+            <a:ext cx="182880" cy="256032"/>
+          </a:xfrm>
+          <a:prstGeom prst="rightArrow">
+            <a:avLst/>
+          </a:prstGeom>
+          <a:solidFill>
+            <a:srgbClr val="7CB342"/>
+          </a:solidFill>
+          <a:ln>
+            <a:noFill/>
+          </a:ln>
+          <a:effectLst/>
+        </p:spPr>
+        <p:style>
+          <a:lnRef idx="1">
+            <a:schemeClr val="accent1"/>
+          </a:lnRef>
+          <a:fillRef idx="3">
+            <a:schemeClr val="accent1"/>
+          </a:fillRef>
+          <a:effectRef idx="2">
+            <a:schemeClr val="accent1"/>
+          </a:effectRef>
+          <a:fontRef idx="minor">
+            <a:schemeClr val="lt1"/>
+          </a:fontRef>
+        </p:style>
+        <p:txBody>
+          <a:bodyPr rtlCol="0" anchor="ctr"/>
+          <a:lstStyle/>
+          <a:p>
+            <a:pPr algn="ctr"/>
+          </a:p>
+        </p:txBody>
+      </p:sp>
+      <p:sp>
+        <p:nvSpPr>
+          <p:cNvPr id="14" name="Rounded Rectangle 13"/>
+          <p:cNvSpPr/>
+          <p:nvPr/>
+        </p:nvSpPr>
+        <p:spPr>
+          <a:xfrm>
+            <a:off x="9619488" y="1600200"/>
+            <a:ext cx="2377440" cy="960120"/>
+          </a:xfrm>
+          <a:prstGeom prst="roundRect">
+            <a:avLst/>
+          </a:prstGeom>
+          <a:solidFill>
+            <a:srgbClr val="7CB342"/>
+          </a:solidFill>
+          <a:ln>
+            <a:noFill/>
+          </a:ln>
+          <a:effectLst/>
+        </p:spPr>
+        <p:style>
+          <a:lnRef idx="1">
+            <a:schemeClr val="accent1"/>
+          </a:lnRef>
+          <a:fillRef idx="3">
+            <a:schemeClr val="accent1"/>
+          </a:fillRef>
+          <a:effectRef idx="2">
+            <a:schemeClr val="accent1"/>
+          </a:effectRef>
+          <a:fontRef idx="minor">
+            <a:schemeClr val="lt1"/>
+          </a:fontRef>
+        </p:style>
+        <p:txBody>
+          <a:bodyPr rtlCol="0" anchor="ctr" wrap="square" lIns="101600" rIns="101600" tIns="50800" bIns="50800"/>
+          <a:lstStyle/>
+          <a:p>
+            <a:pPr algn="ctr">
+              <a:lnSpc>
+                <a:spcPct val="112000"/>
+              </a:lnSpc>
+            </a:pPr>
+            <a:r>
+              <a:rPr sz="1300" b="1">
+                <a:solidFill>
+                  <a:srgbClr val="1E4D2B"/>
+                </a:solidFill>
+                <a:latin typeface="맑은 고딕"/>
+              </a:rPr>
+              <a:t>OpenAI</a:t>
+            </a:r>
+          </a:p>
+          <a:p>
+            <a:pPr algn="ctr">
+              <a:lnSpc>
+                <a:spcPct val="112000"/>
+              </a:lnSpc>
+            </a:pPr>
+            <a:r>
+              <a:rPr sz="1300" b="1">
+                <a:solidFill>
+                  <a:srgbClr val="1E4D2B"/>
+                </a:solidFill>
+                <a:latin typeface="맑은 고딕"/>
+              </a:rPr>
+              <a:t>LLM·임베딩·Vision</a:t>
+            </a:r>
+          </a:p>
+        </p:txBody>
+      </p:sp>
+      <p:sp>
+        <p:nvSpPr>
+          <p:cNvPr id="15" name="Rounded Rectangle 14"/>
+          <p:cNvSpPr/>
+          <p:nvPr/>
+        </p:nvSpPr>
+        <p:spPr>
+          <a:xfrm>
+            <a:off x="548640" y="3063240"/>
+            <a:ext cx="3611880" cy="2286000"/>
           </a:xfrm>
           <a:prstGeom prst="roundRect">
             <a:avLst/>
@@ -14743,13 +15175,13 @@
               </a:spcAft>
             </a:pPr>
             <a:r>
-              <a:rPr sz="1450" b="1">
+              <a:rPr sz="1500" b="1">
                 <a:solidFill>
                   <a:srgbClr val="1E4D2B"/>
                 </a:solidFill>
                 <a:latin typeface="맑은 고딕"/>
               </a:rPr>
-              <a:t>결과 해석</a:t>
+              <a:t>Frontend — Vercel</a:t>
             </a:r>
           </a:p>
           <a:p>
@@ -14759,13 +15191,102 @@
               </a:lnSpc>
             </a:pPr>
             <a:r>
-              <a:rPr sz="1200" b="1">
+              <a:rPr sz="1250" b="0">
+                <a:solidFill>
+                  <a:srgbClr val="3A3A3A"/>
+                </a:solidFill>
+                <a:latin typeface="맑은 고딕"/>
+              </a:rPr>
+              <a:t>·  React + TypeScript + Vite</a:t>
+            </a:r>
+          </a:p>
+          <a:p>
+            <a:pPr algn="l">
+              <a:lnSpc>
+                <a:spcPct val="118000"/>
+              </a:lnSpc>
+            </a:pPr>
+            <a:r>
+              <a:rPr sz="1250" b="0">
+                <a:solidFill>
+                  <a:srgbClr val="3A3A3A"/>
+                </a:solidFill>
+                <a:latin typeface="맑은 고딕"/>
+              </a:rPr>
+              <a:t>·  로그인·식물 등록·대시보드·AI 상담 UI</a:t>
+            </a:r>
+          </a:p>
+          <a:p>
+            <a:pPr algn="l">
+              <a:lnSpc>
+                <a:spcPct val="118000"/>
+              </a:lnSpc>
+            </a:pPr>
+            <a:r>
+              <a:rPr sz="1250" b="0">
+                <a:solidFill>
+                  <a:srgbClr val="3A3A3A"/>
+                </a:solidFill>
+                <a:latin typeface="맑은 고딕"/>
+              </a:rPr>
+              <a:t>·  해시 라우팅 + 디자인 HTML 주입 구조</a:t>
+            </a:r>
+          </a:p>
+        </p:txBody>
+      </p:sp>
+      <p:sp>
+        <p:nvSpPr>
+          <p:cNvPr id="16" name="Rounded Rectangle 15"/>
+          <p:cNvSpPr/>
+          <p:nvPr/>
+        </p:nvSpPr>
+        <p:spPr>
+          <a:xfrm>
+            <a:off x="4361688" y="3063240"/>
+            <a:ext cx="3611880" cy="2286000"/>
+          </a:xfrm>
+          <a:prstGeom prst="roundRect">
+            <a:avLst/>
+          </a:prstGeom>
+          <a:solidFill>
+            <a:srgbClr val="F1F7F1"/>
+          </a:solidFill>
+          <a:ln>
+            <a:noFill/>
+          </a:ln>
+          <a:effectLst/>
+        </p:spPr>
+        <p:style>
+          <a:lnRef idx="1">
+            <a:schemeClr val="accent1"/>
+          </a:lnRef>
+          <a:fillRef idx="3">
+            <a:schemeClr val="accent1"/>
+          </a:fillRef>
+          <a:effectRef idx="2">
+            <a:schemeClr val="accent1"/>
+          </a:effectRef>
+          <a:fontRef idx="minor">
+            <a:schemeClr val="lt1"/>
+          </a:fontRef>
+        </p:style>
+        <p:txBody>
+          <a:bodyPr rtlCol="0" anchor="ctr" wrap="square" lIns="203200" rIns="203200" tIns="152400"/>
+          <a:lstStyle/>
+          <a:p>
+            <a:pPr algn="l">
+              <a:spcAft>
+                <a:spcPts val="600"/>
+              </a:spcAft>
+            </a:pPr>
+            <a:r>
+              <a:rPr sz="1500" b="1">
                 <a:solidFill>
                   <a:srgbClr val="1E4D2B"/>
                 </a:solidFill>
                 <a:latin typeface="맑은 고딕"/>
               </a:rPr>
-              <a:t>·  검색 정확도 3.58 → 4.83점 대폭 개선, 사진 반영 만점(5.00)</a:t>
+              <a:t>Backend — Render</a:t>
             </a:r>
           </a:p>
           <a:p>
@@ -14775,13 +15296,189 @@
               </a:lnSpc>
             </a:pPr>
             <a:r>
-              <a:rPr sz="1200" b="0">
+              <a:rPr sz="1250" b="0">
                 <a:solidFill>
                   <a:srgbClr val="3A3A3A"/>
                 </a:solidFill>
                 <a:latin typeface="맑은 고딕"/>
               </a:rPr>
-              <a:t>·  근거 없으면 답변 대신 안전한 거절을 택하는 구조로 전환</a:t>
+              <a:t>·  FastAPI + Pydantic</a:t>
+            </a:r>
+          </a:p>
+          <a:p>
+            <a:pPr algn="l">
+              <a:lnSpc>
+                <a:spcPct val="118000"/>
+              </a:lnSpc>
+            </a:pPr>
+            <a:r>
+              <a:rPr sz="1250" b="0">
+                <a:solidFill>
+                  <a:srgbClr val="3A3A3A"/>
+                </a:solidFill>
+                <a:latin typeface="맑은 고딕"/>
+              </a:rPr>
+              <a:t>·  Supabase JWT 인증 검증</a:t>
+            </a:r>
+          </a:p>
+          <a:p>
+            <a:pPr algn="l">
+              <a:lnSpc>
+                <a:spcPct val="118000"/>
+              </a:lnSpc>
+            </a:pPr>
+            <a:r>
+              <a:rPr sz="1250" b="0">
+                <a:solidFill>
+                  <a:srgbClr val="3A3A3A"/>
+                </a:solidFill>
+                <a:latin typeface="맑은 고딕"/>
+              </a:rPr>
+              <a:t>·  RAG 파이프라인(LangGraph) 실행</a:t>
+            </a:r>
+          </a:p>
+        </p:txBody>
+      </p:sp>
+      <p:sp>
+        <p:nvSpPr>
+          <p:cNvPr id="17" name="Rounded Rectangle 16"/>
+          <p:cNvSpPr/>
+          <p:nvPr/>
+        </p:nvSpPr>
+        <p:spPr>
+          <a:xfrm>
+            <a:off x="8174736" y="3063240"/>
+            <a:ext cx="3611880" cy="2286000"/>
+          </a:xfrm>
+          <a:prstGeom prst="roundRect">
+            <a:avLst/>
+          </a:prstGeom>
+          <a:solidFill>
+            <a:srgbClr val="F1F7F1"/>
+          </a:solidFill>
+          <a:ln>
+            <a:noFill/>
+          </a:ln>
+          <a:effectLst/>
+        </p:spPr>
+        <p:style>
+          <a:lnRef idx="1">
+            <a:schemeClr val="accent1"/>
+          </a:lnRef>
+          <a:fillRef idx="3">
+            <a:schemeClr val="accent1"/>
+          </a:fillRef>
+          <a:effectRef idx="2">
+            <a:schemeClr val="accent1"/>
+          </a:effectRef>
+          <a:fontRef idx="minor">
+            <a:schemeClr val="lt1"/>
+          </a:fontRef>
+        </p:style>
+        <p:txBody>
+          <a:bodyPr rtlCol="0" anchor="ctr" wrap="square" lIns="203200" rIns="203200" tIns="152400"/>
+          <a:lstStyle/>
+          <a:p>
+            <a:pPr algn="l">
+              <a:spcAft>
+                <a:spcPts val="600"/>
+              </a:spcAft>
+            </a:pPr>
+            <a:r>
+              <a:rPr sz="1500" b="1">
+                <a:solidFill>
+                  <a:srgbClr val="1E4D2B"/>
+                </a:solidFill>
+                <a:latin typeface="맑은 고딕"/>
+              </a:rPr>
+              <a:t>Supabase / OpenAI</a:t>
+            </a:r>
+          </a:p>
+          <a:p>
+            <a:pPr algn="l">
+              <a:lnSpc>
+                <a:spcPct val="118000"/>
+              </a:lnSpc>
+            </a:pPr>
+            <a:r>
+              <a:rPr sz="1250" b="0">
+                <a:solidFill>
+                  <a:srgbClr val="3A3A3A"/>
+                </a:solidFill>
+                <a:latin typeface="맑은 고딕"/>
+              </a:rPr>
+              <a:t>·  Auth·Postgres·Storage 통합</a:t>
+            </a:r>
+          </a:p>
+          <a:p>
+            <a:pPr algn="l">
+              <a:lnSpc>
+                <a:spcPct val="118000"/>
+              </a:lnSpc>
+            </a:pPr>
+            <a:r>
+              <a:rPr sz="1250" b="0">
+                <a:solidFill>
+                  <a:srgbClr val="3A3A3A"/>
+                </a:solidFill>
+                <a:latin typeface="맑은 고딕"/>
+              </a:rPr>
+              <a:t>·  pgvector 벡터 유사도 검색</a:t>
+            </a:r>
+          </a:p>
+          <a:p>
+            <a:pPr algn="l">
+              <a:lnSpc>
+                <a:spcPct val="118000"/>
+              </a:lnSpc>
+            </a:pPr>
+            <a:r>
+              <a:rPr sz="1250" b="0">
+                <a:solidFill>
+                  <a:srgbClr val="3A3A3A"/>
+                </a:solidFill>
+                <a:latin typeface="맑은 고딕"/>
+              </a:rPr>
+              <a:t>·  GPT-4o-mini 채팅·Vision·임베딩</a:t>
+            </a:r>
+          </a:p>
+        </p:txBody>
+      </p:sp>
+      <p:sp>
+        <p:nvSpPr>
+          <p:cNvPr id="18" name="TextBox 17"/>
+          <p:cNvSpPr txBox="1"/>
+          <p:nvPr/>
+        </p:nvSpPr>
+        <p:spPr>
+          <a:xfrm>
+            <a:off x="548640" y="5623560"/>
+            <a:ext cx="11064240" cy="731520"/>
+          </a:xfrm>
+          <a:prstGeom prst="rect">
+            <a:avLst/>
+          </a:prstGeom>
+          <a:noFill/>
+        </p:spPr>
+        <p:txBody>
+          <a:bodyPr wrap="square" anchor="t" lIns="101600" rIns="101600" tIns="50800" bIns="50800">
+            <a:spAutoFit/>
+          </a:bodyPr>
+          <a:lstStyle/>
+          <a:p>
+            <a:pPr algn="l">
+              <a:lnSpc>
+                <a:spcPct val="112000"/>
+              </a:lnSpc>
+            </a:pPr>
+            <a:r>
+              <a:rPr sz="1400" b="1">
+                <a:solidFill>
+                  <a:srgbClr val="3B7A57"/>
+                </a:solidFill>
+                <a:latin typeface="맑은 고딕"/>
+              </a:rPr>
+              <a:t>사용자 인증(JWT)부터 벡터 검색, 이미지 스토리지까지 Supabase로 통합 — service role key는 백엔드에서만 사용</a:t>
             </a:r>
           </a:p>
         </p:txBody>
